--- a/results/figures/Framework.pptx
+++ b/results/figures/Framework.pptx
@@ -189,6 +189,126 @@
       </pc:sldChg>
     </pc:docChg>
   </pc:docChgLst>
+  <pc:docChgLst>
+    <pc:chgData userId="590ce64e3c606c44" providerId="LiveId" clId="{57D0C72D-9690-42AA-92AA-7F1DC5274F66}"/>
+    <pc:docChg chg="undo custSel modSld">
+      <pc:chgData name="" userId="590ce64e3c606c44" providerId="LiveId" clId="{57D0C72D-9690-42AA-92AA-7F1DC5274F66}" dt="2026-06-22T09:47:52.641" v="56" actId="1076"/>
+      <pc:docMkLst>
+        <pc:docMk/>
+      </pc:docMkLst>
+      <pc:sldChg chg="addSp delSp modSp">
+        <pc:chgData name="" userId="590ce64e3c606c44" providerId="LiveId" clId="{57D0C72D-9690-42AA-92AA-7F1DC5274F66}" dt="2026-06-22T09:47:52.641" v="56" actId="1076"/>
+        <pc:sldMkLst>
+          <pc:docMk/>
+          <pc:sldMk cId="1871614477" sldId="257"/>
+        </pc:sldMkLst>
+        <pc:spChg chg="mod">
+          <ac:chgData name="" userId="590ce64e3c606c44" providerId="LiveId" clId="{57D0C72D-9690-42AA-92AA-7F1DC5274F66}" dt="2026-06-22T09:39:29.637" v="52" actId="164"/>
+          <ac:spMkLst>
+            <pc:docMk/>
+            <pc:sldMk cId="1871614477" sldId="257"/>
+            <ac:spMk id="3" creationId="{950B5D2C-A1CB-4F75-B12C-0935E807F9E5}"/>
+          </ac:spMkLst>
+        </pc:spChg>
+        <pc:spChg chg="mod">
+          <ac:chgData name="" userId="590ce64e3c606c44" providerId="LiveId" clId="{57D0C72D-9690-42AA-92AA-7F1DC5274F66}" dt="2026-06-22T09:39:46.953" v="53" actId="1076"/>
+          <ac:spMkLst>
+            <pc:docMk/>
+            <pc:sldMk cId="1871614477" sldId="257"/>
+            <ac:spMk id="104" creationId="{90714906-7CA0-4716-9D8A-CFBFBF710C12}"/>
+          </ac:spMkLst>
+        </pc:spChg>
+        <pc:spChg chg="mod">
+          <ac:chgData name="" userId="590ce64e3c606c44" providerId="LiveId" clId="{57D0C72D-9690-42AA-92AA-7F1DC5274F66}" dt="2026-06-22T09:37:45.131" v="38" actId="20577"/>
+          <ac:spMkLst>
+            <pc:docMk/>
+            <pc:sldMk cId="1871614477" sldId="257"/>
+            <ac:spMk id="328" creationId="{DE24ADCB-D0A1-6874-AEB2-B3D8BF9D9186}"/>
+          </ac:spMkLst>
+        </pc:spChg>
+        <pc:spChg chg="mod">
+          <ac:chgData name="" userId="590ce64e3c606c44" providerId="LiveId" clId="{57D0C72D-9690-42AA-92AA-7F1DC5274F66}" dt="2026-06-22T09:37:01.242" v="37" actId="1035"/>
+          <ac:spMkLst>
+            <pc:docMk/>
+            <pc:sldMk cId="1871614477" sldId="257"/>
+            <ac:spMk id="331" creationId="{62E12522-2912-702F-084E-8894481BD5A5}"/>
+          </ac:spMkLst>
+        </pc:spChg>
+        <pc:spChg chg="mod">
+          <ac:chgData name="" userId="590ce64e3c606c44" providerId="LiveId" clId="{57D0C72D-9690-42AA-92AA-7F1DC5274F66}" dt="2026-06-22T09:37:01.242" v="37" actId="1035"/>
+          <ac:spMkLst>
+            <pc:docMk/>
+            <pc:sldMk cId="1871614477" sldId="257"/>
+            <ac:spMk id="334" creationId="{0D002A98-678D-559A-85F1-42F06DCDC526}"/>
+          </ac:spMkLst>
+        </pc:spChg>
+        <pc:spChg chg="mod">
+          <ac:chgData name="" userId="590ce64e3c606c44" providerId="LiveId" clId="{57D0C72D-9690-42AA-92AA-7F1DC5274F66}" dt="2026-06-22T09:39:52.569" v="54" actId="20577"/>
+          <ac:spMkLst>
+            <pc:docMk/>
+            <pc:sldMk cId="1871614477" sldId="257"/>
+            <ac:spMk id="581" creationId="{1AAAE839-FF83-5298-2E80-4A59A29A30B8}"/>
+          </ac:spMkLst>
+        </pc:spChg>
+        <pc:grpChg chg="mod">
+          <ac:chgData name="" userId="590ce64e3c606c44" providerId="LiveId" clId="{57D0C72D-9690-42AA-92AA-7F1DC5274F66}" dt="2026-06-22T09:39:29.637" v="52" actId="164"/>
+          <ac:grpSpMkLst>
+            <pc:docMk/>
+            <pc:sldMk cId="1871614477" sldId="257"/>
+            <ac:grpSpMk id="6" creationId="{B67B98B7-AA7D-4054-A35C-EBEBA451798D}"/>
+          </ac:grpSpMkLst>
+        </pc:grpChg>
+        <pc:grpChg chg="add mod">
+          <ac:chgData name="" userId="590ce64e3c606c44" providerId="LiveId" clId="{57D0C72D-9690-42AA-92AA-7F1DC5274F66}" dt="2026-06-22T09:47:52.641" v="56" actId="1076"/>
+          <ac:grpSpMkLst>
+            <pc:docMk/>
+            <pc:sldMk cId="1871614477" sldId="257"/>
+            <ac:grpSpMk id="27" creationId="{467BFBA8-EE92-4CAA-816A-0A9B16098F36}"/>
+          </ac:grpSpMkLst>
+        </pc:grpChg>
+        <pc:picChg chg="add mod ord">
+          <ac:chgData name="" userId="590ce64e3c606c44" providerId="LiveId" clId="{57D0C72D-9690-42AA-92AA-7F1DC5274F66}" dt="2026-06-22T09:39:29.637" v="52" actId="164"/>
+          <ac:picMkLst>
+            <pc:docMk/>
+            <pc:sldMk cId="1871614477" sldId="257"/>
+            <ac:picMk id="7" creationId="{1D1D697D-4FB4-436C-B3C3-78494FA9B611}"/>
+          </ac:picMkLst>
+        </pc:picChg>
+        <pc:picChg chg="del">
+          <ac:chgData name="" userId="590ce64e3c606c44" providerId="LiveId" clId="{57D0C72D-9690-42AA-92AA-7F1DC5274F66}" dt="2026-06-22T09:38:51.360" v="39" actId="478"/>
+          <ac:picMkLst>
+            <pc:docMk/>
+            <pc:sldMk cId="1871614477" sldId="257"/>
+            <ac:picMk id="29" creationId="{722AC837-A471-B1A7-82B6-6782AC009D56}"/>
+          </ac:picMkLst>
+        </pc:picChg>
+        <pc:picChg chg="mod">
+          <ac:chgData name="" userId="590ce64e3c606c44" providerId="LiveId" clId="{57D0C72D-9690-42AA-92AA-7F1DC5274F66}" dt="2026-06-22T09:37:01.242" v="37" actId="1035"/>
+          <ac:picMkLst>
+            <pc:docMk/>
+            <pc:sldMk cId="1871614477" sldId="257"/>
+            <ac:picMk id="327" creationId="{BFAD329A-F157-C851-A448-6F3915596875}"/>
+          </ac:picMkLst>
+        </pc:picChg>
+        <pc:picChg chg="mod">
+          <ac:chgData name="" userId="590ce64e3c606c44" providerId="LiveId" clId="{57D0C72D-9690-42AA-92AA-7F1DC5274F66}" dt="2026-06-22T09:37:01.242" v="37" actId="1035"/>
+          <ac:picMkLst>
+            <pc:docMk/>
+            <pc:sldMk cId="1871614477" sldId="257"/>
+            <ac:picMk id="330" creationId="{88B2B981-FD46-955F-2397-969404FD4FDD}"/>
+          </ac:picMkLst>
+        </pc:picChg>
+        <pc:picChg chg="mod">
+          <ac:chgData name="" userId="590ce64e3c606c44" providerId="LiveId" clId="{57D0C72D-9690-42AA-92AA-7F1DC5274F66}" dt="2026-06-22T09:37:01.242" v="37" actId="1035"/>
+          <ac:picMkLst>
+            <pc:docMk/>
+            <pc:sldMk cId="1871614477" sldId="257"/>
+            <ac:picMk id="333" creationId="{2E5CEB06-1739-4FD5-DF10-B84F45DDA120}"/>
+          </ac:picMkLst>
+        </pc:picChg>
+      </pc:sldChg>
+    </pc:docChg>
+  </pc:docChgLst>
 </pc:chgInfo>
 </file>
 
@@ -274,7 +394,7 @@
           <a:p>
             <a:fld id="{E5572A82-488C-4C36-8FD9-120AE586E924}" type="datetimeFigureOut">
               <a:rPr lang="fr-FR" smtClean="0"/>
-              <a:t>18/06/2026</a:t>
+              <a:t>22/06/2026</a:t>
             </a:fld>
             <a:endParaRPr lang="fr-FR"/>
           </a:p>
@@ -756,7 +876,7 @@
           <a:p>
             <a:fld id="{60C86A2A-AFC1-4F0B-B30E-1018392D6654}" type="datetimeFigureOut">
               <a:rPr lang="en-GB" smtClean="0"/>
-              <a:t>18/06/2026</a:t>
+              <a:t>22/06/2026</a:t>
             </a:fld>
             <a:endParaRPr lang="en-GB"/>
           </a:p>
@@ -926,7 +1046,7 @@
           <a:p>
             <a:fld id="{60C86A2A-AFC1-4F0B-B30E-1018392D6654}" type="datetimeFigureOut">
               <a:rPr lang="en-GB" smtClean="0"/>
-              <a:t>18/06/2026</a:t>
+              <a:t>22/06/2026</a:t>
             </a:fld>
             <a:endParaRPr lang="en-GB"/>
           </a:p>
@@ -1106,7 +1226,7 @@
           <a:p>
             <a:fld id="{60C86A2A-AFC1-4F0B-B30E-1018392D6654}" type="datetimeFigureOut">
               <a:rPr lang="en-GB" smtClean="0"/>
-              <a:t>18/06/2026</a:t>
+              <a:t>22/06/2026</a:t>
             </a:fld>
             <a:endParaRPr lang="en-GB"/>
           </a:p>
@@ -1276,7 +1396,7 @@
           <a:p>
             <a:fld id="{60C86A2A-AFC1-4F0B-B30E-1018392D6654}" type="datetimeFigureOut">
               <a:rPr lang="en-GB" smtClean="0"/>
-              <a:t>18/06/2026</a:t>
+              <a:t>22/06/2026</a:t>
             </a:fld>
             <a:endParaRPr lang="en-GB"/>
           </a:p>
@@ -1520,7 +1640,7 @@
           <a:p>
             <a:fld id="{60C86A2A-AFC1-4F0B-B30E-1018392D6654}" type="datetimeFigureOut">
               <a:rPr lang="en-GB" smtClean="0"/>
-              <a:t>18/06/2026</a:t>
+              <a:t>22/06/2026</a:t>
             </a:fld>
             <a:endParaRPr lang="en-GB"/>
           </a:p>
@@ -1752,7 +1872,7 @@
           <a:p>
             <a:fld id="{60C86A2A-AFC1-4F0B-B30E-1018392D6654}" type="datetimeFigureOut">
               <a:rPr lang="en-GB" smtClean="0"/>
-              <a:t>18/06/2026</a:t>
+              <a:t>22/06/2026</a:t>
             </a:fld>
             <a:endParaRPr lang="en-GB"/>
           </a:p>
@@ -2119,7 +2239,7 @@
           <a:p>
             <a:fld id="{60C86A2A-AFC1-4F0B-B30E-1018392D6654}" type="datetimeFigureOut">
               <a:rPr lang="en-GB" smtClean="0"/>
-              <a:t>18/06/2026</a:t>
+              <a:t>22/06/2026</a:t>
             </a:fld>
             <a:endParaRPr lang="en-GB"/>
           </a:p>
@@ -2237,7 +2357,7 @@
           <a:p>
             <a:fld id="{60C86A2A-AFC1-4F0B-B30E-1018392D6654}" type="datetimeFigureOut">
               <a:rPr lang="en-GB" smtClean="0"/>
-              <a:t>18/06/2026</a:t>
+              <a:t>22/06/2026</a:t>
             </a:fld>
             <a:endParaRPr lang="en-GB"/>
           </a:p>
@@ -2332,7 +2452,7 @@
           <a:p>
             <a:fld id="{60C86A2A-AFC1-4F0B-B30E-1018392D6654}" type="datetimeFigureOut">
               <a:rPr lang="en-GB" smtClean="0"/>
-              <a:t>18/06/2026</a:t>
+              <a:t>22/06/2026</a:t>
             </a:fld>
             <a:endParaRPr lang="en-GB"/>
           </a:p>
@@ -2609,7 +2729,7 @@
           <a:p>
             <a:fld id="{60C86A2A-AFC1-4F0B-B30E-1018392D6654}" type="datetimeFigureOut">
               <a:rPr lang="en-GB" smtClean="0"/>
-              <a:t>18/06/2026</a:t>
+              <a:t>22/06/2026</a:t>
             </a:fld>
             <a:endParaRPr lang="en-GB"/>
           </a:p>
@@ -2866,7 +2986,7 @@
           <a:p>
             <a:fld id="{60C86A2A-AFC1-4F0B-B30E-1018392D6654}" type="datetimeFigureOut">
               <a:rPr lang="en-GB" smtClean="0"/>
-              <a:t>18/06/2026</a:t>
+              <a:t>22/06/2026</a:t>
             </a:fld>
             <a:endParaRPr lang="en-GB"/>
           </a:p>
@@ -3079,7 +3199,7 @@
           <a:p>
             <a:fld id="{60C86A2A-AFC1-4F0B-B30E-1018392D6654}" type="datetimeFigureOut">
               <a:rPr lang="en-GB" smtClean="0"/>
-              <a:t>18/06/2026</a:t>
+              <a:t>22/06/2026</a:t>
             </a:fld>
             <a:endParaRPr lang="en-GB"/>
           </a:p>
@@ -3486,10 +3606,10 @@
       </p:grpSpPr>
       <p:grpSp>
         <p:nvGrpSpPr>
-          <p:cNvPr id="6" name="Groupe 5">
+          <p:cNvPr id="27" name="Groupe 26">
             <a:extLst>
               <a:ext uri="{FF2B5EF4-FFF2-40B4-BE49-F238E27FC236}">
-                <a16:creationId xmlns:a16="http://schemas.microsoft.com/office/drawing/2014/main" id="{B67B98B7-AA7D-4054-A35C-EBEBA451798D}"/>
+                <a16:creationId xmlns:a16="http://schemas.microsoft.com/office/drawing/2014/main" id="{467BFBA8-EE92-4CAA-816A-0A9B16098F36}"/>
               </a:ext>
             </a:extLst>
           </p:cNvPr>
@@ -3498,18 +3618,54 @@
         </p:nvGrpSpPr>
         <p:grpSpPr>
           <a:xfrm>
-            <a:off x="175392" y="384388"/>
-            <a:ext cx="11534517" cy="7614116"/>
-            <a:chOff x="114144" y="173373"/>
-            <a:chExt cx="11534517" cy="7614116"/>
+            <a:off x="216883" y="384388"/>
+            <a:ext cx="11799725" cy="14246013"/>
+            <a:chOff x="216883" y="384388"/>
+            <a:chExt cx="11799725" cy="14246013"/>
           </a:xfrm>
         </p:grpSpPr>
+        <p:pic>
+          <p:nvPicPr>
+            <p:cNvPr id="7" name="Image 6">
+              <a:extLst>
+                <a:ext uri="{FF2B5EF4-FFF2-40B4-BE49-F238E27FC236}">
+                  <a16:creationId xmlns:a16="http://schemas.microsoft.com/office/drawing/2014/main" id="{1D1D697D-4FB4-436C-B3C3-78494FA9B611}"/>
+                </a:ext>
+              </a:extLst>
+            </p:cNvPr>
+            <p:cNvPicPr>
+              <a:picLocks noChangeAspect="1"/>
+            </p:cNvPicPr>
+            <p:nvPr/>
+          </p:nvPicPr>
+          <p:blipFill>
+            <a:blip r:embed="rId3">
+              <a:extLst>
+                <a:ext uri="{28A0092B-C50C-407E-A947-70E740481C1C}">
+                  <a14:useLocalDpi xmlns:a14="http://schemas.microsoft.com/office/drawing/2010/main" val="0"/>
+                </a:ext>
+              </a:extLst>
+            </a:blip>
+            <a:stretch>
+              <a:fillRect/>
+            </a:stretch>
+          </p:blipFill>
+          <p:spPr>
+            <a:xfrm>
+              <a:off x="2011885" y="8219600"/>
+              <a:ext cx="9868449" cy="6344003"/>
+            </a:xfrm>
+            <a:prstGeom prst="rect">
+              <a:avLst/>
+            </a:prstGeom>
+          </p:spPr>
+        </p:pic>
         <p:grpSp>
           <p:nvGrpSpPr>
-            <p:cNvPr id="11" name="Groupe 10">
+            <p:cNvPr id="6" name="Groupe 5">
               <a:extLst>
                 <a:ext uri="{FF2B5EF4-FFF2-40B4-BE49-F238E27FC236}">
-                  <a16:creationId xmlns:a16="http://schemas.microsoft.com/office/drawing/2014/main" id="{5AA95590-8A1E-BB8B-3E55-FFC868BABE65}"/>
+                  <a16:creationId xmlns:a16="http://schemas.microsoft.com/office/drawing/2014/main" id="{B67B98B7-AA7D-4054-A35C-EBEBA451798D}"/>
                 </a:ext>
               </a:extLst>
             </p:cNvPr>
@@ -3518,18 +3674,1075 @@
           </p:nvGrpSpPr>
           <p:grpSpPr>
             <a:xfrm>
-              <a:off x="2219654" y="516335"/>
-              <a:ext cx="1978324" cy="1615402"/>
-              <a:chOff x="2086605" y="549463"/>
-              <a:chExt cx="1978324" cy="1615402"/>
+              <a:off x="216883" y="384388"/>
+              <a:ext cx="11493026" cy="8081981"/>
+              <a:chOff x="155635" y="173373"/>
+              <a:chExt cx="11493026" cy="8081981"/>
             </a:xfrm>
           </p:grpSpPr>
+          <p:grpSp>
+            <p:nvGrpSpPr>
+              <p:cNvPr id="11" name="Groupe 10">
+                <a:extLst>
+                  <a:ext uri="{FF2B5EF4-FFF2-40B4-BE49-F238E27FC236}">
+                    <a16:creationId xmlns:a16="http://schemas.microsoft.com/office/drawing/2014/main" id="{5AA95590-8A1E-BB8B-3E55-FFC868BABE65}"/>
+                  </a:ext>
+                </a:extLst>
+              </p:cNvPr>
+              <p:cNvGrpSpPr/>
+              <p:nvPr/>
+            </p:nvGrpSpPr>
+            <p:grpSpPr>
+              <a:xfrm>
+                <a:off x="2219654" y="516335"/>
+                <a:ext cx="1978324" cy="1615402"/>
+                <a:chOff x="2086605" y="549463"/>
+                <a:chExt cx="1978324" cy="1615402"/>
+              </a:xfrm>
+            </p:grpSpPr>
+            <p:sp>
+              <p:nvSpPr>
+                <p:cNvPr id="2" name="Rectangle 1">
+                  <a:extLst>
+                    <a:ext uri="{FF2B5EF4-FFF2-40B4-BE49-F238E27FC236}">
+                      <a16:creationId xmlns:a16="http://schemas.microsoft.com/office/drawing/2014/main" id="{B6B95D7F-9864-13F3-A911-AC64863EF054}"/>
+                    </a:ext>
+                  </a:extLst>
+                </p:cNvPr>
+                <p:cNvSpPr/>
+                <p:nvPr/>
+              </p:nvSpPr>
+              <p:spPr>
+                <a:xfrm>
+                  <a:off x="2086605" y="604059"/>
+                  <a:ext cx="1978324" cy="1414732"/>
+                </a:xfrm>
+                <a:prstGeom prst="rect">
+                  <a:avLst/>
+                </a:prstGeom>
+                <a:noFill/>
+                <a:ln>
+                  <a:solidFill>
+                    <a:schemeClr val="tx1">
+                      <a:lumMod val="95000"/>
+                      <a:lumOff val="5000"/>
+                    </a:schemeClr>
+                  </a:solidFill>
+                </a:ln>
+              </p:spPr>
+              <p:style>
+                <a:lnRef idx="2">
+                  <a:schemeClr val="accent1">
+                    <a:shade val="15000"/>
+                  </a:schemeClr>
+                </a:lnRef>
+                <a:fillRef idx="1">
+                  <a:schemeClr val="accent1"/>
+                </a:fillRef>
+                <a:effectRef idx="0">
+                  <a:schemeClr val="accent1"/>
+                </a:effectRef>
+                <a:fontRef idx="minor">
+                  <a:schemeClr val="lt1"/>
+                </a:fontRef>
+              </p:style>
+              <p:txBody>
+                <a:bodyPr rtlCol="0" anchor="ctr"/>
+                <a:lstStyle/>
+                <a:p>
+                  <a:pPr algn="ctr"/>
+                  <a:endParaRPr lang="en-GB"/>
+                </a:p>
+              </p:txBody>
+            </p:sp>
+            <p:cxnSp>
+              <p:nvCxnSpPr>
+                <p:cNvPr id="4" name="Connecteur droit 3">
+                  <a:extLst>
+                    <a:ext uri="{FF2B5EF4-FFF2-40B4-BE49-F238E27FC236}">
+                      <a16:creationId xmlns:a16="http://schemas.microsoft.com/office/drawing/2014/main" id="{B88AB7B7-59F2-6EC1-E586-028D40C8C157}"/>
+                    </a:ext>
+                  </a:extLst>
+                </p:cNvPr>
+                <p:cNvCxnSpPr>
+                  <a:cxnSpLocks/>
+                </p:cNvCxnSpPr>
+                <p:nvPr/>
+              </p:nvCxnSpPr>
+              <p:spPr>
+                <a:xfrm>
+                  <a:off x="2449513" y="604059"/>
+                  <a:ext cx="0" cy="1414732"/>
+                </a:xfrm>
+                <a:prstGeom prst="line">
+                  <a:avLst/>
+                </a:prstGeom>
+              </p:spPr>
+              <p:style>
+                <a:lnRef idx="2">
+                  <a:schemeClr val="dk1"/>
+                </a:lnRef>
+                <a:fillRef idx="0">
+                  <a:schemeClr val="dk1"/>
+                </a:fillRef>
+                <a:effectRef idx="1">
+                  <a:schemeClr val="dk1"/>
+                </a:effectRef>
+                <a:fontRef idx="minor">
+                  <a:schemeClr val="tx1"/>
+                </a:fontRef>
+              </p:style>
+            </p:cxnSp>
+            <p:cxnSp>
+              <p:nvCxnSpPr>
+                <p:cNvPr id="8" name="Connecteur droit 7">
+                  <a:extLst>
+                    <a:ext uri="{FF2B5EF4-FFF2-40B4-BE49-F238E27FC236}">
+                      <a16:creationId xmlns:a16="http://schemas.microsoft.com/office/drawing/2014/main" id="{EEAB31D4-0F7F-4CED-8B50-B9B27D9018FC}"/>
+                    </a:ext>
+                  </a:extLst>
+                </p:cNvPr>
+                <p:cNvCxnSpPr/>
+                <p:nvPr/>
+              </p:nvCxnSpPr>
+              <p:spPr>
+                <a:xfrm>
+                  <a:off x="2086605" y="833438"/>
+                  <a:ext cx="1978324" cy="0"/>
+                </a:xfrm>
+                <a:prstGeom prst="line">
+                  <a:avLst/>
+                </a:prstGeom>
+              </p:spPr>
+              <p:style>
+                <a:lnRef idx="2">
+                  <a:schemeClr val="dk1"/>
+                </a:lnRef>
+                <a:fillRef idx="0">
+                  <a:schemeClr val="dk1"/>
+                </a:fillRef>
+                <a:effectRef idx="1">
+                  <a:schemeClr val="dk1"/>
+                </a:effectRef>
+                <a:fontRef idx="minor">
+                  <a:schemeClr val="tx1"/>
+                </a:fontRef>
+              </p:style>
+            </p:cxnSp>
+            <p:sp>
+              <p:nvSpPr>
+                <p:cNvPr id="9" name="ZoneTexte 8">
+                  <a:extLst>
+                    <a:ext uri="{FF2B5EF4-FFF2-40B4-BE49-F238E27FC236}">
+                      <a16:creationId xmlns:a16="http://schemas.microsoft.com/office/drawing/2014/main" id="{8817A92F-9CCF-16AA-F78A-169B313864C7}"/>
+                    </a:ext>
+                  </a:extLst>
+                </p:cNvPr>
+                <p:cNvSpPr txBox="1"/>
+                <p:nvPr/>
+              </p:nvSpPr>
+              <p:spPr>
+                <a:xfrm>
+                  <a:off x="2449513" y="585009"/>
+                  <a:ext cx="1615402" cy="261610"/>
+                </a:xfrm>
+                <a:prstGeom prst="rect">
+                  <a:avLst/>
+                </a:prstGeom>
+                <a:noFill/>
+              </p:spPr>
+              <p:txBody>
+                <a:bodyPr wrap="square" rtlCol="0">
+                  <a:spAutoFit/>
+                </a:bodyPr>
+                <a:lstStyle/>
+                <a:p>
+                  <a:pPr algn="ctr"/>
+                  <a:r>
+                    <a:rPr lang="en-US" sz="1100" dirty="0">
+                      <a:latin typeface="Arial" panose="020B0604020202020204" pitchFamily="34" charset="0"/>
+                      <a:cs typeface="Arial" panose="020B0604020202020204" pitchFamily="34" charset="0"/>
+                    </a:rPr>
+                    <a:t>Traits</a:t>
+                  </a:r>
+                  <a:endParaRPr lang="en-GB" sz="1100" dirty="0">
+                    <a:latin typeface="Arial" panose="020B0604020202020204" pitchFamily="34" charset="0"/>
+                    <a:cs typeface="Arial" panose="020B0604020202020204" pitchFamily="34" charset="0"/>
+                  </a:endParaRPr>
+                </a:p>
+              </p:txBody>
+            </p:sp>
+            <p:sp>
+              <p:nvSpPr>
+                <p:cNvPr id="10" name="ZoneTexte 9">
+                  <a:extLst>
+                    <a:ext uri="{FF2B5EF4-FFF2-40B4-BE49-F238E27FC236}">
+                      <a16:creationId xmlns:a16="http://schemas.microsoft.com/office/drawing/2014/main" id="{F8E02931-4918-C178-B79C-611D49EBD330}"/>
+                    </a:ext>
+                  </a:extLst>
+                </p:cNvPr>
+                <p:cNvSpPr txBox="1"/>
+                <p:nvPr/>
+              </p:nvSpPr>
+              <p:spPr>
+                <a:xfrm rot="16200000">
+                  <a:off x="1460358" y="1226359"/>
+                  <a:ext cx="1615402" cy="261610"/>
+                </a:xfrm>
+                <a:prstGeom prst="rect">
+                  <a:avLst/>
+                </a:prstGeom>
+                <a:noFill/>
+              </p:spPr>
+              <p:txBody>
+                <a:bodyPr wrap="square" rtlCol="0">
+                  <a:spAutoFit/>
+                </a:bodyPr>
+                <a:lstStyle/>
+                <a:p>
+                  <a:pPr algn="ctr"/>
+                  <a:r>
+                    <a:rPr lang="en-US" sz="1100" dirty="0">
+                      <a:latin typeface="Arial" panose="020B0604020202020204" pitchFamily="34" charset="0"/>
+                      <a:cs typeface="Arial" panose="020B0604020202020204" pitchFamily="34" charset="0"/>
+                    </a:rPr>
+                    <a:t>Species</a:t>
+                  </a:r>
+                  <a:endParaRPr lang="en-GB" sz="1100" dirty="0">
+                    <a:latin typeface="Arial" panose="020B0604020202020204" pitchFamily="34" charset="0"/>
+                    <a:cs typeface="Arial" panose="020B0604020202020204" pitchFamily="34" charset="0"/>
+                  </a:endParaRPr>
+                </a:p>
+              </p:txBody>
+            </p:sp>
+          </p:grpSp>
+          <p:grpSp>
+            <p:nvGrpSpPr>
+              <p:cNvPr id="12" name="Groupe 11">
+                <a:extLst>
+                  <a:ext uri="{FF2B5EF4-FFF2-40B4-BE49-F238E27FC236}">
+                    <a16:creationId xmlns:a16="http://schemas.microsoft.com/office/drawing/2014/main" id="{DE7FEBB4-48EC-BDCF-2037-BD27ACC875B9}"/>
+                  </a:ext>
+                </a:extLst>
+              </p:cNvPr>
+              <p:cNvGrpSpPr/>
+              <p:nvPr/>
+            </p:nvGrpSpPr>
+            <p:grpSpPr>
+              <a:xfrm>
+                <a:off x="5736668" y="479453"/>
+                <a:ext cx="1978324" cy="1615402"/>
+                <a:chOff x="2086605" y="549463"/>
+                <a:chExt cx="1978324" cy="1615402"/>
+              </a:xfrm>
+            </p:grpSpPr>
+            <p:sp>
+              <p:nvSpPr>
+                <p:cNvPr id="13" name="Rectangle 12">
+                  <a:extLst>
+                    <a:ext uri="{FF2B5EF4-FFF2-40B4-BE49-F238E27FC236}">
+                      <a16:creationId xmlns:a16="http://schemas.microsoft.com/office/drawing/2014/main" id="{77CB7CCB-5424-937A-DF9F-9C9F3EDB74C1}"/>
+                    </a:ext>
+                  </a:extLst>
+                </p:cNvPr>
+                <p:cNvSpPr/>
+                <p:nvPr/>
+              </p:nvSpPr>
+              <p:spPr>
+                <a:xfrm>
+                  <a:off x="2086605" y="604059"/>
+                  <a:ext cx="1978324" cy="1414732"/>
+                </a:xfrm>
+                <a:prstGeom prst="rect">
+                  <a:avLst/>
+                </a:prstGeom>
+                <a:noFill/>
+                <a:ln>
+                  <a:solidFill>
+                    <a:schemeClr val="tx1">
+                      <a:lumMod val="95000"/>
+                      <a:lumOff val="5000"/>
+                    </a:schemeClr>
+                  </a:solidFill>
+                </a:ln>
+              </p:spPr>
+              <p:style>
+                <a:lnRef idx="2">
+                  <a:schemeClr val="accent1">
+                    <a:shade val="15000"/>
+                  </a:schemeClr>
+                </a:lnRef>
+                <a:fillRef idx="1">
+                  <a:schemeClr val="accent1"/>
+                </a:fillRef>
+                <a:effectRef idx="0">
+                  <a:schemeClr val="accent1"/>
+                </a:effectRef>
+                <a:fontRef idx="minor">
+                  <a:schemeClr val="lt1"/>
+                </a:fontRef>
+              </p:style>
+              <p:txBody>
+                <a:bodyPr rtlCol="0" anchor="ctr"/>
+                <a:lstStyle/>
+                <a:p>
+                  <a:pPr algn="ctr"/>
+                  <a:endParaRPr lang="en-GB"/>
+                </a:p>
+              </p:txBody>
+            </p:sp>
+            <p:cxnSp>
+              <p:nvCxnSpPr>
+                <p:cNvPr id="14" name="Connecteur droit 13">
+                  <a:extLst>
+                    <a:ext uri="{FF2B5EF4-FFF2-40B4-BE49-F238E27FC236}">
+                      <a16:creationId xmlns:a16="http://schemas.microsoft.com/office/drawing/2014/main" id="{634789B7-16FF-2E17-8776-D95F9CEC3C5E}"/>
+                    </a:ext>
+                  </a:extLst>
+                </p:cNvPr>
+                <p:cNvCxnSpPr>
+                  <a:cxnSpLocks/>
+                </p:cNvCxnSpPr>
+                <p:nvPr/>
+              </p:nvCxnSpPr>
+              <p:spPr>
+                <a:xfrm>
+                  <a:off x="2449513" y="604059"/>
+                  <a:ext cx="0" cy="1414732"/>
+                </a:xfrm>
+                <a:prstGeom prst="line">
+                  <a:avLst/>
+                </a:prstGeom>
+              </p:spPr>
+              <p:style>
+                <a:lnRef idx="2">
+                  <a:schemeClr val="dk1"/>
+                </a:lnRef>
+                <a:fillRef idx="0">
+                  <a:schemeClr val="dk1"/>
+                </a:fillRef>
+                <a:effectRef idx="1">
+                  <a:schemeClr val="dk1"/>
+                </a:effectRef>
+                <a:fontRef idx="minor">
+                  <a:schemeClr val="tx1"/>
+                </a:fontRef>
+              </p:style>
+            </p:cxnSp>
+            <p:cxnSp>
+              <p:nvCxnSpPr>
+                <p:cNvPr id="15" name="Connecteur droit 14">
+                  <a:extLst>
+                    <a:ext uri="{FF2B5EF4-FFF2-40B4-BE49-F238E27FC236}">
+                      <a16:creationId xmlns:a16="http://schemas.microsoft.com/office/drawing/2014/main" id="{60713A28-D1B1-8E82-05A2-1BA299DE68AE}"/>
+                    </a:ext>
+                  </a:extLst>
+                </p:cNvPr>
+                <p:cNvCxnSpPr/>
+                <p:nvPr/>
+              </p:nvCxnSpPr>
+              <p:spPr>
+                <a:xfrm>
+                  <a:off x="2086605" y="833438"/>
+                  <a:ext cx="1978324" cy="0"/>
+                </a:xfrm>
+                <a:prstGeom prst="line">
+                  <a:avLst/>
+                </a:prstGeom>
+              </p:spPr>
+              <p:style>
+                <a:lnRef idx="2">
+                  <a:schemeClr val="dk1"/>
+                </a:lnRef>
+                <a:fillRef idx="0">
+                  <a:schemeClr val="dk1"/>
+                </a:fillRef>
+                <a:effectRef idx="1">
+                  <a:schemeClr val="dk1"/>
+                </a:effectRef>
+                <a:fontRef idx="minor">
+                  <a:schemeClr val="tx1"/>
+                </a:fontRef>
+              </p:style>
+            </p:cxnSp>
+            <p:sp>
+              <p:nvSpPr>
+                <p:cNvPr id="16" name="ZoneTexte 15">
+                  <a:extLst>
+                    <a:ext uri="{FF2B5EF4-FFF2-40B4-BE49-F238E27FC236}">
+                      <a16:creationId xmlns:a16="http://schemas.microsoft.com/office/drawing/2014/main" id="{DB12CD71-6729-E1D1-CF45-AEBF0FDE4E84}"/>
+                    </a:ext>
+                  </a:extLst>
+                </p:cNvPr>
+                <p:cNvSpPr txBox="1"/>
+                <p:nvPr/>
+              </p:nvSpPr>
+              <p:spPr>
+                <a:xfrm>
+                  <a:off x="2449513" y="585009"/>
+                  <a:ext cx="1615402" cy="261610"/>
+                </a:xfrm>
+                <a:prstGeom prst="rect">
+                  <a:avLst/>
+                </a:prstGeom>
+                <a:noFill/>
+              </p:spPr>
+              <p:txBody>
+                <a:bodyPr wrap="square" rtlCol="0">
+                  <a:spAutoFit/>
+                </a:bodyPr>
+                <a:lstStyle/>
+                <a:p>
+                  <a:pPr algn="ctr"/>
+                  <a:r>
+                    <a:rPr lang="en-US" sz="1100" dirty="0">
+                      <a:latin typeface="Arial" panose="020B0604020202020204" pitchFamily="34" charset="0"/>
+                      <a:cs typeface="Arial" panose="020B0604020202020204" pitchFamily="34" charset="0"/>
+                    </a:rPr>
+                    <a:t>Traits</a:t>
+                  </a:r>
+                  <a:endParaRPr lang="en-GB" sz="1100" dirty="0">
+                    <a:latin typeface="Arial" panose="020B0604020202020204" pitchFamily="34" charset="0"/>
+                    <a:cs typeface="Arial" panose="020B0604020202020204" pitchFamily="34" charset="0"/>
+                  </a:endParaRPr>
+                </a:p>
+              </p:txBody>
+            </p:sp>
+            <p:sp>
+              <p:nvSpPr>
+                <p:cNvPr id="17" name="ZoneTexte 16">
+                  <a:extLst>
+                    <a:ext uri="{FF2B5EF4-FFF2-40B4-BE49-F238E27FC236}">
+                      <a16:creationId xmlns:a16="http://schemas.microsoft.com/office/drawing/2014/main" id="{2148F6CE-4927-8AC8-61A8-0DFB87A7826E}"/>
+                    </a:ext>
+                  </a:extLst>
+                </p:cNvPr>
+                <p:cNvSpPr txBox="1"/>
+                <p:nvPr/>
+              </p:nvSpPr>
+              <p:spPr>
+                <a:xfrm rot="16200000">
+                  <a:off x="1460358" y="1226359"/>
+                  <a:ext cx="1615402" cy="261610"/>
+                </a:xfrm>
+                <a:prstGeom prst="rect">
+                  <a:avLst/>
+                </a:prstGeom>
+                <a:noFill/>
+              </p:spPr>
+              <p:txBody>
+                <a:bodyPr wrap="square" rtlCol="0">
+                  <a:spAutoFit/>
+                </a:bodyPr>
+                <a:lstStyle/>
+                <a:p>
+                  <a:pPr algn="ctr"/>
+                  <a:r>
+                    <a:rPr lang="en-US" sz="1100" dirty="0">
+                      <a:latin typeface="Arial" panose="020B0604020202020204" pitchFamily="34" charset="0"/>
+                      <a:cs typeface="Arial" panose="020B0604020202020204" pitchFamily="34" charset="0"/>
+                    </a:rPr>
+                    <a:t>Species</a:t>
+                  </a:r>
+                  <a:endParaRPr lang="en-GB" sz="1100" dirty="0">
+                    <a:latin typeface="Arial" panose="020B0604020202020204" pitchFamily="34" charset="0"/>
+                    <a:cs typeface="Arial" panose="020B0604020202020204" pitchFamily="34" charset="0"/>
+                  </a:endParaRPr>
+                </a:p>
+              </p:txBody>
+            </p:sp>
+          </p:grpSp>
+          <p:grpSp>
+            <p:nvGrpSpPr>
+              <p:cNvPr id="18" name="Groupe 17">
+                <a:extLst>
+                  <a:ext uri="{FF2B5EF4-FFF2-40B4-BE49-F238E27FC236}">
+                    <a16:creationId xmlns:a16="http://schemas.microsoft.com/office/drawing/2014/main" id="{65842CA2-903B-9A40-3399-730C25323FC7}"/>
+                  </a:ext>
+                </a:extLst>
+              </p:cNvPr>
+              <p:cNvGrpSpPr/>
+              <p:nvPr/>
+            </p:nvGrpSpPr>
+            <p:grpSpPr>
+              <a:xfrm>
+                <a:off x="9273126" y="424857"/>
+                <a:ext cx="1978324" cy="1615402"/>
+                <a:chOff x="2086605" y="549463"/>
+                <a:chExt cx="1978324" cy="1615402"/>
+              </a:xfrm>
+            </p:grpSpPr>
+            <p:sp>
+              <p:nvSpPr>
+                <p:cNvPr id="19" name="Rectangle 18">
+                  <a:extLst>
+                    <a:ext uri="{FF2B5EF4-FFF2-40B4-BE49-F238E27FC236}">
+                      <a16:creationId xmlns:a16="http://schemas.microsoft.com/office/drawing/2014/main" id="{1B45EB7A-44C0-A9EA-80B9-7AB235F61677}"/>
+                    </a:ext>
+                  </a:extLst>
+                </p:cNvPr>
+                <p:cNvSpPr/>
+                <p:nvPr/>
+              </p:nvSpPr>
+              <p:spPr>
+                <a:xfrm>
+                  <a:off x="2086605" y="604059"/>
+                  <a:ext cx="1978324" cy="1414732"/>
+                </a:xfrm>
+                <a:prstGeom prst="rect">
+                  <a:avLst/>
+                </a:prstGeom>
+                <a:noFill/>
+                <a:ln>
+                  <a:solidFill>
+                    <a:schemeClr val="tx1">
+                      <a:lumMod val="95000"/>
+                      <a:lumOff val="5000"/>
+                    </a:schemeClr>
+                  </a:solidFill>
+                </a:ln>
+              </p:spPr>
+              <p:style>
+                <a:lnRef idx="2">
+                  <a:schemeClr val="accent1">
+                    <a:shade val="15000"/>
+                  </a:schemeClr>
+                </a:lnRef>
+                <a:fillRef idx="1">
+                  <a:schemeClr val="accent1"/>
+                </a:fillRef>
+                <a:effectRef idx="0">
+                  <a:schemeClr val="accent1"/>
+                </a:effectRef>
+                <a:fontRef idx="minor">
+                  <a:schemeClr val="lt1"/>
+                </a:fontRef>
+              </p:style>
+              <p:txBody>
+                <a:bodyPr rtlCol="0" anchor="ctr"/>
+                <a:lstStyle/>
+                <a:p>
+                  <a:pPr algn="ctr"/>
+                  <a:endParaRPr lang="en-GB"/>
+                </a:p>
+              </p:txBody>
+            </p:sp>
+            <p:cxnSp>
+              <p:nvCxnSpPr>
+                <p:cNvPr id="20" name="Connecteur droit 19">
+                  <a:extLst>
+                    <a:ext uri="{FF2B5EF4-FFF2-40B4-BE49-F238E27FC236}">
+                      <a16:creationId xmlns:a16="http://schemas.microsoft.com/office/drawing/2014/main" id="{E885B428-4F02-989C-DF0B-D59123327F2F}"/>
+                    </a:ext>
+                  </a:extLst>
+                </p:cNvPr>
+                <p:cNvCxnSpPr>
+                  <a:cxnSpLocks/>
+                </p:cNvCxnSpPr>
+                <p:nvPr/>
+              </p:nvCxnSpPr>
+              <p:spPr>
+                <a:xfrm>
+                  <a:off x="2449513" y="604059"/>
+                  <a:ext cx="0" cy="1414732"/>
+                </a:xfrm>
+                <a:prstGeom prst="line">
+                  <a:avLst/>
+                </a:prstGeom>
+              </p:spPr>
+              <p:style>
+                <a:lnRef idx="2">
+                  <a:schemeClr val="dk1"/>
+                </a:lnRef>
+                <a:fillRef idx="0">
+                  <a:schemeClr val="dk1"/>
+                </a:fillRef>
+                <a:effectRef idx="1">
+                  <a:schemeClr val="dk1"/>
+                </a:effectRef>
+                <a:fontRef idx="minor">
+                  <a:schemeClr val="tx1"/>
+                </a:fontRef>
+              </p:style>
+            </p:cxnSp>
+            <p:cxnSp>
+              <p:nvCxnSpPr>
+                <p:cNvPr id="21" name="Connecteur droit 20">
+                  <a:extLst>
+                    <a:ext uri="{FF2B5EF4-FFF2-40B4-BE49-F238E27FC236}">
+                      <a16:creationId xmlns:a16="http://schemas.microsoft.com/office/drawing/2014/main" id="{9BFE3960-781C-DBD1-559C-D356434610A3}"/>
+                    </a:ext>
+                  </a:extLst>
+                </p:cNvPr>
+                <p:cNvCxnSpPr/>
+                <p:nvPr/>
+              </p:nvCxnSpPr>
+              <p:spPr>
+                <a:xfrm>
+                  <a:off x="2086605" y="833438"/>
+                  <a:ext cx="1978324" cy="0"/>
+                </a:xfrm>
+                <a:prstGeom prst="line">
+                  <a:avLst/>
+                </a:prstGeom>
+              </p:spPr>
+              <p:style>
+                <a:lnRef idx="2">
+                  <a:schemeClr val="dk1"/>
+                </a:lnRef>
+                <a:fillRef idx="0">
+                  <a:schemeClr val="dk1"/>
+                </a:fillRef>
+                <a:effectRef idx="1">
+                  <a:schemeClr val="dk1"/>
+                </a:effectRef>
+                <a:fontRef idx="minor">
+                  <a:schemeClr val="tx1"/>
+                </a:fontRef>
+              </p:style>
+            </p:cxnSp>
+            <p:sp>
+              <p:nvSpPr>
+                <p:cNvPr id="22" name="ZoneTexte 21">
+                  <a:extLst>
+                    <a:ext uri="{FF2B5EF4-FFF2-40B4-BE49-F238E27FC236}">
+                      <a16:creationId xmlns:a16="http://schemas.microsoft.com/office/drawing/2014/main" id="{B37F0A35-4476-519D-6C2E-4179FCAA177D}"/>
+                    </a:ext>
+                  </a:extLst>
+                </p:cNvPr>
+                <p:cNvSpPr txBox="1"/>
+                <p:nvPr/>
+              </p:nvSpPr>
+              <p:spPr>
+                <a:xfrm>
+                  <a:off x="2449513" y="585009"/>
+                  <a:ext cx="1615402" cy="261610"/>
+                </a:xfrm>
+                <a:prstGeom prst="rect">
+                  <a:avLst/>
+                </a:prstGeom>
+                <a:noFill/>
+              </p:spPr>
+              <p:txBody>
+                <a:bodyPr wrap="square" rtlCol="0">
+                  <a:spAutoFit/>
+                </a:bodyPr>
+                <a:lstStyle/>
+                <a:p>
+                  <a:pPr algn="ctr"/>
+                  <a:r>
+                    <a:rPr lang="en-US" sz="1100" dirty="0">
+                      <a:latin typeface="Arial" panose="020B0604020202020204" pitchFamily="34" charset="0"/>
+                      <a:cs typeface="Arial" panose="020B0604020202020204" pitchFamily="34" charset="0"/>
+                    </a:rPr>
+                    <a:t>Traits</a:t>
+                  </a:r>
+                  <a:endParaRPr lang="en-GB" sz="1100" dirty="0">
+                    <a:latin typeface="Arial" panose="020B0604020202020204" pitchFamily="34" charset="0"/>
+                    <a:cs typeface="Arial" panose="020B0604020202020204" pitchFamily="34" charset="0"/>
+                  </a:endParaRPr>
+                </a:p>
+              </p:txBody>
+            </p:sp>
+            <p:sp>
+              <p:nvSpPr>
+                <p:cNvPr id="23" name="ZoneTexte 22">
+                  <a:extLst>
+                    <a:ext uri="{FF2B5EF4-FFF2-40B4-BE49-F238E27FC236}">
+                      <a16:creationId xmlns:a16="http://schemas.microsoft.com/office/drawing/2014/main" id="{251631A6-FD3F-5B80-2DED-04DEADBD53A1}"/>
+                    </a:ext>
+                  </a:extLst>
+                </p:cNvPr>
+                <p:cNvSpPr txBox="1"/>
+                <p:nvPr/>
+              </p:nvSpPr>
+              <p:spPr>
+                <a:xfrm rot="16200000">
+                  <a:off x="1460358" y="1226359"/>
+                  <a:ext cx="1615402" cy="261610"/>
+                </a:xfrm>
+                <a:prstGeom prst="rect">
+                  <a:avLst/>
+                </a:prstGeom>
+                <a:noFill/>
+              </p:spPr>
+              <p:txBody>
+                <a:bodyPr wrap="square" rtlCol="0">
+                  <a:spAutoFit/>
+                </a:bodyPr>
+                <a:lstStyle/>
+                <a:p>
+                  <a:pPr algn="ctr"/>
+                  <a:r>
+                    <a:rPr lang="en-US" sz="1100" dirty="0">
+                      <a:latin typeface="Arial" panose="020B0604020202020204" pitchFamily="34" charset="0"/>
+                      <a:cs typeface="Arial" panose="020B0604020202020204" pitchFamily="34" charset="0"/>
+                    </a:rPr>
+                    <a:t>Species</a:t>
+                  </a:r>
+                  <a:endParaRPr lang="en-GB" sz="1100" dirty="0">
+                    <a:latin typeface="Arial" panose="020B0604020202020204" pitchFamily="34" charset="0"/>
+                    <a:cs typeface="Arial" panose="020B0604020202020204" pitchFamily="34" charset="0"/>
+                  </a:endParaRPr>
+                </a:p>
+              </p:txBody>
+            </p:sp>
+          </p:grpSp>
           <p:sp>
             <p:nvSpPr>
-              <p:cNvPr id="2" name="Rectangle 1">
+              <p:cNvPr id="24" name="ZoneTexte 23">
                 <a:extLst>
                   <a:ext uri="{FF2B5EF4-FFF2-40B4-BE49-F238E27FC236}">
-                    <a16:creationId xmlns:a16="http://schemas.microsoft.com/office/drawing/2014/main" id="{B6B95D7F-9864-13F3-A911-AC64863EF054}"/>
+                    <a16:creationId xmlns:a16="http://schemas.microsoft.com/office/drawing/2014/main" id="{94CECE5C-DC36-AED0-1FBB-60BF6BE8A511}"/>
+                  </a:ext>
+                </a:extLst>
+              </p:cNvPr>
+              <p:cNvSpPr txBox="1"/>
+              <p:nvPr/>
+            </p:nvSpPr>
+            <p:spPr>
+              <a:xfrm>
+                <a:off x="2233992" y="217844"/>
+                <a:ext cx="1978310" cy="307777"/>
+              </a:xfrm>
+              <a:prstGeom prst="rect">
+                <a:avLst/>
+              </a:prstGeom>
+              <a:noFill/>
+            </p:spPr>
+            <p:txBody>
+              <a:bodyPr wrap="square" rtlCol="0">
+                <a:spAutoFit/>
+              </a:bodyPr>
+              <a:lstStyle/>
+              <a:p>
+                <a:pPr algn="ctr"/>
+                <a:r>
+                  <a:rPr lang="en-US" sz="1400" b="1" dirty="0">
+                    <a:latin typeface="Arial" panose="020B0604020202020204" pitchFamily="34" charset="0"/>
+                    <a:cs typeface="Arial" panose="020B0604020202020204" pitchFamily="34" charset="0"/>
+                  </a:rPr>
+                  <a:t>Morphological</a:t>
+                </a:r>
+                <a:endParaRPr lang="en-GB" sz="1400" b="1" dirty="0">
+                  <a:latin typeface="Arial" panose="020B0604020202020204" pitchFamily="34" charset="0"/>
+                  <a:cs typeface="Arial" panose="020B0604020202020204" pitchFamily="34" charset="0"/>
+                </a:endParaRPr>
+              </a:p>
+            </p:txBody>
+          </p:sp>
+          <p:sp>
+            <p:nvSpPr>
+              <p:cNvPr id="25" name="ZoneTexte 24">
+                <a:extLst>
+                  <a:ext uri="{FF2B5EF4-FFF2-40B4-BE49-F238E27FC236}">
+                    <a16:creationId xmlns:a16="http://schemas.microsoft.com/office/drawing/2014/main" id="{CD91EBD7-3AF0-F9E1-EC78-BAE60DCB0ADC}"/>
+                  </a:ext>
+                </a:extLst>
+              </p:cNvPr>
+              <p:cNvSpPr txBox="1"/>
+              <p:nvPr/>
+            </p:nvSpPr>
+            <p:spPr>
+              <a:xfrm>
+                <a:off x="5761702" y="223246"/>
+                <a:ext cx="1978310" cy="307777"/>
+              </a:xfrm>
+              <a:prstGeom prst="rect">
+                <a:avLst/>
+              </a:prstGeom>
+              <a:noFill/>
+            </p:spPr>
+            <p:txBody>
+              <a:bodyPr wrap="square" rtlCol="0">
+                <a:spAutoFit/>
+              </a:bodyPr>
+              <a:lstStyle/>
+              <a:p>
+                <a:pPr algn="ctr"/>
+                <a:r>
+                  <a:rPr lang="en-US" sz="1400" b="1" dirty="0">
+                    <a:latin typeface="Arial" panose="020B0604020202020204" pitchFamily="34" charset="0"/>
+                    <a:cs typeface="Arial" panose="020B0604020202020204" pitchFamily="34" charset="0"/>
+                  </a:rPr>
+                  <a:t>Life-history</a:t>
+                </a:r>
+                <a:endParaRPr lang="en-GB" sz="1400" b="1" dirty="0">
+                  <a:latin typeface="Arial" panose="020B0604020202020204" pitchFamily="34" charset="0"/>
+                  <a:cs typeface="Arial" panose="020B0604020202020204" pitchFamily="34" charset="0"/>
+                </a:endParaRPr>
+              </a:p>
+            </p:txBody>
+          </p:sp>
+          <p:sp>
+            <p:nvSpPr>
+              <p:cNvPr id="26" name="ZoneTexte 25">
+                <a:extLst>
+                  <a:ext uri="{FF2B5EF4-FFF2-40B4-BE49-F238E27FC236}">
+                    <a16:creationId xmlns:a16="http://schemas.microsoft.com/office/drawing/2014/main" id="{2E2D5ACD-9D7F-5C6F-A0C6-AAE329DA0031}"/>
+                  </a:ext>
+                </a:extLst>
+              </p:cNvPr>
+              <p:cNvSpPr txBox="1"/>
+              <p:nvPr/>
+            </p:nvSpPr>
+            <p:spPr>
+              <a:xfrm>
+                <a:off x="7724555" y="4250530"/>
+                <a:ext cx="1978310" cy="307777"/>
+              </a:xfrm>
+              <a:prstGeom prst="rect">
+                <a:avLst/>
+              </a:prstGeom>
+              <a:noFill/>
+            </p:spPr>
+            <p:txBody>
+              <a:bodyPr wrap="square" rtlCol="0">
+                <a:spAutoFit/>
+              </a:bodyPr>
+              <a:lstStyle/>
+              <a:p>
+                <a:pPr algn="ctr"/>
+                <a:r>
+                  <a:rPr lang="en-US" sz="1400" b="1" dirty="0">
+                    <a:latin typeface="Arial" panose="020B0604020202020204" pitchFamily="34" charset="0"/>
+                    <a:cs typeface="Arial" panose="020B0604020202020204" pitchFamily="34" charset="0"/>
+                  </a:rPr>
+                  <a:t>Diet</a:t>
+                </a:r>
+                <a:endParaRPr lang="en-GB" sz="1400" b="1" dirty="0">
+                  <a:latin typeface="Arial" panose="020B0604020202020204" pitchFamily="34" charset="0"/>
+                  <a:cs typeface="Arial" panose="020B0604020202020204" pitchFamily="34" charset="0"/>
+                </a:endParaRPr>
+              </a:p>
+            </p:txBody>
+          </p:sp>
+          <p:sp>
+            <p:nvSpPr>
+              <p:cNvPr id="99" name="ZoneTexte 98">
+                <a:extLst>
+                  <a:ext uri="{FF2B5EF4-FFF2-40B4-BE49-F238E27FC236}">
+                    <a16:creationId xmlns:a16="http://schemas.microsoft.com/office/drawing/2014/main" id="{EF4471CD-5466-318D-175D-9875BD002337}"/>
+                  </a:ext>
+                </a:extLst>
+              </p:cNvPr>
+              <p:cNvSpPr txBox="1"/>
+              <p:nvPr/>
+            </p:nvSpPr>
+            <p:spPr>
+              <a:xfrm>
+                <a:off x="155635" y="864019"/>
+                <a:ext cx="2286964" cy="646331"/>
+              </a:xfrm>
+              <a:prstGeom prst="rect">
+                <a:avLst/>
+              </a:prstGeom>
+              <a:noFill/>
+            </p:spPr>
+            <p:txBody>
+              <a:bodyPr wrap="square" rtlCol="0">
+                <a:spAutoFit/>
+              </a:bodyPr>
+              <a:lstStyle/>
+              <a:p>
+                <a:r>
+                  <a:rPr lang="en-US" b="1" dirty="0">
+                    <a:latin typeface="Arial" panose="020B0604020202020204" pitchFamily="34" charset="0"/>
+                    <a:cs typeface="Arial" panose="020B0604020202020204" pitchFamily="34" charset="0"/>
+                  </a:rPr>
+                  <a:t>Original </a:t>
+                </a:r>
+              </a:p>
+              <a:p>
+                <a:r>
+                  <a:rPr lang="en-US" b="1" dirty="0">
+                    <a:latin typeface="Arial" panose="020B0604020202020204" pitchFamily="34" charset="0"/>
+                    <a:cs typeface="Arial" panose="020B0604020202020204" pitchFamily="34" charset="0"/>
+                  </a:rPr>
+                  <a:t>trait databases</a:t>
+                </a:r>
+                <a:endParaRPr lang="en-GB" b="1" dirty="0">
+                  <a:latin typeface="Arial" panose="020B0604020202020204" pitchFamily="34" charset="0"/>
+                  <a:cs typeface="Arial" panose="020B0604020202020204" pitchFamily="34" charset="0"/>
+                </a:endParaRPr>
+              </a:p>
+            </p:txBody>
+          </p:sp>
+          <p:sp>
+            <p:nvSpPr>
+              <p:cNvPr id="104" name="ZoneTexte 103">
+                <a:extLst>
+                  <a:ext uri="{FF2B5EF4-FFF2-40B4-BE49-F238E27FC236}">
+                    <a16:creationId xmlns:a16="http://schemas.microsoft.com/office/drawing/2014/main" id="{90714906-7CA0-4716-9D8A-CFBFBF710C12}"/>
+                  </a:ext>
+                </a:extLst>
+              </p:cNvPr>
+              <p:cNvSpPr txBox="1"/>
+              <p:nvPr/>
+            </p:nvSpPr>
+            <p:spPr>
+              <a:xfrm>
+                <a:off x="155635" y="7886022"/>
+                <a:ext cx="2286964" cy="369332"/>
+              </a:xfrm>
+              <a:prstGeom prst="rect">
+                <a:avLst/>
+              </a:prstGeom>
+              <a:noFill/>
+            </p:spPr>
+            <p:txBody>
+              <a:bodyPr wrap="square" rtlCol="0">
+                <a:spAutoFit/>
+              </a:bodyPr>
+              <a:lstStyle/>
+              <a:p>
+                <a:r>
+                  <a:rPr lang="en-US" b="1" dirty="0">
+                    <a:latin typeface="Arial" panose="020B0604020202020204" pitchFamily="34" charset="0"/>
+                    <a:cs typeface="Arial" panose="020B0604020202020204" pitchFamily="34" charset="0"/>
+                  </a:rPr>
+                  <a:t>Trait spaces</a:t>
+                </a:r>
+                <a:endParaRPr lang="en-GB" b="1" dirty="0">
+                  <a:latin typeface="Arial" panose="020B0604020202020204" pitchFamily="34" charset="0"/>
+                  <a:cs typeface="Arial" panose="020B0604020202020204" pitchFamily="34" charset="0"/>
+                </a:endParaRPr>
+              </a:p>
+            </p:txBody>
+          </p:sp>
+          <p:cxnSp>
+            <p:nvCxnSpPr>
+              <p:cNvPr id="111" name="Connecteur : en angle 110">
+                <a:extLst>
+                  <a:ext uri="{FF2B5EF4-FFF2-40B4-BE49-F238E27FC236}">
+                    <a16:creationId xmlns:a16="http://schemas.microsoft.com/office/drawing/2014/main" id="{B40C7F5C-0733-D9AC-F57D-DE385C435DFD}"/>
+                  </a:ext>
+                </a:extLst>
+              </p:cNvPr>
+              <p:cNvCxnSpPr>
+                <a:cxnSpLocks/>
+                <a:stCxn id="2" idx="2"/>
+              </p:cNvCxnSpPr>
+              <p:nvPr/>
+            </p:nvCxnSpPr>
+            <p:spPr>
+              <a:xfrm rot="16200000" flipH="1">
+                <a:off x="4076222" y="1118257"/>
+                <a:ext cx="753816" cy="2488628"/>
+              </a:xfrm>
+              <a:prstGeom prst="bentConnector2">
+                <a:avLst/>
+              </a:prstGeom>
+              <a:ln w="28575">
+                <a:tailEnd type="triangle"/>
+              </a:ln>
+            </p:spPr>
+            <p:style>
+              <a:lnRef idx="1">
+                <a:schemeClr val="dk1"/>
+              </a:lnRef>
+              <a:fillRef idx="0">
+                <a:schemeClr val="dk1"/>
+              </a:fillRef>
+              <a:effectRef idx="0">
+                <a:schemeClr val="dk1"/>
+              </a:effectRef>
+              <a:fontRef idx="minor">
+                <a:schemeClr val="tx1"/>
+              </a:fontRef>
+            </p:style>
+          </p:cxnSp>
+          <p:cxnSp>
+            <p:nvCxnSpPr>
+              <p:cNvPr id="117" name="Connecteur : en angle 116">
+                <a:extLst>
+                  <a:ext uri="{FF2B5EF4-FFF2-40B4-BE49-F238E27FC236}">
+                    <a16:creationId xmlns:a16="http://schemas.microsoft.com/office/drawing/2014/main" id="{AD22FBC1-7082-10C6-7479-4B71DDDF0914}"/>
+                  </a:ext>
+                </a:extLst>
+              </p:cNvPr>
+              <p:cNvCxnSpPr>
+                <a:cxnSpLocks/>
+                <a:stCxn id="19" idx="2"/>
+              </p:cNvCxnSpPr>
+              <p:nvPr/>
+            </p:nvCxnSpPr>
+            <p:spPr>
+              <a:xfrm rot="5400000">
+                <a:off x="8595531" y="1072720"/>
+                <a:ext cx="845292" cy="2488223"/>
+              </a:xfrm>
+              <a:prstGeom prst="bentConnector2">
+                <a:avLst/>
+              </a:prstGeom>
+              <a:ln w="28575">
+                <a:tailEnd type="triangle"/>
+              </a:ln>
+            </p:spPr>
+            <p:style>
+              <a:lnRef idx="1">
+                <a:schemeClr val="dk1"/>
+              </a:lnRef>
+              <a:fillRef idx="0">
+                <a:schemeClr val="dk1"/>
+              </a:fillRef>
+              <a:effectRef idx="0">
+                <a:schemeClr val="dk1"/>
+              </a:effectRef>
+              <a:fontRef idx="minor">
+                <a:schemeClr val="tx1"/>
+              </a:fontRef>
+            </p:style>
+          </p:cxnSp>
+          <p:cxnSp>
+            <p:nvCxnSpPr>
+              <p:cNvPr id="119" name="Connecteur droit avec flèche 118">
+                <a:extLst>
+                  <a:ext uri="{FF2B5EF4-FFF2-40B4-BE49-F238E27FC236}">
+                    <a16:creationId xmlns:a16="http://schemas.microsoft.com/office/drawing/2014/main" id="{15DC1CA2-4FCB-B9F0-A83C-7859135CFDC4}"/>
+                  </a:ext>
+                </a:extLst>
+              </p:cNvPr>
+              <p:cNvCxnSpPr>
+                <a:cxnSpLocks/>
+                <a:stCxn id="13" idx="2"/>
+                <a:endCxn id="122" idx="0"/>
+              </p:cNvCxnSpPr>
+              <p:nvPr/>
+            </p:nvCxnSpPr>
+            <p:spPr>
+              <a:xfrm>
+                <a:off x="6725830" y="1948781"/>
+                <a:ext cx="9925" cy="551767"/>
+              </a:xfrm>
+              <a:prstGeom prst="straightConnector1">
+                <a:avLst/>
+              </a:prstGeom>
+              <a:ln w="28575">
+                <a:tailEnd type="triangle"/>
+              </a:ln>
+            </p:spPr>
+            <p:style>
+              <a:lnRef idx="1">
+                <a:schemeClr val="dk1"/>
+              </a:lnRef>
+              <a:fillRef idx="0">
+                <a:schemeClr val="dk1"/>
+              </a:fillRef>
+              <a:effectRef idx="0">
+                <a:schemeClr val="dk1"/>
+              </a:effectRef>
+              <a:fontRef idx="minor">
+                <a:schemeClr val="tx1"/>
+              </a:fontRef>
+            </p:style>
+          </p:cxnSp>
+          <p:sp>
+            <p:nvSpPr>
+              <p:cNvPr id="122" name="Rectangle 121">
+                <a:extLst>
+                  <a:ext uri="{FF2B5EF4-FFF2-40B4-BE49-F238E27FC236}">
+                    <a16:creationId xmlns:a16="http://schemas.microsoft.com/office/drawing/2014/main" id="{BFF160F4-5DF7-DF0B-A247-098ECC8CF4BE}"/>
                   </a:ext>
                 </a:extLst>
               </p:cNvPr>
@@ -3538,7 +4751,859 @@
             </p:nvSpPr>
             <p:spPr>
               <a:xfrm>
-                <a:off x="2086605" y="604059"/>
+                <a:off x="5697445" y="2500548"/>
+                <a:ext cx="2076619" cy="1114086"/>
+              </a:xfrm>
+              <a:prstGeom prst="rect">
+                <a:avLst/>
+              </a:prstGeom>
+              <a:solidFill>
+                <a:schemeClr val="bg1"/>
+              </a:solidFill>
+              <a:ln w="28575"/>
+            </p:spPr>
+            <p:style>
+              <a:lnRef idx="2">
+                <a:schemeClr val="accent1">
+                  <a:shade val="15000"/>
+                </a:schemeClr>
+              </a:lnRef>
+              <a:fillRef idx="1">
+                <a:schemeClr val="accent1"/>
+              </a:fillRef>
+              <a:effectRef idx="0">
+                <a:schemeClr val="accent1"/>
+              </a:effectRef>
+              <a:fontRef idx="minor">
+                <a:schemeClr val="lt1"/>
+              </a:fontRef>
+            </p:style>
+            <p:txBody>
+              <a:bodyPr rtlCol="0" anchor="ctr"/>
+              <a:lstStyle/>
+              <a:p>
+                <a:pPr algn="ctr"/>
+                <a:r>
+                  <a:rPr lang="en-US" dirty="0">
+                    <a:solidFill>
+                      <a:schemeClr val="tx1"/>
+                    </a:solidFill>
+                    <a:latin typeface="Arial" panose="020B0604020202020204" pitchFamily="34" charset="0"/>
+                    <a:cs typeface="Arial" panose="020B0604020202020204" pitchFamily="34" charset="0"/>
+                  </a:rPr>
+                  <a:t>Taxonomic homogenization + Missing traits imputation </a:t>
+                </a:r>
+              </a:p>
+            </p:txBody>
+          </p:sp>
+          <p:pic>
+            <p:nvPicPr>
+              <p:cNvPr id="327" name="Picture 4" descr="Bird Icon 582248 Vector Art at Vecteezy">
+                <a:extLst>
+                  <a:ext uri="{FF2B5EF4-FFF2-40B4-BE49-F238E27FC236}">
+                    <a16:creationId xmlns:a16="http://schemas.microsoft.com/office/drawing/2014/main" id="{BFAD329A-F157-C851-A448-6F3915596875}"/>
+                  </a:ext>
+                </a:extLst>
+              </p:cNvPr>
+              <p:cNvPicPr>
+                <a:picLocks noChangeAspect="1" noChangeArrowheads="1"/>
+              </p:cNvPicPr>
+              <p:nvPr/>
+            </p:nvPicPr>
+            <p:blipFill>
+              <a:blip r:embed="rId4">
+                <a:extLst>
+                  <a:ext uri="{28A0092B-C50C-407E-A947-70E740481C1C}">
+                    <a14:useLocalDpi xmlns:a14="http://schemas.microsoft.com/office/drawing/2010/main" val="0"/>
+                  </a:ext>
+                </a:extLst>
+              </a:blip>
+              <a:stretch>
+                <a:fillRect/>
+              </a:stretch>
+            </p:blipFill>
+            <p:spPr bwMode="auto">
+              <a:xfrm>
+                <a:off x="2603431" y="1042601"/>
+                <a:ext cx="511422" cy="511422"/>
+              </a:xfrm>
+              <a:prstGeom prst="rect">
+                <a:avLst/>
+              </a:prstGeom>
+              <a:noFill/>
+              <a:extLst>
+                <a:ext uri="{909E8E84-426E-40DD-AFC4-6F175D3DCCD1}">
+                  <a14:hiddenFill xmlns:a14="http://schemas.microsoft.com/office/drawing/2010/main">
+                    <a:solidFill>
+                      <a:srgbClr val="FFFFFF"/>
+                    </a:solidFill>
+                  </a14:hiddenFill>
+                </a:ext>
+              </a:extLst>
+            </p:spPr>
+          </p:pic>
+          <p:sp>
+            <p:nvSpPr>
+              <p:cNvPr id="328" name="ZoneTexte 327">
+                <a:extLst>
+                  <a:ext uri="{FF2B5EF4-FFF2-40B4-BE49-F238E27FC236}">
+                    <a16:creationId xmlns:a16="http://schemas.microsoft.com/office/drawing/2014/main" id="{DE24ADCB-D0A1-6874-AEB2-B3D8BF9D9186}"/>
+                  </a:ext>
+                </a:extLst>
+              </p:cNvPr>
+              <p:cNvSpPr txBox="1"/>
+              <p:nvPr/>
+            </p:nvSpPr>
+            <p:spPr>
+              <a:xfrm>
+                <a:off x="3107430" y="1077379"/>
+                <a:ext cx="1011192" cy="461665"/>
+              </a:xfrm>
+              <a:prstGeom prst="rect">
+                <a:avLst/>
+              </a:prstGeom>
+              <a:noFill/>
+            </p:spPr>
+            <p:txBody>
+              <a:bodyPr wrap="square" rtlCol="0">
+                <a:spAutoFit/>
+              </a:bodyPr>
+              <a:lstStyle/>
+              <a:p>
+                <a:r>
+                  <a:rPr lang="en-US" sz="1200" dirty="0">
+                    <a:latin typeface="Arial" panose="020B0604020202020204" pitchFamily="34" charset="0"/>
+                    <a:cs typeface="Arial" panose="020B0604020202020204" pitchFamily="34" charset="0"/>
+                  </a:rPr>
+                  <a:t>AVONET</a:t>
+                </a:r>
+              </a:p>
+              <a:p>
+                <a:r>
+                  <a:rPr lang="en-US" sz="1200" dirty="0">
+                    <a:latin typeface="Arial" panose="020B0604020202020204" pitchFamily="34" charset="0"/>
+                    <a:cs typeface="Arial" panose="020B0604020202020204" pitchFamily="34" charset="0"/>
+                  </a:rPr>
+                  <a:t>(</a:t>
+                </a:r>
+                <a:r>
+                  <a:rPr lang="en-001" sz="1200" dirty="0">
+                    <a:latin typeface="Arial" panose="020B0604020202020204" pitchFamily="34" charset="0"/>
+                    <a:cs typeface="Arial" panose="020B0604020202020204" pitchFamily="34" charset="0"/>
+                  </a:rPr>
+                  <a:t>8</a:t>
+                </a:r>
+                <a:r>
+                  <a:rPr lang="en-US" sz="1200" dirty="0">
+                    <a:latin typeface="Arial" panose="020B0604020202020204" pitchFamily="34" charset="0"/>
+                    <a:cs typeface="Arial" panose="020B0604020202020204" pitchFamily="34" charset="0"/>
+                  </a:rPr>
+                  <a:t> traits)</a:t>
+                </a:r>
+                <a:endParaRPr lang="en-GB" sz="1200" dirty="0">
+                  <a:latin typeface="Arial" panose="020B0604020202020204" pitchFamily="34" charset="0"/>
+                  <a:cs typeface="Arial" panose="020B0604020202020204" pitchFamily="34" charset="0"/>
+                </a:endParaRPr>
+              </a:p>
+            </p:txBody>
+          </p:sp>
+          <p:pic>
+            <p:nvPicPr>
+              <p:cNvPr id="330" name="Picture 4" descr="Bird Icon 582248 Vector Art at Vecteezy">
+                <a:extLst>
+                  <a:ext uri="{FF2B5EF4-FFF2-40B4-BE49-F238E27FC236}">
+                    <a16:creationId xmlns:a16="http://schemas.microsoft.com/office/drawing/2014/main" id="{88B2B981-FD46-955F-2397-969404FD4FDD}"/>
+                  </a:ext>
+                </a:extLst>
+              </p:cNvPr>
+              <p:cNvPicPr>
+                <a:picLocks noChangeAspect="1" noChangeArrowheads="1"/>
+              </p:cNvPicPr>
+              <p:nvPr/>
+            </p:nvPicPr>
+            <p:blipFill>
+              <a:blip r:embed="rId4">
+                <a:extLst>
+                  <a:ext uri="{28A0092B-C50C-407E-A947-70E740481C1C}">
+                    <a14:useLocalDpi xmlns:a14="http://schemas.microsoft.com/office/drawing/2010/main" val="0"/>
+                  </a:ext>
+                </a:extLst>
+              </a:blip>
+              <a:stretch>
+                <a:fillRect/>
+              </a:stretch>
+            </p:blipFill>
+            <p:spPr bwMode="auto">
+              <a:xfrm>
+                <a:off x="6164432" y="1014035"/>
+                <a:ext cx="511422" cy="511422"/>
+              </a:xfrm>
+              <a:prstGeom prst="rect">
+                <a:avLst/>
+              </a:prstGeom>
+              <a:noFill/>
+              <a:extLst>
+                <a:ext uri="{909E8E84-426E-40DD-AFC4-6F175D3DCCD1}">
+                  <a14:hiddenFill xmlns:a14="http://schemas.microsoft.com/office/drawing/2010/main">
+                    <a:solidFill>
+                      <a:srgbClr val="FFFFFF"/>
+                    </a:solidFill>
+                  </a14:hiddenFill>
+                </a:ext>
+              </a:extLst>
+            </p:spPr>
+          </p:pic>
+          <p:sp>
+            <p:nvSpPr>
+              <p:cNvPr id="331" name="ZoneTexte 330">
+                <a:extLst>
+                  <a:ext uri="{FF2B5EF4-FFF2-40B4-BE49-F238E27FC236}">
+                    <a16:creationId xmlns:a16="http://schemas.microsoft.com/office/drawing/2014/main" id="{62E12522-2912-702F-084E-8894481BD5A5}"/>
+                  </a:ext>
+                </a:extLst>
+              </p:cNvPr>
+              <p:cNvSpPr txBox="1"/>
+              <p:nvPr/>
+            </p:nvSpPr>
+            <p:spPr>
+              <a:xfrm>
+                <a:off x="6668431" y="1048813"/>
+                <a:ext cx="1011192" cy="461665"/>
+              </a:xfrm>
+              <a:prstGeom prst="rect">
+                <a:avLst/>
+              </a:prstGeom>
+              <a:noFill/>
+            </p:spPr>
+            <p:txBody>
+              <a:bodyPr wrap="square" rtlCol="0">
+                <a:spAutoFit/>
+              </a:bodyPr>
+              <a:lstStyle/>
+              <a:p>
+                <a:r>
+                  <a:rPr lang="en-US" sz="1200" dirty="0">
+                    <a:latin typeface="Arial" panose="020B0604020202020204" pitchFamily="34" charset="0"/>
+                    <a:cs typeface="Arial" panose="020B0604020202020204" pitchFamily="34" charset="0"/>
+                  </a:rPr>
+                  <a:t>AMNIOTE</a:t>
+                </a:r>
+              </a:p>
+              <a:p>
+                <a:r>
+                  <a:rPr lang="en-US" sz="1200" dirty="0">
+                    <a:latin typeface="Arial" panose="020B0604020202020204" pitchFamily="34" charset="0"/>
+                    <a:cs typeface="Arial" panose="020B0604020202020204" pitchFamily="34" charset="0"/>
+                  </a:rPr>
+                  <a:t>(</a:t>
+                </a:r>
+                <a:r>
+                  <a:rPr lang="en-001" sz="1200" dirty="0">
+                    <a:latin typeface="Arial" panose="020B0604020202020204" pitchFamily="34" charset="0"/>
+                    <a:cs typeface="Arial" panose="020B0604020202020204" pitchFamily="34" charset="0"/>
+                  </a:rPr>
+                  <a:t>6</a:t>
+                </a:r>
+                <a:r>
+                  <a:rPr lang="en-US" sz="1200" dirty="0">
+                    <a:latin typeface="Arial" panose="020B0604020202020204" pitchFamily="34" charset="0"/>
+                    <a:cs typeface="Arial" panose="020B0604020202020204" pitchFamily="34" charset="0"/>
+                  </a:rPr>
+                  <a:t> traits)</a:t>
+                </a:r>
+              </a:p>
+            </p:txBody>
+          </p:sp>
+          <p:pic>
+            <p:nvPicPr>
+              <p:cNvPr id="333" name="Picture 4" descr="Bird Icon 582248 Vector Art at Vecteezy">
+                <a:extLst>
+                  <a:ext uri="{FF2B5EF4-FFF2-40B4-BE49-F238E27FC236}">
+                    <a16:creationId xmlns:a16="http://schemas.microsoft.com/office/drawing/2014/main" id="{2E5CEB06-1739-4FD5-DF10-B84F45DDA120}"/>
+                  </a:ext>
+                </a:extLst>
+              </p:cNvPr>
+              <p:cNvPicPr>
+                <a:picLocks noChangeAspect="1" noChangeArrowheads="1"/>
+              </p:cNvPicPr>
+              <p:nvPr/>
+            </p:nvPicPr>
+            <p:blipFill>
+              <a:blip r:embed="rId4">
+                <a:extLst>
+                  <a:ext uri="{28A0092B-C50C-407E-A947-70E740481C1C}">
+                    <a14:useLocalDpi xmlns:a14="http://schemas.microsoft.com/office/drawing/2010/main" val="0"/>
+                  </a:ext>
+                </a:extLst>
+              </a:blip>
+              <a:stretch>
+                <a:fillRect/>
+              </a:stretch>
+            </p:blipFill>
+            <p:spPr bwMode="auto">
+              <a:xfrm>
+                <a:off x="9707553" y="983619"/>
+                <a:ext cx="511422" cy="511422"/>
+              </a:xfrm>
+              <a:prstGeom prst="rect">
+                <a:avLst/>
+              </a:prstGeom>
+              <a:noFill/>
+              <a:extLst>
+                <a:ext uri="{909E8E84-426E-40DD-AFC4-6F175D3DCCD1}">
+                  <a14:hiddenFill xmlns:a14="http://schemas.microsoft.com/office/drawing/2010/main">
+                    <a:solidFill>
+                      <a:srgbClr val="FFFFFF"/>
+                    </a:solidFill>
+                  </a14:hiddenFill>
+                </a:ext>
+              </a:extLst>
+            </p:spPr>
+          </p:pic>
+          <p:sp>
+            <p:nvSpPr>
+              <p:cNvPr id="334" name="ZoneTexte 333">
+                <a:extLst>
+                  <a:ext uri="{FF2B5EF4-FFF2-40B4-BE49-F238E27FC236}">
+                    <a16:creationId xmlns:a16="http://schemas.microsoft.com/office/drawing/2014/main" id="{0D002A98-678D-559A-85F1-42F06DCDC526}"/>
+                  </a:ext>
+                </a:extLst>
+              </p:cNvPr>
+              <p:cNvSpPr txBox="1"/>
+              <p:nvPr/>
+            </p:nvSpPr>
+            <p:spPr>
+              <a:xfrm>
+                <a:off x="10211552" y="1018397"/>
+                <a:ext cx="1011192" cy="461665"/>
+              </a:xfrm>
+              <a:prstGeom prst="rect">
+                <a:avLst/>
+              </a:prstGeom>
+              <a:noFill/>
+            </p:spPr>
+            <p:txBody>
+              <a:bodyPr wrap="square" rtlCol="0">
+                <a:spAutoFit/>
+              </a:bodyPr>
+              <a:lstStyle/>
+              <a:p>
+                <a:r>
+                  <a:rPr lang="en-001" sz="1200" dirty="0">
+                    <a:latin typeface="Arial" panose="020B0604020202020204" pitchFamily="34" charset="0"/>
+                    <a:cs typeface="Arial" panose="020B0604020202020204" pitchFamily="34" charset="0"/>
+                  </a:rPr>
+                  <a:t>E</a:t>
+                </a:r>
+                <a:r>
+                  <a:rPr lang="fr-FR" sz="1200" dirty="0">
+                    <a:latin typeface="Arial" panose="020B0604020202020204" pitchFamily="34" charset="0"/>
+                    <a:cs typeface="Arial" panose="020B0604020202020204" pitchFamily="34" charset="0"/>
+                  </a:rPr>
+                  <a:t>l</a:t>
+                </a:r>
+                <a:r>
+                  <a:rPr lang="en-001" sz="1200" dirty="0">
+                    <a:latin typeface="Arial" panose="020B0604020202020204" pitchFamily="34" charset="0"/>
+                    <a:cs typeface="Arial" panose="020B0604020202020204" pitchFamily="34" charset="0"/>
+                  </a:rPr>
+                  <a:t>t</a:t>
+                </a:r>
+                <a:r>
+                  <a:rPr lang="fr-FR" sz="1200" dirty="0">
+                    <a:latin typeface="Arial" panose="020B0604020202020204" pitchFamily="34" charset="0"/>
+                    <a:cs typeface="Arial" panose="020B0604020202020204" pitchFamily="34" charset="0"/>
+                  </a:rPr>
+                  <a:t>o</a:t>
+                </a:r>
+                <a:r>
+                  <a:rPr lang="en-001" sz="1200" dirty="0">
+                    <a:latin typeface="Arial" panose="020B0604020202020204" pitchFamily="34" charset="0"/>
+                    <a:cs typeface="Arial" panose="020B0604020202020204" pitchFamily="34" charset="0"/>
+                  </a:rPr>
+                  <a:t>n</a:t>
+                </a:r>
+                <a:r>
+                  <a:rPr lang="fr-FR" sz="1200" dirty="0">
+                    <a:latin typeface="Arial" panose="020B0604020202020204" pitchFamily="34" charset="0"/>
+                    <a:cs typeface="Arial" panose="020B0604020202020204" pitchFamily="34" charset="0"/>
+                  </a:rPr>
+                  <a:t>T</a:t>
+                </a:r>
+                <a:r>
+                  <a:rPr lang="en-001" sz="1200" dirty="0">
+                    <a:latin typeface="Arial" panose="020B0604020202020204" pitchFamily="34" charset="0"/>
+                    <a:cs typeface="Arial" panose="020B0604020202020204" pitchFamily="34" charset="0"/>
+                  </a:rPr>
+                  <a:t>r</a:t>
+                </a:r>
+                <a:r>
+                  <a:rPr lang="fr-FR" sz="1200" dirty="0">
+                    <a:latin typeface="Arial" panose="020B0604020202020204" pitchFamily="34" charset="0"/>
+                    <a:cs typeface="Arial" panose="020B0604020202020204" pitchFamily="34" charset="0"/>
+                  </a:rPr>
+                  <a:t>a</a:t>
+                </a:r>
+                <a:r>
+                  <a:rPr lang="en-001" sz="1200" dirty="0" err="1">
+                    <a:latin typeface="Arial" panose="020B0604020202020204" pitchFamily="34" charset="0"/>
+                    <a:cs typeface="Arial" panose="020B0604020202020204" pitchFamily="34" charset="0"/>
+                  </a:rPr>
+                  <a:t>i</a:t>
+                </a:r>
+                <a:r>
+                  <a:rPr lang="fr-FR" sz="1200" dirty="0">
+                    <a:latin typeface="Arial" panose="020B0604020202020204" pitchFamily="34" charset="0"/>
+                    <a:cs typeface="Arial" panose="020B0604020202020204" pitchFamily="34" charset="0"/>
+                  </a:rPr>
+                  <a:t>t</a:t>
+                </a:r>
+                <a:r>
+                  <a:rPr lang="en-001" sz="1200" dirty="0">
+                    <a:latin typeface="Arial" panose="020B0604020202020204" pitchFamily="34" charset="0"/>
+                    <a:cs typeface="Arial" panose="020B0604020202020204" pitchFamily="34" charset="0"/>
+                  </a:rPr>
+                  <a:t>s</a:t>
+                </a:r>
+                <a:endParaRPr lang="en-US" sz="1200" dirty="0">
+                  <a:latin typeface="Arial" panose="020B0604020202020204" pitchFamily="34" charset="0"/>
+                  <a:cs typeface="Arial" panose="020B0604020202020204" pitchFamily="34" charset="0"/>
+                </a:endParaRPr>
+              </a:p>
+              <a:p>
+                <a:r>
+                  <a:rPr lang="en-US" sz="1200" dirty="0">
+                    <a:latin typeface="Arial" panose="020B0604020202020204" pitchFamily="34" charset="0"/>
+                    <a:cs typeface="Arial" panose="020B0604020202020204" pitchFamily="34" charset="0"/>
+                  </a:rPr>
+                  <a:t>(11 traits)</a:t>
+                </a:r>
+              </a:p>
+            </p:txBody>
+          </p:sp>
+          <p:sp>
+            <p:nvSpPr>
+              <p:cNvPr id="335" name="ZoneTexte 334">
+                <a:extLst>
+                  <a:ext uri="{FF2B5EF4-FFF2-40B4-BE49-F238E27FC236}">
+                    <a16:creationId xmlns:a16="http://schemas.microsoft.com/office/drawing/2014/main" id="{4C6E8C8F-436A-BF67-566C-5C6BC6B982D7}"/>
+                  </a:ext>
+                </a:extLst>
+              </p:cNvPr>
+              <p:cNvSpPr txBox="1"/>
+              <p:nvPr/>
+            </p:nvSpPr>
+            <p:spPr>
+              <a:xfrm rot="16200000">
+                <a:off x="3633118" y="1143872"/>
+                <a:ext cx="1422882" cy="276999"/>
+              </a:xfrm>
+              <a:prstGeom prst="rect">
+                <a:avLst/>
+              </a:prstGeom>
+              <a:noFill/>
+            </p:spPr>
+            <p:txBody>
+              <a:bodyPr wrap="square" rtlCol="0">
+                <a:spAutoFit/>
+              </a:bodyPr>
+              <a:lstStyle/>
+              <a:p>
+                <a:pPr algn="ctr"/>
+                <a:r>
+                  <a:rPr lang="en-US" sz="1200" b="1" i="1" dirty="0">
+                    <a:latin typeface="Arial" panose="020B0604020202020204" pitchFamily="34" charset="0"/>
+                    <a:cs typeface="Arial" panose="020B0604020202020204" pitchFamily="34" charset="0"/>
+                  </a:rPr>
+                  <a:t>Quantitative</a:t>
+                </a:r>
+                <a:endParaRPr lang="en-GB" sz="1200" b="1" i="1" dirty="0">
+                  <a:latin typeface="Arial" panose="020B0604020202020204" pitchFamily="34" charset="0"/>
+                  <a:cs typeface="Arial" panose="020B0604020202020204" pitchFamily="34" charset="0"/>
+                </a:endParaRPr>
+              </a:p>
+            </p:txBody>
+          </p:sp>
+          <p:sp>
+            <p:nvSpPr>
+              <p:cNvPr id="336" name="ZoneTexte 335">
+                <a:extLst>
+                  <a:ext uri="{FF2B5EF4-FFF2-40B4-BE49-F238E27FC236}">
+                    <a16:creationId xmlns:a16="http://schemas.microsoft.com/office/drawing/2014/main" id="{A54FE97C-34D9-8F58-C722-423541A50AE7}"/>
+                  </a:ext>
+                </a:extLst>
+              </p:cNvPr>
+              <p:cNvSpPr txBox="1"/>
+              <p:nvPr/>
+            </p:nvSpPr>
+            <p:spPr>
+              <a:xfrm rot="16200000">
+                <a:off x="7156375" y="1105508"/>
+                <a:ext cx="1422882" cy="276999"/>
+              </a:xfrm>
+              <a:prstGeom prst="rect">
+                <a:avLst/>
+              </a:prstGeom>
+              <a:noFill/>
+            </p:spPr>
+            <p:txBody>
+              <a:bodyPr wrap="square" rtlCol="0">
+                <a:spAutoFit/>
+              </a:bodyPr>
+              <a:lstStyle/>
+              <a:p>
+                <a:pPr algn="ctr"/>
+                <a:r>
+                  <a:rPr lang="en-US" sz="1200" b="1" i="1" dirty="0">
+                    <a:latin typeface="Arial" panose="020B0604020202020204" pitchFamily="34" charset="0"/>
+                    <a:cs typeface="Arial" panose="020B0604020202020204" pitchFamily="34" charset="0"/>
+                  </a:rPr>
+                  <a:t>Quantitative</a:t>
+                </a:r>
+                <a:endParaRPr lang="en-GB" sz="1200" b="1" i="1" dirty="0">
+                  <a:latin typeface="Arial" panose="020B0604020202020204" pitchFamily="34" charset="0"/>
+                  <a:cs typeface="Arial" panose="020B0604020202020204" pitchFamily="34" charset="0"/>
+                </a:endParaRPr>
+              </a:p>
+            </p:txBody>
+          </p:sp>
+          <p:sp>
+            <p:nvSpPr>
+              <p:cNvPr id="337" name="ZoneTexte 336">
+                <a:extLst>
+                  <a:ext uri="{FF2B5EF4-FFF2-40B4-BE49-F238E27FC236}">
+                    <a16:creationId xmlns:a16="http://schemas.microsoft.com/office/drawing/2014/main" id="{3B70184E-B8B4-A206-912A-D4ACBC23C125}"/>
+                  </a:ext>
+                </a:extLst>
+              </p:cNvPr>
+              <p:cNvSpPr txBox="1"/>
+              <p:nvPr/>
+            </p:nvSpPr>
+            <p:spPr>
+              <a:xfrm rot="16200000">
+                <a:off x="10686088" y="1078121"/>
+                <a:ext cx="1422882" cy="276999"/>
+              </a:xfrm>
+              <a:prstGeom prst="rect">
+                <a:avLst/>
+              </a:prstGeom>
+              <a:noFill/>
+            </p:spPr>
+            <p:txBody>
+              <a:bodyPr wrap="square" rtlCol="0">
+                <a:spAutoFit/>
+              </a:bodyPr>
+              <a:lstStyle/>
+              <a:p>
+                <a:pPr algn="ctr"/>
+                <a:r>
+                  <a:rPr lang="en-US" sz="1200" b="1" i="1" dirty="0">
+                    <a:latin typeface="Arial" panose="020B0604020202020204" pitchFamily="34" charset="0"/>
+                    <a:cs typeface="Arial" panose="020B0604020202020204" pitchFamily="34" charset="0"/>
+                  </a:rPr>
+                  <a:t>Categorical</a:t>
+                </a:r>
+                <a:endParaRPr lang="en-GB" sz="1200" b="1" i="1" dirty="0">
+                  <a:latin typeface="Arial" panose="020B0604020202020204" pitchFamily="34" charset="0"/>
+                  <a:cs typeface="Arial" panose="020B0604020202020204" pitchFamily="34" charset="0"/>
+                </a:endParaRPr>
+              </a:p>
+            </p:txBody>
+          </p:sp>
+          <p:cxnSp>
+            <p:nvCxnSpPr>
+              <p:cNvPr id="548" name="Connecteur droit avec flèche 547">
+                <a:extLst>
+                  <a:ext uri="{FF2B5EF4-FFF2-40B4-BE49-F238E27FC236}">
+                    <a16:creationId xmlns:a16="http://schemas.microsoft.com/office/drawing/2014/main" id="{FF091D61-DC00-C2A6-AF5B-D8E605DF5AD0}"/>
+                  </a:ext>
+                </a:extLst>
+              </p:cNvPr>
+              <p:cNvCxnSpPr>
+                <a:cxnSpLocks/>
+                <a:stCxn id="122" idx="2"/>
+                <a:endCxn id="574" idx="0"/>
+              </p:cNvCxnSpPr>
+              <p:nvPr/>
+            </p:nvCxnSpPr>
+            <p:spPr>
+              <a:xfrm>
+                <a:off x="6735755" y="3614634"/>
+                <a:ext cx="2644" cy="634372"/>
+              </a:xfrm>
+              <a:prstGeom prst="straightConnector1">
+                <a:avLst/>
+              </a:prstGeom>
+              <a:ln w="28575">
+                <a:tailEnd type="triangle"/>
+              </a:ln>
+            </p:spPr>
+            <p:style>
+              <a:lnRef idx="1">
+                <a:schemeClr val="dk1"/>
+              </a:lnRef>
+              <a:fillRef idx="0">
+                <a:schemeClr val="dk1"/>
+              </a:fillRef>
+              <a:effectRef idx="0">
+                <a:schemeClr val="dk1"/>
+              </a:effectRef>
+              <a:fontRef idx="minor">
+                <a:schemeClr val="tx1"/>
+              </a:fontRef>
+            </p:style>
+          </p:cxnSp>
+          <p:grpSp>
+            <p:nvGrpSpPr>
+              <p:cNvPr id="549" name="Groupe 548">
+                <a:extLst>
+                  <a:ext uri="{FF2B5EF4-FFF2-40B4-BE49-F238E27FC236}">
+                    <a16:creationId xmlns:a16="http://schemas.microsoft.com/office/drawing/2014/main" id="{668687B7-A147-A898-1A44-EF217FCDEBF3}"/>
+                  </a:ext>
+                </a:extLst>
+              </p:cNvPr>
+              <p:cNvGrpSpPr/>
+              <p:nvPr/>
+            </p:nvGrpSpPr>
+            <p:grpSpPr>
+              <a:xfrm>
+                <a:off x="3801142" y="4220138"/>
+                <a:ext cx="1978324" cy="1615402"/>
+                <a:chOff x="2086605" y="549463"/>
+                <a:chExt cx="1978324" cy="1615402"/>
+              </a:xfrm>
+            </p:grpSpPr>
+            <p:sp>
+              <p:nvSpPr>
+                <p:cNvPr id="550" name="Rectangle 549">
+                  <a:extLst>
+                    <a:ext uri="{FF2B5EF4-FFF2-40B4-BE49-F238E27FC236}">
+                      <a16:creationId xmlns:a16="http://schemas.microsoft.com/office/drawing/2014/main" id="{372F9132-D1E3-0FBD-8DB4-8D21AC03C5AA}"/>
+                    </a:ext>
+                  </a:extLst>
+                </p:cNvPr>
+                <p:cNvSpPr/>
+                <p:nvPr/>
+              </p:nvSpPr>
+              <p:spPr>
+                <a:xfrm>
+                  <a:off x="2086605" y="604059"/>
+                  <a:ext cx="1978324" cy="1414732"/>
+                </a:xfrm>
+                <a:prstGeom prst="rect">
+                  <a:avLst/>
+                </a:prstGeom>
+                <a:noFill/>
+                <a:ln>
+                  <a:solidFill>
+                    <a:schemeClr val="tx1">
+                      <a:lumMod val="95000"/>
+                      <a:lumOff val="5000"/>
+                    </a:schemeClr>
+                  </a:solidFill>
+                </a:ln>
+              </p:spPr>
+              <p:style>
+                <a:lnRef idx="2">
+                  <a:schemeClr val="accent1">
+                    <a:shade val="15000"/>
+                  </a:schemeClr>
+                </a:lnRef>
+                <a:fillRef idx="1">
+                  <a:schemeClr val="accent1"/>
+                </a:fillRef>
+                <a:effectRef idx="0">
+                  <a:schemeClr val="accent1"/>
+                </a:effectRef>
+                <a:fontRef idx="minor">
+                  <a:schemeClr val="lt1"/>
+                </a:fontRef>
+              </p:style>
+              <p:txBody>
+                <a:bodyPr rtlCol="0" anchor="ctr"/>
+                <a:lstStyle/>
+                <a:p>
+                  <a:pPr algn="ctr"/>
+                  <a:endParaRPr lang="en-GB"/>
+                </a:p>
+              </p:txBody>
+            </p:sp>
+            <p:cxnSp>
+              <p:nvCxnSpPr>
+                <p:cNvPr id="551" name="Connecteur droit 550">
+                  <a:extLst>
+                    <a:ext uri="{FF2B5EF4-FFF2-40B4-BE49-F238E27FC236}">
+                      <a16:creationId xmlns:a16="http://schemas.microsoft.com/office/drawing/2014/main" id="{F0EACFA5-76A4-1DA9-F355-C7B5B9A96A12}"/>
+                    </a:ext>
+                  </a:extLst>
+                </p:cNvPr>
+                <p:cNvCxnSpPr>
+                  <a:cxnSpLocks/>
+                </p:cNvCxnSpPr>
+                <p:nvPr/>
+              </p:nvCxnSpPr>
+              <p:spPr>
+                <a:xfrm>
+                  <a:off x="2449513" y="604059"/>
+                  <a:ext cx="0" cy="1414732"/>
+                </a:xfrm>
+                <a:prstGeom prst="line">
+                  <a:avLst/>
+                </a:prstGeom>
+              </p:spPr>
+              <p:style>
+                <a:lnRef idx="2">
+                  <a:schemeClr val="dk1"/>
+                </a:lnRef>
+                <a:fillRef idx="0">
+                  <a:schemeClr val="dk1"/>
+                </a:fillRef>
+                <a:effectRef idx="1">
+                  <a:schemeClr val="dk1"/>
+                </a:effectRef>
+                <a:fontRef idx="minor">
+                  <a:schemeClr val="tx1"/>
+                </a:fontRef>
+              </p:style>
+            </p:cxnSp>
+            <p:cxnSp>
+              <p:nvCxnSpPr>
+                <p:cNvPr id="552" name="Connecteur droit 551">
+                  <a:extLst>
+                    <a:ext uri="{FF2B5EF4-FFF2-40B4-BE49-F238E27FC236}">
+                      <a16:creationId xmlns:a16="http://schemas.microsoft.com/office/drawing/2014/main" id="{4F79D97D-4445-A882-A25E-9AB4C47AACD3}"/>
+                    </a:ext>
+                  </a:extLst>
+                </p:cNvPr>
+                <p:cNvCxnSpPr/>
+                <p:nvPr/>
+              </p:nvCxnSpPr>
+              <p:spPr>
+                <a:xfrm>
+                  <a:off x="2086605" y="833438"/>
+                  <a:ext cx="1978324" cy="0"/>
+                </a:xfrm>
+                <a:prstGeom prst="line">
+                  <a:avLst/>
+                </a:prstGeom>
+              </p:spPr>
+              <p:style>
+                <a:lnRef idx="2">
+                  <a:schemeClr val="dk1"/>
+                </a:lnRef>
+                <a:fillRef idx="0">
+                  <a:schemeClr val="dk1"/>
+                </a:fillRef>
+                <a:effectRef idx="1">
+                  <a:schemeClr val="dk1"/>
+                </a:effectRef>
+                <a:fontRef idx="minor">
+                  <a:schemeClr val="tx1"/>
+                </a:fontRef>
+              </p:style>
+            </p:cxnSp>
+            <p:sp>
+              <p:nvSpPr>
+                <p:cNvPr id="554" name="ZoneTexte 553">
+                  <a:extLst>
+                    <a:ext uri="{FF2B5EF4-FFF2-40B4-BE49-F238E27FC236}">
+                      <a16:creationId xmlns:a16="http://schemas.microsoft.com/office/drawing/2014/main" id="{D259C4C0-DEC7-4371-BDDC-66D0BD863FEE}"/>
+                    </a:ext>
+                  </a:extLst>
+                </p:cNvPr>
+                <p:cNvSpPr txBox="1"/>
+                <p:nvPr/>
+              </p:nvSpPr>
+              <p:spPr>
+                <a:xfrm rot="16200000">
+                  <a:off x="1460358" y="1226359"/>
+                  <a:ext cx="1615402" cy="261610"/>
+                </a:xfrm>
+                <a:prstGeom prst="rect">
+                  <a:avLst/>
+                </a:prstGeom>
+                <a:noFill/>
+              </p:spPr>
+              <p:txBody>
+                <a:bodyPr wrap="square" rtlCol="0">
+                  <a:spAutoFit/>
+                </a:bodyPr>
+                <a:lstStyle/>
+                <a:p>
+                  <a:pPr algn="ctr"/>
+                  <a:r>
+                    <a:rPr lang="en-US" sz="1100" dirty="0">
+                      <a:latin typeface="Arial" panose="020B0604020202020204" pitchFamily="34" charset="0"/>
+                      <a:cs typeface="Arial" panose="020B0604020202020204" pitchFamily="34" charset="0"/>
+                    </a:rPr>
+                    <a:t>Species</a:t>
+                  </a:r>
+                  <a:endParaRPr lang="en-GB" sz="1100" dirty="0">
+                    <a:latin typeface="Arial" panose="020B0604020202020204" pitchFamily="34" charset="0"/>
+                    <a:cs typeface="Arial" panose="020B0604020202020204" pitchFamily="34" charset="0"/>
+                  </a:endParaRPr>
+                </a:p>
+              </p:txBody>
+            </p:sp>
+          </p:grpSp>
+          <p:sp>
+            <p:nvSpPr>
+              <p:cNvPr id="555" name="ZoneTexte 554">
+                <a:extLst>
+                  <a:ext uri="{FF2B5EF4-FFF2-40B4-BE49-F238E27FC236}">
+                    <a16:creationId xmlns:a16="http://schemas.microsoft.com/office/drawing/2014/main" id="{D053ACDB-72BF-588A-578C-02D6BD124945}"/>
+                  </a:ext>
+                </a:extLst>
+              </p:cNvPr>
+              <p:cNvSpPr txBox="1"/>
+              <p:nvPr/>
+            </p:nvSpPr>
+            <p:spPr>
+              <a:xfrm>
+                <a:off x="3976459" y="4237511"/>
+                <a:ext cx="1978310" cy="307777"/>
+              </a:xfrm>
+              <a:prstGeom prst="rect">
+                <a:avLst/>
+              </a:prstGeom>
+              <a:noFill/>
+            </p:spPr>
+            <p:txBody>
+              <a:bodyPr wrap="square" rtlCol="0">
+                <a:spAutoFit/>
+              </a:bodyPr>
+              <a:lstStyle/>
+              <a:p>
+                <a:pPr algn="ctr"/>
+                <a:r>
+                  <a:rPr lang="en-US" sz="1400" b="1" dirty="0">
+                    <a:latin typeface="Arial" panose="020B0604020202020204" pitchFamily="34" charset="0"/>
+                    <a:cs typeface="Arial" panose="020B0604020202020204" pitchFamily="34" charset="0"/>
+                  </a:rPr>
+                  <a:t>Morphological</a:t>
+                </a:r>
+                <a:endParaRPr lang="en-GB" sz="1400" b="1" dirty="0">
+                  <a:latin typeface="Arial" panose="020B0604020202020204" pitchFamily="34" charset="0"/>
+                  <a:cs typeface="Arial" panose="020B0604020202020204" pitchFamily="34" charset="0"/>
+                </a:endParaRPr>
+              </a:p>
+            </p:txBody>
+          </p:sp>
+          <p:sp>
+            <p:nvSpPr>
+              <p:cNvPr id="570" name="Rectangle 569">
+                <a:extLst>
+                  <a:ext uri="{FF2B5EF4-FFF2-40B4-BE49-F238E27FC236}">
+                    <a16:creationId xmlns:a16="http://schemas.microsoft.com/office/drawing/2014/main" id="{BFA579EF-2E4B-E3F1-16EA-697E5C7CD2F3}"/>
+                  </a:ext>
+                </a:extLst>
+              </p:cNvPr>
+              <p:cNvSpPr/>
+              <p:nvPr/>
+            </p:nvSpPr>
+            <p:spPr>
+              <a:xfrm>
+                <a:off x="5781551" y="4270933"/>
                 <a:ext cx="1978324" cy="1414732"/>
               </a:xfrm>
               <a:prstGeom prst="rect">
@@ -3581,48 +5646,10 @@
           </p:sp>
           <p:cxnSp>
             <p:nvCxnSpPr>
-              <p:cNvPr id="4" name="Connecteur droit 3">
+              <p:cNvPr id="571" name="Connecteur droit 570">
                 <a:extLst>
                   <a:ext uri="{FF2B5EF4-FFF2-40B4-BE49-F238E27FC236}">
-                    <a16:creationId xmlns:a16="http://schemas.microsoft.com/office/drawing/2014/main" id="{B88AB7B7-59F2-6EC1-E586-028D40C8C157}"/>
-                  </a:ext>
-                </a:extLst>
-              </p:cNvPr>
-              <p:cNvCxnSpPr>
-                <a:cxnSpLocks/>
-              </p:cNvCxnSpPr>
-              <p:nvPr/>
-            </p:nvCxnSpPr>
-            <p:spPr>
-              <a:xfrm>
-                <a:off x="2449513" y="604059"/>
-                <a:ext cx="0" cy="1414732"/>
-              </a:xfrm>
-              <a:prstGeom prst="line">
-                <a:avLst/>
-              </a:prstGeom>
-            </p:spPr>
-            <p:style>
-              <a:lnRef idx="2">
-                <a:schemeClr val="dk1"/>
-              </a:lnRef>
-              <a:fillRef idx="0">
-                <a:schemeClr val="dk1"/>
-              </a:fillRef>
-              <a:effectRef idx="1">
-                <a:schemeClr val="dk1"/>
-              </a:effectRef>
-              <a:fontRef idx="minor">
-                <a:schemeClr val="tx1"/>
-              </a:fontRef>
-            </p:style>
-          </p:cxnSp>
-          <p:cxnSp>
-            <p:nvCxnSpPr>
-              <p:cNvPr id="8" name="Connecteur droit 7">
-                <a:extLst>
-                  <a:ext uri="{FF2B5EF4-FFF2-40B4-BE49-F238E27FC236}">
-                    <a16:creationId xmlns:a16="http://schemas.microsoft.com/office/drawing/2014/main" id="{EEAB31D4-0F7F-4CED-8B50-B9B27D9018FC}"/>
+                    <a16:creationId xmlns:a16="http://schemas.microsoft.com/office/drawing/2014/main" id="{D5D57BFF-D35D-0C32-2FB0-5E48C026F37B}"/>
                   </a:ext>
                 </a:extLst>
               </p:cNvPr>
@@ -3631,7 +5658,7 @@
             </p:nvCxnSpPr>
             <p:spPr>
               <a:xfrm>
-                <a:off x="2086605" y="833438"/>
+                <a:off x="5781551" y="4500312"/>
                 <a:ext cx="1978324" cy="0"/>
               </a:xfrm>
               <a:prstGeom prst="line">
@@ -3655,117 +5682,10 @@
           </p:cxnSp>
           <p:sp>
             <p:nvSpPr>
-              <p:cNvPr id="9" name="ZoneTexte 8">
+              <p:cNvPr id="572" name="Rectangle 571">
                 <a:extLst>
                   <a:ext uri="{FF2B5EF4-FFF2-40B4-BE49-F238E27FC236}">
-                    <a16:creationId xmlns:a16="http://schemas.microsoft.com/office/drawing/2014/main" id="{8817A92F-9CCF-16AA-F78A-169B313864C7}"/>
-                  </a:ext>
-                </a:extLst>
-              </p:cNvPr>
-              <p:cNvSpPr txBox="1"/>
-              <p:nvPr/>
-            </p:nvSpPr>
-            <p:spPr>
-              <a:xfrm>
-                <a:off x="2449513" y="585009"/>
-                <a:ext cx="1615402" cy="261610"/>
-              </a:xfrm>
-              <a:prstGeom prst="rect">
-                <a:avLst/>
-              </a:prstGeom>
-              <a:noFill/>
-            </p:spPr>
-            <p:txBody>
-              <a:bodyPr wrap="square" rtlCol="0">
-                <a:spAutoFit/>
-              </a:bodyPr>
-              <a:lstStyle/>
-              <a:p>
-                <a:pPr algn="ctr"/>
-                <a:r>
-                  <a:rPr lang="en-US" sz="1100" dirty="0">
-                    <a:latin typeface="Arial" panose="020B0604020202020204" pitchFamily="34" charset="0"/>
-                    <a:cs typeface="Arial" panose="020B0604020202020204" pitchFamily="34" charset="0"/>
-                  </a:rPr>
-                  <a:t>Traits</a:t>
-                </a:r>
-                <a:endParaRPr lang="en-GB" sz="1100" dirty="0">
-                  <a:latin typeface="Arial" panose="020B0604020202020204" pitchFamily="34" charset="0"/>
-                  <a:cs typeface="Arial" panose="020B0604020202020204" pitchFamily="34" charset="0"/>
-                </a:endParaRPr>
-              </a:p>
-            </p:txBody>
-          </p:sp>
-          <p:sp>
-            <p:nvSpPr>
-              <p:cNvPr id="10" name="ZoneTexte 9">
-                <a:extLst>
-                  <a:ext uri="{FF2B5EF4-FFF2-40B4-BE49-F238E27FC236}">
-                    <a16:creationId xmlns:a16="http://schemas.microsoft.com/office/drawing/2014/main" id="{F8E02931-4918-C178-B79C-611D49EBD330}"/>
-                  </a:ext>
-                </a:extLst>
-              </p:cNvPr>
-              <p:cNvSpPr txBox="1"/>
-              <p:nvPr/>
-            </p:nvSpPr>
-            <p:spPr>
-              <a:xfrm rot="16200000">
-                <a:off x="1460358" y="1226359"/>
-                <a:ext cx="1615402" cy="261610"/>
-              </a:xfrm>
-              <a:prstGeom prst="rect">
-                <a:avLst/>
-              </a:prstGeom>
-              <a:noFill/>
-            </p:spPr>
-            <p:txBody>
-              <a:bodyPr wrap="square" rtlCol="0">
-                <a:spAutoFit/>
-              </a:bodyPr>
-              <a:lstStyle/>
-              <a:p>
-                <a:pPr algn="ctr"/>
-                <a:r>
-                  <a:rPr lang="en-US" sz="1100" dirty="0">
-                    <a:latin typeface="Arial" panose="020B0604020202020204" pitchFamily="34" charset="0"/>
-                    <a:cs typeface="Arial" panose="020B0604020202020204" pitchFamily="34" charset="0"/>
-                  </a:rPr>
-                  <a:t>Species</a:t>
-                </a:r>
-                <a:endParaRPr lang="en-GB" sz="1100" dirty="0">
-                  <a:latin typeface="Arial" panose="020B0604020202020204" pitchFamily="34" charset="0"/>
-                  <a:cs typeface="Arial" panose="020B0604020202020204" pitchFamily="34" charset="0"/>
-                </a:endParaRPr>
-              </a:p>
-            </p:txBody>
-          </p:sp>
-        </p:grpSp>
-        <p:grpSp>
-          <p:nvGrpSpPr>
-            <p:cNvPr id="12" name="Groupe 11">
-              <a:extLst>
-                <a:ext uri="{FF2B5EF4-FFF2-40B4-BE49-F238E27FC236}">
-                  <a16:creationId xmlns:a16="http://schemas.microsoft.com/office/drawing/2014/main" id="{DE7FEBB4-48EC-BDCF-2037-BD27ACC875B9}"/>
-                </a:ext>
-              </a:extLst>
-            </p:cNvPr>
-            <p:cNvGrpSpPr/>
-            <p:nvPr/>
-          </p:nvGrpSpPr>
-          <p:grpSpPr>
-            <a:xfrm>
-              <a:off x="5736668" y="479453"/>
-              <a:ext cx="1978324" cy="1615402"/>
-              <a:chOff x="2086605" y="549463"/>
-              <a:chExt cx="1978324" cy="1615402"/>
-            </a:xfrm>
-          </p:grpSpPr>
-          <p:sp>
-            <p:nvSpPr>
-              <p:cNvPr id="13" name="Rectangle 12">
-                <a:extLst>
-                  <a:ext uri="{FF2B5EF4-FFF2-40B4-BE49-F238E27FC236}">
-                    <a16:creationId xmlns:a16="http://schemas.microsoft.com/office/drawing/2014/main" id="{77CB7CCB-5424-937A-DF9F-9C9F3EDB74C1}"/>
+                    <a16:creationId xmlns:a16="http://schemas.microsoft.com/office/drawing/2014/main" id="{4C6805DE-228D-B4E7-AB73-44F130CA57FF}"/>
                   </a:ext>
                 </a:extLst>
               </p:cNvPr>
@@ -3774,7 +5694,7 @@
             </p:nvSpPr>
             <p:spPr>
               <a:xfrm>
-                <a:off x="2086605" y="604059"/>
+                <a:off x="7762651" y="4273154"/>
                 <a:ext cx="1978324" cy="1414732"/>
               </a:xfrm>
               <a:prstGeom prst="rect">
@@ -3817,48 +5737,10 @@
           </p:sp>
           <p:cxnSp>
             <p:nvCxnSpPr>
-              <p:cNvPr id="14" name="Connecteur droit 13">
+              <p:cNvPr id="573" name="Connecteur droit 572">
                 <a:extLst>
                   <a:ext uri="{FF2B5EF4-FFF2-40B4-BE49-F238E27FC236}">
-                    <a16:creationId xmlns:a16="http://schemas.microsoft.com/office/drawing/2014/main" id="{634789B7-16FF-2E17-8776-D95F9CEC3C5E}"/>
-                  </a:ext>
-                </a:extLst>
-              </p:cNvPr>
-              <p:cNvCxnSpPr>
-                <a:cxnSpLocks/>
-              </p:cNvCxnSpPr>
-              <p:nvPr/>
-            </p:nvCxnSpPr>
-            <p:spPr>
-              <a:xfrm>
-                <a:off x="2449513" y="604059"/>
-                <a:ext cx="0" cy="1414732"/>
-              </a:xfrm>
-              <a:prstGeom prst="line">
-                <a:avLst/>
-              </a:prstGeom>
-            </p:spPr>
-            <p:style>
-              <a:lnRef idx="2">
-                <a:schemeClr val="dk1"/>
-              </a:lnRef>
-              <a:fillRef idx="0">
-                <a:schemeClr val="dk1"/>
-              </a:fillRef>
-              <a:effectRef idx="1">
-                <a:schemeClr val="dk1"/>
-              </a:effectRef>
-              <a:fontRef idx="minor">
-                <a:schemeClr val="tx1"/>
-              </a:fontRef>
-            </p:style>
-          </p:cxnSp>
-          <p:cxnSp>
-            <p:nvCxnSpPr>
-              <p:cNvPr id="15" name="Connecteur droit 14">
-                <a:extLst>
-                  <a:ext uri="{FF2B5EF4-FFF2-40B4-BE49-F238E27FC236}">
-                    <a16:creationId xmlns:a16="http://schemas.microsoft.com/office/drawing/2014/main" id="{60713A28-D1B1-8E82-05A2-1BA299DE68AE}"/>
+                    <a16:creationId xmlns:a16="http://schemas.microsoft.com/office/drawing/2014/main" id="{F29EC175-941D-0E22-B0E4-5DAB6B5D3D53}"/>
                   </a:ext>
                 </a:extLst>
               </p:cNvPr>
@@ -3867,7 +5749,7 @@
             </p:nvCxnSpPr>
             <p:spPr>
               <a:xfrm>
-                <a:off x="2086605" y="833438"/>
+                <a:off x="7762651" y="4502533"/>
                 <a:ext cx="1978324" cy="0"/>
               </a:xfrm>
               <a:prstGeom prst="line">
@@ -3891,10 +5773,10 @@
           </p:cxnSp>
           <p:sp>
             <p:nvSpPr>
-              <p:cNvPr id="16" name="ZoneTexte 15">
+              <p:cNvPr id="574" name="ZoneTexte 573">
                 <a:extLst>
                   <a:ext uri="{FF2B5EF4-FFF2-40B4-BE49-F238E27FC236}">
-                    <a16:creationId xmlns:a16="http://schemas.microsoft.com/office/drawing/2014/main" id="{DB12CD71-6729-E1D1-CF45-AEBF0FDE4E84}"/>
+                    <a16:creationId xmlns:a16="http://schemas.microsoft.com/office/drawing/2014/main" id="{0713C39D-E4D4-C967-238B-AA0A9DCEBCDF}"/>
                   </a:ext>
                 </a:extLst>
               </p:cNvPr>
@@ -3903,8 +5785,8 @@
             </p:nvSpPr>
             <p:spPr>
               <a:xfrm>
-                <a:off x="2449513" y="585009"/>
-                <a:ext cx="1615402" cy="261610"/>
+                <a:off x="5749244" y="4249006"/>
+                <a:ext cx="1978310" cy="307777"/>
               </a:xfrm>
               <a:prstGeom prst="rect">
                 <a:avLst/>
@@ -3919,13 +5801,13 @@
               <a:p>
                 <a:pPr algn="ctr"/>
                 <a:r>
-                  <a:rPr lang="en-US" sz="1100" dirty="0">
+                  <a:rPr lang="en-US" sz="1400" b="1" dirty="0">
                     <a:latin typeface="Arial" panose="020B0604020202020204" pitchFamily="34" charset="0"/>
                     <a:cs typeface="Arial" panose="020B0604020202020204" pitchFamily="34" charset="0"/>
                   </a:rPr>
-                  <a:t>Traits</a:t>
+                  <a:t>Life-history</a:t>
                 </a:r>
-                <a:endParaRPr lang="en-GB" sz="1100" dirty="0">
+                <a:endParaRPr lang="en-GB" sz="1400" b="1" dirty="0">
                   <a:latin typeface="Arial" panose="020B0604020202020204" pitchFamily="34" charset="0"/>
                   <a:cs typeface="Arial" panose="020B0604020202020204" pitchFamily="34" charset="0"/>
                 </a:endParaRPr>
@@ -3934,10 +5816,10 @@
           </p:sp>
           <p:sp>
             <p:nvSpPr>
-              <p:cNvPr id="17" name="ZoneTexte 16">
+              <p:cNvPr id="575" name="ZoneTexte 574">
                 <a:extLst>
                   <a:ext uri="{FF2B5EF4-FFF2-40B4-BE49-F238E27FC236}">
-                    <a16:creationId xmlns:a16="http://schemas.microsoft.com/office/drawing/2014/main" id="{2148F6CE-4927-8AC8-61A8-0DFB87A7826E}"/>
+                    <a16:creationId xmlns:a16="http://schemas.microsoft.com/office/drawing/2014/main" id="{232D98E1-DA76-15DD-7893-F1DA6794E43A}"/>
                   </a:ext>
                 </a:extLst>
               </p:cNvPr>
@@ -3945,9 +5827,9 @@
               <p:nvPr/>
             </p:nvSpPr>
             <p:spPr>
-              <a:xfrm rot="16200000">
-                <a:off x="1460358" y="1226359"/>
-                <a:ext cx="1615402" cy="261610"/>
+              <a:xfrm>
+                <a:off x="9305391" y="173373"/>
+                <a:ext cx="1978310" cy="307777"/>
               </a:xfrm>
               <a:prstGeom prst="rect">
                 <a:avLst/>
@@ -3962,46 +5844,309 @@
               <a:p>
                 <a:pPr algn="ctr"/>
                 <a:r>
-                  <a:rPr lang="en-US" sz="1100" dirty="0">
+                  <a:rPr lang="en-US" sz="1400" b="1" dirty="0">
                     <a:latin typeface="Arial" panose="020B0604020202020204" pitchFamily="34" charset="0"/>
                     <a:cs typeface="Arial" panose="020B0604020202020204" pitchFamily="34" charset="0"/>
                   </a:rPr>
-                  <a:t>Species</a:t>
+                  <a:t>Diet</a:t>
                 </a:r>
-                <a:endParaRPr lang="en-GB" sz="1100" dirty="0">
+                <a:endParaRPr lang="en-GB" sz="1400" b="1" dirty="0">
                   <a:latin typeface="Arial" panose="020B0604020202020204" pitchFamily="34" charset="0"/>
                   <a:cs typeface="Arial" panose="020B0604020202020204" pitchFamily="34" charset="0"/>
                 </a:endParaRPr>
               </a:p>
             </p:txBody>
           </p:sp>
-        </p:grpSp>
-        <p:grpSp>
-          <p:nvGrpSpPr>
-            <p:cNvPr id="18" name="Groupe 17">
+          <p:pic>
+            <p:nvPicPr>
+              <p:cNvPr id="576" name="Picture 4" descr="Bird Icon 582248 Vector Art at Vecteezy">
+                <a:extLst>
+                  <a:ext uri="{FF2B5EF4-FFF2-40B4-BE49-F238E27FC236}">
+                    <a16:creationId xmlns:a16="http://schemas.microsoft.com/office/drawing/2014/main" id="{44568E37-7A28-6C5C-15D5-606643128B98}"/>
+                  </a:ext>
+                </a:extLst>
+              </p:cNvPr>
+              <p:cNvPicPr>
+                <a:picLocks noChangeAspect="1" noChangeArrowheads="1"/>
+              </p:cNvPicPr>
+              <p:nvPr/>
+            </p:nvPicPr>
+            <p:blipFill>
+              <a:blip r:embed="rId4">
+                <a:extLst>
+                  <a:ext uri="{28A0092B-C50C-407E-A947-70E740481C1C}">
+                    <a14:useLocalDpi xmlns:a14="http://schemas.microsoft.com/office/drawing/2010/main" val="0"/>
+                  </a:ext>
+                </a:extLst>
+              </a:blip>
+              <a:stretch>
+                <a:fillRect/>
+              </a:stretch>
+            </p:blipFill>
+            <p:spPr bwMode="auto">
+              <a:xfrm>
+                <a:off x="4569039" y="4605997"/>
+                <a:ext cx="511422" cy="511422"/>
+              </a:xfrm>
+              <a:prstGeom prst="rect">
+                <a:avLst/>
+              </a:prstGeom>
+              <a:noFill/>
               <a:extLst>
-                <a:ext uri="{FF2B5EF4-FFF2-40B4-BE49-F238E27FC236}">
-                  <a16:creationId xmlns:a16="http://schemas.microsoft.com/office/drawing/2014/main" id="{65842CA2-903B-9A40-3399-730C25323FC7}"/>
+                <a:ext uri="{909E8E84-426E-40DD-AFC4-6F175D3DCCD1}">
+                  <a14:hiddenFill xmlns:a14="http://schemas.microsoft.com/office/drawing/2010/main">
+                    <a:solidFill>
+                      <a:srgbClr val="FFFFFF"/>
+                    </a:solidFill>
+                  </a14:hiddenFill>
                 </a:ext>
               </a:extLst>
-            </p:cNvPr>
-            <p:cNvGrpSpPr/>
-            <p:nvPr/>
-          </p:nvGrpSpPr>
-          <p:grpSpPr>
-            <a:xfrm>
-              <a:off x="9273126" y="424857"/>
-              <a:ext cx="1978324" cy="1615402"/>
-              <a:chOff x="2086605" y="549463"/>
-              <a:chExt cx="1978324" cy="1615402"/>
-            </a:xfrm>
-          </p:grpSpPr>
+            </p:spPr>
+          </p:pic>
+          <p:pic>
+            <p:nvPicPr>
+              <p:cNvPr id="578" name="Picture 4" descr="Bird Icon 582248 Vector Art at Vecteezy">
+                <a:extLst>
+                  <a:ext uri="{FF2B5EF4-FFF2-40B4-BE49-F238E27FC236}">
+                    <a16:creationId xmlns:a16="http://schemas.microsoft.com/office/drawing/2014/main" id="{28A9B509-8D16-0342-27A4-B41C15EAB2C8}"/>
+                  </a:ext>
+                </a:extLst>
+              </p:cNvPr>
+              <p:cNvPicPr>
+                <a:picLocks noChangeAspect="1" noChangeArrowheads="1"/>
+              </p:cNvPicPr>
+              <p:nvPr/>
+            </p:nvPicPr>
+            <p:blipFill>
+              <a:blip r:embed="rId4">
+                <a:extLst>
+                  <a:ext uri="{28A0092B-C50C-407E-A947-70E740481C1C}">
+                    <a14:useLocalDpi xmlns:a14="http://schemas.microsoft.com/office/drawing/2010/main" val="0"/>
+                  </a:ext>
+                </a:extLst>
+              </a:blip>
+              <a:stretch>
+                <a:fillRect/>
+              </a:stretch>
+            </p:blipFill>
+            <p:spPr bwMode="auto">
+              <a:xfrm>
+                <a:off x="8493145" y="4605997"/>
+                <a:ext cx="511422" cy="511422"/>
+              </a:xfrm>
+              <a:prstGeom prst="rect">
+                <a:avLst/>
+              </a:prstGeom>
+              <a:noFill/>
+              <a:extLst>
+                <a:ext uri="{909E8E84-426E-40DD-AFC4-6F175D3DCCD1}">
+                  <a14:hiddenFill xmlns:a14="http://schemas.microsoft.com/office/drawing/2010/main">
+                    <a:solidFill>
+                      <a:srgbClr val="FFFFFF"/>
+                    </a:solidFill>
+                  </a14:hiddenFill>
+                </a:ext>
+              </a:extLst>
+            </p:spPr>
+          </p:pic>
+          <p:pic>
+            <p:nvPicPr>
+              <p:cNvPr id="580" name="Picture 4" descr="Bird Icon 582248 Vector Art at Vecteezy">
+                <a:extLst>
+                  <a:ext uri="{FF2B5EF4-FFF2-40B4-BE49-F238E27FC236}">
+                    <a16:creationId xmlns:a16="http://schemas.microsoft.com/office/drawing/2014/main" id="{1834BA8E-1FBD-6D55-5E2A-964DA7DEF60C}"/>
+                  </a:ext>
+                </a:extLst>
+              </p:cNvPr>
+              <p:cNvPicPr>
+                <a:picLocks noChangeAspect="1" noChangeArrowheads="1"/>
+              </p:cNvPicPr>
+              <p:nvPr/>
+            </p:nvPicPr>
+            <p:blipFill>
+              <a:blip r:embed="rId4">
+                <a:extLst>
+                  <a:ext uri="{28A0092B-C50C-407E-A947-70E740481C1C}">
+                    <a14:useLocalDpi xmlns:a14="http://schemas.microsoft.com/office/drawing/2010/main" val="0"/>
+                  </a:ext>
+                </a:extLst>
+              </a:blip>
+              <a:stretch>
+                <a:fillRect/>
+              </a:stretch>
+            </p:blipFill>
+            <p:spPr bwMode="auto">
+              <a:xfrm>
+                <a:off x="6467340" y="4596406"/>
+                <a:ext cx="511422" cy="511422"/>
+              </a:xfrm>
+              <a:prstGeom prst="rect">
+                <a:avLst/>
+              </a:prstGeom>
+              <a:noFill/>
+              <a:extLst>
+                <a:ext uri="{909E8E84-426E-40DD-AFC4-6F175D3DCCD1}">
+                  <a14:hiddenFill xmlns:a14="http://schemas.microsoft.com/office/drawing/2010/main">
+                    <a:solidFill>
+                      <a:srgbClr val="FFFFFF"/>
+                    </a:solidFill>
+                  </a14:hiddenFill>
+                </a:ext>
+              </a:extLst>
+            </p:spPr>
+          </p:pic>
           <p:sp>
             <p:nvSpPr>
-              <p:cNvPr id="19" name="Rectangle 18">
+              <p:cNvPr id="581" name="ZoneTexte 580">
                 <a:extLst>
                   <a:ext uri="{FF2B5EF4-FFF2-40B4-BE49-F238E27FC236}">
-                    <a16:creationId xmlns:a16="http://schemas.microsoft.com/office/drawing/2014/main" id="{1B45EB7A-44C0-A9EA-80B9-7AB235F61677}"/>
+                    <a16:creationId xmlns:a16="http://schemas.microsoft.com/office/drawing/2014/main" id="{1AAAE839-FF83-5298-2E80-4A59A29A30B8}"/>
+                  </a:ext>
+                </a:extLst>
+              </p:cNvPr>
+              <p:cNvSpPr txBox="1"/>
+              <p:nvPr/>
+            </p:nvSpPr>
+            <p:spPr>
+              <a:xfrm>
+                <a:off x="161105" y="4471666"/>
+                <a:ext cx="2286964" cy="646331"/>
+              </a:xfrm>
+              <a:prstGeom prst="rect">
+                <a:avLst/>
+              </a:prstGeom>
+              <a:noFill/>
+            </p:spPr>
+            <p:txBody>
+              <a:bodyPr wrap="square" rtlCol="0">
+                <a:spAutoFit/>
+              </a:bodyPr>
+              <a:lstStyle/>
+              <a:p>
+                <a:r>
+                  <a:rPr lang="en-US" b="1" dirty="0">
+                    <a:latin typeface="Arial" panose="020B0604020202020204" pitchFamily="34" charset="0"/>
+                    <a:cs typeface="Arial" panose="020B0604020202020204" pitchFamily="34" charset="0"/>
+                  </a:rPr>
+                  <a:t>Combined</a:t>
+                </a:r>
+              </a:p>
+              <a:p>
+                <a:r>
+                  <a:rPr lang="en-US" b="1" dirty="0">
+                    <a:latin typeface="Arial" panose="020B0604020202020204" pitchFamily="34" charset="0"/>
+                    <a:cs typeface="Arial" panose="020B0604020202020204" pitchFamily="34" charset="0"/>
+                  </a:rPr>
+                  <a:t>trait database</a:t>
+                </a:r>
+                <a:r>
+                  <a:rPr lang="en-001" b="1" dirty="0">
+                    <a:latin typeface="Arial" panose="020B0604020202020204" pitchFamily="34" charset="0"/>
+                    <a:cs typeface="Arial" panose="020B0604020202020204" pitchFamily="34" charset="0"/>
+                  </a:rPr>
+                  <a:t>s</a:t>
+                </a:r>
+                <a:endParaRPr lang="en-GB" b="1" dirty="0">
+                  <a:latin typeface="Arial" panose="020B0604020202020204" pitchFamily="34" charset="0"/>
+                  <a:cs typeface="Arial" panose="020B0604020202020204" pitchFamily="34" charset="0"/>
+                </a:endParaRPr>
+              </a:p>
+            </p:txBody>
+          </p:sp>
+          <p:cxnSp>
+            <p:nvCxnSpPr>
+              <p:cNvPr id="585" name="Connecteur droit avec flèche 584">
+                <a:extLst>
+                  <a:ext uri="{FF2B5EF4-FFF2-40B4-BE49-F238E27FC236}">
+                    <a16:creationId xmlns:a16="http://schemas.microsoft.com/office/drawing/2014/main" id="{3C5513A2-8209-8B50-5B28-22156916128E}"/>
+                  </a:ext>
+                </a:extLst>
+              </p:cNvPr>
+              <p:cNvCxnSpPr>
+                <a:cxnSpLocks/>
+              </p:cNvCxnSpPr>
+              <p:nvPr/>
+            </p:nvCxnSpPr>
+            <p:spPr>
+              <a:xfrm>
+                <a:off x="6779964" y="6063635"/>
+                <a:ext cx="2644" cy="545237"/>
+              </a:xfrm>
+              <a:prstGeom prst="straightConnector1">
+                <a:avLst/>
+              </a:prstGeom>
+              <a:ln w="28575">
+                <a:tailEnd type="triangle"/>
+              </a:ln>
+            </p:spPr>
+            <p:style>
+              <a:lnRef idx="1">
+                <a:schemeClr val="dk1"/>
+              </a:lnRef>
+              <a:fillRef idx="0">
+                <a:schemeClr val="dk1"/>
+              </a:fillRef>
+              <a:effectRef idx="0">
+                <a:schemeClr val="dk1"/>
+              </a:effectRef>
+              <a:fontRef idx="minor">
+                <a:schemeClr val="tx1"/>
+              </a:fontRef>
+            </p:style>
+          </p:cxnSp>
+          <p:sp>
+            <p:nvSpPr>
+              <p:cNvPr id="586" name="Accolade fermante 585">
+                <a:extLst>
+                  <a:ext uri="{FF2B5EF4-FFF2-40B4-BE49-F238E27FC236}">
+                    <a16:creationId xmlns:a16="http://schemas.microsoft.com/office/drawing/2014/main" id="{9F71BE5E-88C1-9C7A-5473-242EE949A24F}"/>
+                  </a:ext>
+                </a:extLst>
+              </p:cNvPr>
+              <p:cNvSpPr/>
+              <p:nvPr/>
+            </p:nvSpPr>
+            <p:spPr>
+              <a:xfrm rot="5400000">
+                <a:off x="6507883" y="3000351"/>
+                <a:ext cx="551033" cy="6026821"/>
+              </a:xfrm>
+              <a:prstGeom prst="rightBrace">
+                <a:avLst/>
+              </a:prstGeom>
+              <a:ln w="19050">
+                <a:prstDash val="solid"/>
+              </a:ln>
+            </p:spPr>
+            <p:style>
+              <a:lnRef idx="1">
+                <a:schemeClr val="dk1"/>
+              </a:lnRef>
+              <a:fillRef idx="0">
+                <a:schemeClr val="dk1"/>
+              </a:fillRef>
+              <a:effectRef idx="0">
+                <a:schemeClr val="dk1"/>
+              </a:effectRef>
+              <a:fontRef idx="minor">
+                <a:schemeClr val="tx1"/>
+              </a:fontRef>
+            </p:style>
+            <p:txBody>
+              <a:bodyPr rtlCol="0" anchor="ctr"/>
+              <a:lstStyle/>
+              <a:p>
+                <a:pPr algn="ctr"/>
+                <a:endParaRPr lang="en-GB"/>
+              </a:p>
+            </p:txBody>
+          </p:sp>
+          <p:sp>
+            <p:nvSpPr>
+              <p:cNvPr id="588" name="Rectangle 587">
+                <a:extLst>
+                  <a:ext uri="{FF2B5EF4-FFF2-40B4-BE49-F238E27FC236}">
+                    <a16:creationId xmlns:a16="http://schemas.microsoft.com/office/drawing/2014/main" id="{D9F8A7F7-3273-4328-40E2-D4BD097C6488}"/>
                   </a:ext>
                 </a:extLst>
               </p:cNvPr>
@@ -4010,20 +6155,86 @@
             </p:nvSpPr>
             <p:spPr>
               <a:xfrm>
-                <a:off x="2086605" y="604059"/>
-                <a:ext cx="1978324" cy="1414732"/>
+                <a:off x="1985385" y="6566175"/>
+                <a:ext cx="9663276" cy="666506"/>
               </a:xfrm>
               <a:prstGeom prst="rect">
                 <a:avLst/>
               </a:prstGeom>
-              <a:noFill/>
+              <a:solidFill>
+                <a:schemeClr val="bg1"/>
+              </a:solidFill>
+              <a:ln w="28575"/>
+            </p:spPr>
+            <p:style>
+              <a:lnRef idx="2">
+                <a:schemeClr val="accent1">
+                  <a:shade val="15000"/>
+                </a:schemeClr>
+              </a:lnRef>
+              <a:fillRef idx="1">
+                <a:schemeClr val="accent1"/>
+              </a:fillRef>
+              <a:effectRef idx="0">
+                <a:schemeClr val="accent1"/>
+              </a:effectRef>
+              <a:fontRef idx="minor">
+                <a:schemeClr val="lt1"/>
+              </a:fontRef>
+            </p:style>
+            <p:txBody>
+              <a:bodyPr rtlCol="0" anchor="ctr"/>
+              <a:lstStyle/>
+              <a:p>
+                <a:pPr algn="ctr"/>
+                <a:r>
+                  <a:rPr lang="en-US" sz="2000" b="1" dirty="0" err="1">
+                    <a:solidFill>
+                      <a:schemeClr val="tx1"/>
+                    </a:solidFill>
+                    <a:latin typeface="Arial" panose="020B0604020202020204" pitchFamily="34" charset="0"/>
+                    <a:cs typeface="Arial" panose="020B0604020202020204" pitchFamily="34" charset="0"/>
+                  </a:rPr>
+                  <a:t>PCoA</a:t>
+                </a:r>
+                <a:r>
+                  <a:rPr lang="en-US" sz="2000" b="1" dirty="0">
+                    <a:solidFill>
+                      <a:schemeClr val="tx1"/>
+                    </a:solidFill>
+                    <a:latin typeface="Arial" panose="020B0604020202020204" pitchFamily="34" charset="0"/>
+                    <a:cs typeface="Arial" panose="020B0604020202020204" pitchFamily="34" charset="0"/>
+                  </a:rPr>
+                  <a:t> with selected type of traits</a:t>
+                </a:r>
+              </a:p>
+            </p:txBody>
+          </p:sp>
+          <p:sp>
+            <p:nvSpPr>
+              <p:cNvPr id="591" name="Flèche : bas 590">
+                <a:extLst>
+                  <a:ext uri="{FF2B5EF4-FFF2-40B4-BE49-F238E27FC236}">
+                    <a16:creationId xmlns:a16="http://schemas.microsoft.com/office/drawing/2014/main" id="{3A06F143-D2D4-2682-CD15-DA277BAECF84}"/>
+                  </a:ext>
+                </a:extLst>
+              </p:cNvPr>
+              <p:cNvSpPr/>
+              <p:nvPr/>
+            </p:nvSpPr>
+            <p:spPr>
+              <a:xfrm>
+                <a:off x="2270303" y="7232681"/>
+                <a:ext cx="485798" cy="369332"/>
+              </a:xfrm>
+              <a:prstGeom prst="downArrow">
+                <a:avLst/>
+              </a:prstGeom>
+              <a:solidFill>
+                <a:schemeClr val="tx1"/>
+              </a:solidFill>
               <a:ln>
-                <a:solidFill>
-                  <a:schemeClr val="tx1">
-                    <a:lumMod val="95000"/>
-                    <a:lumOff val="5000"/>
-                  </a:schemeClr>
-                </a:solidFill>
+                <a:noFill/>
               </a:ln>
             </p:spPr>
             <p:style>
@@ -4051,1158 +6262,12 @@
               </a:p>
             </p:txBody>
           </p:sp>
-          <p:cxnSp>
-            <p:nvCxnSpPr>
-              <p:cNvPr id="20" name="Connecteur droit 19">
+          <p:sp>
+            <p:nvSpPr>
+              <p:cNvPr id="593" name="Flèche : bas 592">
                 <a:extLst>
                   <a:ext uri="{FF2B5EF4-FFF2-40B4-BE49-F238E27FC236}">
-                    <a16:creationId xmlns:a16="http://schemas.microsoft.com/office/drawing/2014/main" id="{E885B428-4F02-989C-DF0B-D59123327F2F}"/>
-                  </a:ext>
-                </a:extLst>
-              </p:cNvPr>
-              <p:cNvCxnSpPr>
-                <a:cxnSpLocks/>
-              </p:cNvCxnSpPr>
-              <p:nvPr/>
-            </p:nvCxnSpPr>
-            <p:spPr>
-              <a:xfrm>
-                <a:off x="2449513" y="604059"/>
-                <a:ext cx="0" cy="1414732"/>
-              </a:xfrm>
-              <a:prstGeom prst="line">
-                <a:avLst/>
-              </a:prstGeom>
-            </p:spPr>
-            <p:style>
-              <a:lnRef idx="2">
-                <a:schemeClr val="dk1"/>
-              </a:lnRef>
-              <a:fillRef idx="0">
-                <a:schemeClr val="dk1"/>
-              </a:fillRef>
-              <a:effectRef idx="1">
-                <a:schemeClr val="dk1"/>
-              </a:effectRef>
-              <a:fontRef idx="minor">
-                <a:schemeClr val="tx1"/>
-              </a:fontRef>
-            </p:style>
-          </p:cxnSp>
-          <p:cxnSp>
-            <p:nvCxnSpPr>
-              <p:cNvPr id="21" name="Connecteur droit 20">
-                <a:extLst>
-                  <a:ext uri="{FF2B5EF4-FFF2-40B4-BE49-F238E27FC236}">
-                    <a16:creationId xmlns:a16="http://schemas.microsoft.com/office/drawing/2014/main" id="{9BFE3960-781C-DBD1-559C-D356434610A3}"/>
-                  </a:ext>
-                </a:extLst>
-              </p:cNvPr>
-              <p:cNvCxnSpPr/>
-              <p:nvPr/>
-            </p:nvCxnSpPr>
-            <p:spPr>
-              <a:xfrm>
-                <a:off x="2086605" y="833438"/>
-                <a:ext cx="1978324" cy="0"/>
-              </a:xfrm>
-              <a:prstGeom prst="line">
-                <a:avLst/>
-              </a:prstGeom>
-            </p:spPr>
-            <p:style>
-              <a:lnRef idx="2">
-                <a:schemeClr val="dk1"/>
-              </a:lnRef>
-              <a:fillRef idx="0">
-                <a:schemeClr val="dk1"/>
-              </a:fillRef>
-              <a:effectRef idx="1">
-                <a:schemeClr val="dk1"/>
-              </a:effectRef>
-              <a:fontRef idx="minor">
-                <a:schemeClr val="tx1"/>
-              </a:fontRef>
-            </p:style>
-          </p:cxnSp>
-          <p:sp>
-            <p:nvSpPr>
-              <p:cNvPr id="22" name="ZoneTexte 21">
-                <a:extLst>
-                  <a:ext uri="{FF2B5EF4-FFF2-40B4-BE49-F238E27FC236}">
-                    <a16:creationId xmlns:a16="http://schemas.microsoft.com/office/drawing/2014/main" id="{B37F0A35-4476-519D-6C2E-4179FCAA177D}"/>
-                  </a:ext>
-                </a:extLst>
-              </p:cNvPr>
-              <p:cNvSpPr txBox="1"/>
-              <p:nvPr/>
-            </p:nvSpPr>
-            <p:spPr>
-              <a:xfrm>
-                <a:off x="2449513" y="585009"/>
-                <a:ext cx="1615402" cy="261610"/>
-              </a:xfrm>
-              <a:prstGeom prst="rect">
-                <a:avLst/>
-              </a:prstGeom>
-              <a:noFill/>
-            </p:spPr>
-            <p:txBody>
-              <a:bodyPr wrap="square" rtlCol="0">
-                <a:spAutoFit/>
-              </a:bodyPr>
-              <a:lstStyle/>
-              <a:p>
-                <a:pPr algn="ctr"/>
-                <a:r>
-                  <a:rPr lang="en-US" sz="1100" dirty="0">
-                    <a:latin typeface="Arial" panose="020B0604020202020204" pitchFamily="34" charset="0"/>
-                    <a:cs typeface="Arial" panose="020B0604020202020204" pitchFamily="34" charset="0"/>
-                  </a:rPr>
-                  <a:t>Traits</a:t>
-                </a:r>
-                <a:endParaRPr lang="en-GB" sz="1100" dirty="0">
-                  <a:latin typeface="Arial" panose="020B0604020202020204" pitchFamily="34" charset="0"/>
-                  <a:cs typeface="Arial" panose="020B0604020202020204" pitchFamily="34" charset="0"/>
-                </a:endParaRPr>
-              </a:p>
-            </p:txBody>
-          </p:sp>
-          <p:sp>
-            <p:nvSpPr>
-              <p:cNvPr id="23" name="ZoneTexte 22">
-                <a:extLst>
-                  <a:ext uri="{FF2B5EF4-FFF2-40B4-BE49-F238E27FC236}">
-                    <a16:creationId xmlns:a16="http://schemas.microsoft.com/office/drawing/2014/main" id="{251631A6-FD3F-5B80-2DED-04DEADBD53A1}"/>
-                  </a:ext>
-                </a:extLst>
-              </p:cNvPr>
-              <p:cNvSpPr txBox="1"/>
-              <p:nvPr/>
-            </p:nvSpPr>
-            <p:spPr>
-              <a:xfrm rot="16200000">
-                <a:off x="1460358" y="1226359"/>
-                <a:ext cx="1615402" cy="261610"/>
-              </a:xfrm>
-              <a:prstGeom prst="rect">
-                <a:avLst/>
-              </a:prstGeom>
-              <a:noFill/>
-            </p:spPr>
-            <p:txBody>
-              <a:bodyPr wrap="square" rtlCol="0">
-                <a:spAutoFit/>
-              </a:bodyPr>
-              <a:lstStyle/>
-              <a:p>
-                <a:pPr algn="ctr"/>
-                <a:r>
-                  <a:rPr lang="en-US" sz="1100" dirty="0">
-                    <a:latin typeface="Arial" panose="020B0604020202020204" pitchFamily="34" charset="0"/>
-                    <a:cs typeface="Arial" panose="020B0604020202020204" pitchFamily="34" charset="0"/>
-                  </a:rPr>
-                  <a:t>Species</a:t>
-                </a:r>
-                <a:endParaRPr lang="en-GB" sz="1100" dirty="0">
-                  <a:latin typeface="Arial" panose="020B0604020202020204" pitchFamily="34" charset="0"/>
-                  <a:cs typeface="Arial" panose="020B0604020202020204" pitchFamily="34" charset="0"/>
-                </a:endParaRPr>
-              </a:p>
-            </p:txBody>
-          </p:sp>
-        </p:grpSp>
-        <p:sp>
-          <p:nvSpPr>
-            <p:cNvPr id="24" name="ZoneTexte 23">
-              <a:extLst>
-                <a:ext uri="{FF2B5EF4-FFF2-40B4-BE49-F238E27FC236}">
-                  <a16:creationId xmlns:a16="http://schemas.microsoft.com/office/drawing/2014/main" id="{94CECE5C-DC36-AED0-1FBB-60BF6BE8A511}"/>
-                </a:ext>
-              </a:extLst>
-            </p:cNvPr>
-            <p:cNvSpPr txBox="1"/>
-            <p:nvPr/>
-          </p:nvSpPr>
-          <p:spPr>
-            <a:xfrm>
-              <a:off x="2233992" y="217844"/>
-              <a:ext cx="1978310" cy="307777"/>
-            </a:xfrm>
-            <a:prstGeom prst="rect">
-              <a:avLst/>
-            </a:prstGeom>
-            <a:noFill/>
-          </p:spPr>
-          <p:txBody>
-            <a:bodyPr wrap="square" rtlCol="0">
-              <a:spAutoFit/>
-            </a:bodyPr>
-            <a:lstStyle/>
-            <a:p>
-              <a:pPr algn="ctr"/>
-              <a:r>
-                <a:rPr lang="en-US" sz="1400" b="1" dirty="0">
-                  <a:latin typeface="Arial" panose="020B0604020202020204" pitchFamily="34" charset="0"/>
-                  <a:cs typeface="Arial" panose="020B0604020202020204" pitchFamily="34" charset="0"/>
-                </a:rPr>
-                <a:t>Morphological</a:t>
-              </a:r>
-              <a:endParaRPr lang="en-GB" sz="1400" b="1" dirty="0">
-                <a:latin typeface="Arial" panose="020B0604020202020204" pitchFamily="34" charset="0"/>
-                <a:cs typeface="Arial" panose="020B0604020202020204" pitchFamily="34" charset="0"/>
-              </a:endParaRPr>
-            </a:p>
-          </p:txBody>
-        </p:sp>
-        <p:sp>
-          <p:nvSpPr>
-            <p:cNvPr id="25" name="ZoneTexte 24">
-              <a:extLst>
-                <a:ext uri="{FF2B5EF4-FFF2-40B4-BE49-F238E27FC236}">
-                  <a16:creationId xmlns:a16="http://schemas.microsoft.com/office/drawing/2014/main" id="{CD91EBD7-3AF0-F9E1-EC78-BAE60DCB0ADC}"/>
-                </a:ext>
-              </a:extLst>
-            </p:cNvPr>
-            <p:cNvSpPr txBox="1"/>
-            <p:nvPr/>
-          </p:nvSpPr>
-          <p:spPr>
-            <a:xfrm>
-              <a:off x="5761702" y="223246"/>
-              <a:ext cx="1978310" cy="307777"/>
-            </a:xfrm>
-            <a:prstGeom prst="rect">
-              <a:avLst/>
-            </a:prstGeom>
-            <a:noFill/>
-          </p:spPr>
-          <p:txBody>
-            <a:bodyPr wrap="square" rtlCol="0">
-              <a:spAutoFit/>
-            </a:bodyPr>
-            <a:lstStyle/>
-            <a:p>
-              <a:pPr algn="ctr"/>
-              <a:r>
-                <a:rPr lang="en-US" sz="1400" b="1" dirty="0">
-                  <a:latin typeface="Arial" panose="020B0604020202020204" pitchFamily="34" charset="0"/>
-                  <a:cs typeface="Arial" panose="020B0604020202020204" pitchFamily="34" charset="0"/>
-                </a:rPr>
-                <a:t>Life-history</a:t>
-              </a:r>
-              <a:endParaRPr lang="en-GB" sz="1400" b="1" dirty="0">
-                <a:latin typeface="Arial" panose="020B0604020202020204" pitchFamily="34" charset="0"/>
-                <a:cs typeface="Arial" panose="020B0604020202020204" pitchFamily="34" charset="0"/>
-              </a:endParaRPr>
-            </a:p>
-          </p:txBody>
-        </p:sp>
-        <p:sp>
-          <p:nvSpPr>
-            <p:cNvPr id="26" name="ZoneTexte 25">
-              <a:extLst>
-                <a:ext uri="{FF2B5EF4-FFF2-40B4-BE49-F238E27FC236}">
-                  <a16:creationId xmlns:a16="http://schemas.microsoft.com/office/drawing/2014/main" id="{2E2D5ACD-9D7F-5C6F-A0C6-AAE329DA0031}"/>
-                </a:ext>
-              </a:extLst>
-            </p:cNvPr>
-            <p:cNvSpPr txBox="1"/>
-            <p:nvPr/>
-          </p:nvSpPr>
-          <p:spPr>
-            <a:xfrm>
-              <a:off x="7724555" y="4250530"/>
-              <a:ext cx="1978310" cy="307777"/>
-            </a:xfrm>
-            <a:prstGeom prst="rect">
-              <a:avLst/>
-            </a:prstGeom>
-            <a:noFill/>
-          </p:spPr>
-          <p:txBody>
-            <a:bodyPr wrap="square" rtlCol="0">
-              <a:spAutoFit/>
-            </a:bodyPr>
-            <a:lstStyle/>
-            <a:p>
-              <a:pPr algn="ctr"/>
-              <a:r>
-                <a:rPr lang="en-US" sz="1400" b="1" dirty="0">
-                  <a:latin typeface="Arial" panose="020B0604020202020204" pitchFamily="34" charset="0"/>
-                  <a:cs typeface="Arial" panose="020B0604020202020204" pitchFamily="34" charset="0"/>
-                </a:rPr>
-                <a:t>Diet</a:t>
-              </a:r>
-              <a:endParaRPr lang="en-GB" sz="1400" b="1" dirty="0">
-                <a:latin typeface="Arial" panose="020B0604020202020204" pitchFamily="34" charset="0"/>
-                <a:cs typeface="Arial" panose="020B0604020202020204" pitchFamily="34" charset="0"/>
-              </a:endParaRPr>
-            </a:p>
-          </p:txBody>
-        </p:sp>
-        <p:sp>
-          <p:nvSpPr>
-            <p:cNvPr id="99" name="ZoneTexte 98">
-              <a:extLst>
-                <a:ext uri="{FF2B5EF4-FFF2-40B4-BE49-F238E27FC236}">
-                  <a16:creationId xmlns:a16="http://schemas.microsoft.com/office/drawing/2014/main" id="{EF4471CD-5466-318D-175D-9875BD002337}"/>
-                </a:ext>
-              </a:extLst>
-            </p:cNvPr>
-            <p:cNvSpPr txBox="1"/>
-            <p:nvPr/>
-          </p:nvSpPr>
-          <p:spPr>
-            <a:xfrm>
-              <a:off x="155635" y="864019"/>
-              <a:ext cx="2286964" cy="646331"/>
-            </a:xfrm>
-            <a:prstGeom prst="rect">
-              <a:avLst/>
-            </a:prstGeom>
-            <a:noFill/>
-          </p:spPr>
-          <p:txBody>
-            <a:bodyPr wrap="square" rtlCol="0">
-              <a:spAutoFit/>
-            </a:bodyPr>
-            <a:lstStyle/>
-            <a:p>
-              <a:r>
-                <a:rPr lang="en-US" b="1" dirty="0">
-                  <a:latin typeface="Arial" panose="020B0604020202020204" pitchFamily="34" charset="0"/>
-                  <a:cs typeface="Arial" panose="020B0604020202020204" pitchFamily="34" charset="0"/>
-                </a:rPr>
-                <a:t>Original </a:t>
-              </a:r>
-            </a:p>
-            <a:p>
-              <a:r>
-                <a:rPr lang="en-US" b="1" dirty="0">
-                  <a:latin typeface="Arial" panose="020B0604020202020204" pitchFamily="34" charset="0"/>
-                  <a:cs typeface="Arial" panose="020B0604020202020204" pitchFamily="34" charset="0"/>
-                </a:rPr>
-                <a:t>trait databases</a:t>
-              </a:r>
-              <a:endParaRPr lang="en-GB" b="1" dirty="0">
-                <a:latin typeface="Arial" panose="020B0604020202020204" pitchFamily="34" charset="0"/>
-                <a:cs typeface="Arial" panose="020B0604020202020204" pitchFamily="34" charset="0"/>
-              </a:endParaRPr>
-            </a:p>
-          </p:txBody>
-        </p:sp>
-        <p:sp>
-          <p:nvSpPr>
-            <p:cNvPr id="104" name="ZoneTexte 103">
-              <a:extLst>
-                <a:ext uri="{FF2B5EF4-FFF2-40B4-BE49-F238E27FC236}">
-                  <a16:creationId xmlns:a16="http://schemas.microsoft.com/office/drawing/2014/main" id="{90714906-7CA0-4716-9D8A-CFBFBF710C12}"/>
-                </a:ext>
-              </a:extLst>
-            </p:cNvPr>
-            <p:cNvSpPr txBox="1"/>
-            <p:nvPr/>
-          </p:nvSpPr>
-          <p:spPr>
-            <a:xfrm>
-              <a:off x="114144" y="7418157"/>
-              <a:ext cx="2286964" cy="369332"/>
-            </a:xfrm>
-            <a:prstGeom prst="rect">
-              <a:avLst/>
-            </a:prstGeom>
-            <a:noFill/>
-          </p:spPr>
-          <p:txBody>
-            <a:bodyPr wrap="square" rtlCol="0">
-              <a:spAutoFit/>
-            </a:bodyPr>
-            <a:lstStyle/>
-            <a:p>
-              <a:r>
-                <a:rPr lang="en-US" b="1" dirty="0">
-                  <a:latin typeface="Arial" panose="020B0604020202020204" pitchFamily="34" charset="0"/>
-                  <a:cs typeface="Arial" panose="020B0604020202020204" pitchFamily="34" charset="0"/>
-                </a:rPr>
-                <a:t>Trait spaces</a:t>
-              </a:r>
-              <a:endParaRPr lang="en-GB" b="1" dirty="0">
-                <a:latin typeface="Arial" panose="020B0604020202020204" pitchFamily="34" charset="0"/>
-                <a:cs typeface="Arial" panose="020B0604020202020204" pitchFamily="34" charset="0"/>
-              </a:endParaRPr>
-            </a:p>
-          </p:txBody>
-        </p:sp>
-        <p:cxnSp>
-          <p:nvCxnSpPr>
-            <p:cNvPr id="111" name="Connecteur : en angle 110">
-              <a:extLst>
-                <a:ext uri="{FF2B5EF4-FFF2-40B4-BE49-F238E27FC236}">
-                  <a16:creationId xmlns:a16="http://schemas.microsoft.com/office/drawing/2014/main" id="{B40C7F5C-0733-D9AC-F57D-DE385C435DFD}"/>
-                </a:ext>
-              </a:extLst>
-            </p:cNvPr>
-            <p:cNvCxnSpPr>
-              <a:cxnSpLocks/>
-              <a:stCxn id="2" idx="2"/>
-            </p:cNvCxnSpPr>
-            <p:nvPr/>
-          </p:nvCxnSpPr>
-          <p:spPr>
-            <a:xfrm rot="16200000" flipH="1">
-              <a:off x="4076222" y="1118257"/>
-              <a:ext cx="753816" cy="2488628"/>
-            </a:xfrm>
-            <a:prstGeom prst="bentConnector2">
-              <a:avLst/>
-            </a:prstGeom>
-            <a:ln w="28575">
-              <a:tailEnd type="triangle"/>
-            </a:ln>
-          </p:spPr>
-          <p:style>
-            <a:lnRef idx="1">
-              <a:schemeClr val="dk1"/>
-            </a:lnRef>
-            <a:fillRef idx="0">
-              <a:schemeClr val="dk1"/>
-            </a:fillRef>
-            <a:effectRef idx="0">
-              <a:schemeClr val="dk1"/>
-            </a:effectRef>
-            <a:fontRef idx="minor">
-              <a:schemeClr val="tx1"/>
-            </a:fontRef>
-          </p:style>
-        </p:cxnSp>
-        <p:cxnSp>
-          <p:nvCxnSpPr>
-            <p:cNvPr id="117" name="Connecteur : en angle 116">
-              <a:extLst>
-                <a:ext uri="{FF2B5EF4-FFF2-40B4-BE49-F238E27FC236}">
-                  <a16:creationId xmlns:a16="http://schemas.microsoft.com/office/drawing/2014/main" id="{AD22FBC1-7082-10C6-7479-4B71DDDF0914}"/>
-                </a:ext>
-              </a:extLst>
-            </p:cNvPr>
-            <p:cNvCxnSpPr>
-              <a:cxnSpLocks/>
-              <a:stCxn id="19" idx="2"/>
-            </p:cNvCxnSpPr>
-            <p:nvPr/>
-          </p:nvCxnSpPr>
-          <p:spPr>
-            <a:xfrm rot="5400000">
-              <a:off x="8595531" y="1072720"/>
-              <a:ext cx="845292" cy="2488223"/>
-            </a:xfrm>
-            <a:prstGeom prst="bentConnector2">
-              <a:avLst/>
-            </a:prstGeom>
-            <a:ln w="28575">
-              <a:tailEnd type="triangle"/>
-            </a:ln>
-          </p:spPr>
-          <p:style>
-            <a:lnRef idx="1">
-              <a:schemeClr val="dk1"/>
-            </a:lnRef>
-            <a:fillRef idx="0">
-              <a:schemeClr val="dk1"/>
-            </a:fillRef>
-            <a:effectRef idx="0">
-              <a:schemeClr val="dk1"/>
-            </a:effectRef>
-            <a:fontRef idx="minor">
-              <a:schemeClr val="tx1"/>
-            </a:fontRef>
-          </p:style>
-        </p:cxnSp>
-        <p:cxnSp>
-          <p:nvCxnSpPr>
-            <p:cNvPr id="119" name="Connecteur droit avec flèche 118">
-              <a:extLst>
-                <a:ext uri="{FF2B5EF4-FFF2-40B4-BE49-F238E27FC236}">
-                  <a16:creationId xmlns:a16="http://schemas.microsoft.com/office/drawing/2014/main" id="{15DC1CA2-4FCB-B9F0-A83C-7859135CFDC4}"/>
-                </a:ext>
-              </a:extLst>
-            </p:cNvPr>
-            <p:cNvCxnSpPr>
-              <a:cxnSpLocks/>
-              <a:stCxn id="13" idx="2"/>
-              <a:endCxn id="122" idx="0"/>
-            </p:cNvCxnSpPr>
-            <p:nvPr/>
-          </p:nvCxnSpPr>
-          <p:spPr>
-            <a:xfrm>
-              <a:off x="6725830" y="1948781"/>
-              <a:ext cx="9925" cy="551767"/>
-            </a:xfrm>
-            <a:prstGeom prst="straightConnector1">
-              <a:avLst/>
-            </a:prstGeom>
-            <a:ln w="28575">
-              <a:tailEnd type="triangle"/>
-            </a:ln>
-          </p:spPr>
-          <p:style>
-            <a:lnRef idx="1">
-              <a:schemeClr val="dk1"/>
-            </a:lnRef>
-            <a:fillRef idx="0">
-              <a:schemeClr val="dk1"/>
-            </a:fillRef>
-            <a:effectRef idx="0">
-              <a:schemeClr val="dk1"/>
-            </a:effectRef>
-            <a:fontRef idx="minor">
-              <a:schemeClr val="tx1"/>
-            </a:fontRef>
-          </p:style>
-        </p:cxnSp>
-        <p:sp>
-          <p:nvSpPr>
-            <p:cNvPr id="122" name="Rectangle 121">
-              <a:extLst>
-                <a:ext uri="{FF2B5EF4-FFF2-40B4-BE49-F238E27FC236}">
-                  <a16:creationId xmlns:a16="http://schemas.microsoft.com/office/drawing/2014/main" id="{BFF160F4-5DF7-DF0B-A247-098ECC8CF4BE}"/>
-                </a:ext>
-              </a:extLst>
-            </p:cNvPr>
-            <p:cNvSpPr/>
-            <p:nvPr/>
-          </p:nvSpPr>
-          <p:spPr>
-            <a:xfrm>
-              <a:off x="5697445" y="2500548"/>
-              <a:ext cx="2076619" cy="1114086"/>
-            </a:xfrm>
-            <a:prstGeom prst="rect">
-              <a:avLst/>
-            </a:prstGeom>
-            <a:solidFill>
-              <a:schemeClr val="bg1"/>
-            </a:solidFill>
-            <a:ln w="28575"/>
-          </p:spPr>
-          <p:style>
-            <a:lnRef idx="2">
-              <a:schemeClr val="accent1">
-                <a:shade val="15000"/>
-              </a:schemeClr>
-            </a:lnRef>
-            <a:fillRef idx="1">
-              <a:schemeClr val="accent1"/>
-            </a:fillRef>
-            <a:effectRef idx="0">
-              <a:schemeClr val="accent1"/>
-            </a:effectRef>
-            <a:fontRef idx="minor">
-              <a:schemeClr val="lt1"/>
-            </a:fontRef>
-          </p:style>
-          <p:txBody>
-            <a:bodyPr rtlCol="0" anchor="ctr"/>
-            <a:lstStyle/>
-            <a:p>
-              <a:pPr algn="ctr"/>
-              <a:r>
-                <a:rPr lang="en-US" dirty="0">
-                  <a:solidFill>
-                    <a:schemeClr val="tx1"/>
-                  </a:solidFill>
-                  <a:latin typeface="Arial" panose="020B0604020202020204" pitchFamily="34" charset="0"/>
-                  <a:cs typeface="Arial" panose="020B0604020202020204" pitchFamily="34" charset="0"/>
-                </a:rPr>
-                <a:t>Taxonomic homogenization + Missing traits imputation </a:t>
-              </a:r>
-            </a:p>
-          </p:txBody>
-        </p:sp>
-        <p:pic>
-          <p:nvPicPr>
-            <p:cNvPr id="327" name="Picture 4" descr="Bird Icon 582248 Vector Art at Vecteezy">
-              <a:extLst>
-                <a:ext uri="{FF2B5EF4-FFF2-40B4-BE49-F238E27FC236}">
-                  <a16:creationId xmlns:a16="http://schemas.microsoft.com/office/drawing/2014/main" id="{BFAD329A-F157-C851-A448-6F3915596875}"/>
-                </a:ext>
-              </a:extLst>
-            </p:cNvPr>
-            <p:cNvPicPr>
-              <a:picLocks noChangeAspect="1" noChangeArrowheads="1"/>
-            </p:cNvPicPr>
-            <p:nvPr/>
-          </p:nvPicPr>
-          <p:blipFill>
-            <a:blip r:embed="rId3">
-              <a:extLst>
-                <a:ext uri="{28A0092B-C50C-407E-A947-70E740481C1C}">
-                  <a14:useLocalDpi xmlns:a14="http://schemas.microsoft.com/office/drawing/2010/main" val="0"/>
-                </a:ext>
-              </a:extLst>
-            </a:blip>
-            <a:stretch>
-              <a:fillRect/>
-            </a:stretch>
-          </p:blipFill>
-          <p:spPr bwMode="auto">
-            <a:xfrm>
-              <a:off x="2603431" y="829241"/>
-              <a:ext cx="511422" cy="511422"/>
-            </a:xfrm>
-            <a:prstGeom prst="rect">
-              <a:avLst/>
-            </a:prstGeom>
-            <a:noFill/>
-            <a:extLst>
-              <a:ext uri="{909E8E84-426E-40DD-AFC4-6F175D3DCCD1}">
-                <a14:hiddenFill xmlns:a14="http://schemas.microsoft.com/office/drawing/2010/main">
-                  <a:solidFill>
-                    <a:srgbClr val="FFFFFF"/>
-                  </a:solidFill>
-                </a14:hiddenFill>
-              </a:ext>
-            </a:extLst>
-          </p:spPr>
-        </p:pic>
-        <p:sp>
-          <p:nvSpPr>
-            <p:cNvPr id="328" name="ZoneTexte 327">
-              <a:extLst>
-                <a:ext uri="{FF2B5EF4-FFF2-40B4-BE49-F238E27FC236}">
-                  <a16:creationId xmlns:a16="http://schemas.microsoft.com/office/drawing/2014/main" id="{DE24ADCB-D0A1-6874-AEB2-B3D8BF9D9186}"/>
-                </a:ext>
-              </a:extLst>
-            </p:cNvPr>
-            <p:cNvSpPr txBox="1"/>
-            <p:nvPr/>
-          </p:nvSpPr>
-          <p:spPr>
-            <a:xfrm>
-              <a:off x="3107430" y="864019"/>
-              <a:ext cx="1011192" cy="461665"/>
-            </a:xfrm>
-            <a:prstGeom prst="rect">
-              <a:avLst/>
-            </a:prstGeom>
-            <a:noFill/>
-          </p:spPr>
-          <p:txBody>
-            <a:bodyPr wrap="square" rtlCol="0">
-              <a:spAutoFit/>
-            </a:bodyPr>
-            <a:lstStyle/>
-            <a:p>
-              <a:r>
-                <a:rPr lang="en-US" sz="1200" dirty="0">
-                  <a:latin typeface="Arial" panose="020B0604020202020204" pitchFamily="34" charset="0"/>
-                  <a:cs typeface="Arial" panose="020B0604020202020204" pitchFamily="34" charset="0"/>
-                </a:rPr>
-                <a:t>AVONET</a:t>
-              </a:r>
-            </a:p>
-            <a:p>
-              <a:r>
-                <a:rPr lang="en-US" sz="1200" dirty="0">
-                  <a:latin typeface="Arial" panose="020B0604020202020204" pitchFamily="34" charset="0"/>
-                  <a:cs typeface="Arial" panose="020B0604020202020204" pitchFamily="34" charset="0"/>
-                </a:rPr>
-                <a:t>(</a:t>
-              </a:r>
-              <a:r>
-                <a:rPr lang="en-001" sz="1200" dirty="0">
-                  <a:latin typeface="Arial" panose="020B0604020202020204" pitchFamily="34" charset="0"/>
-                  <a:cs typeface="Arial" panose="020B0604020202020204" pitchFamily="34" charset="0"/>
-                </a:rPr>
-                <a:t>7</a:t>
-              </a:r>
-              <a:r>
-                <a:rPr lang="en-US" sz="1200" dirty="0">
-                  <a:latin typeface="Arial" panose="020B0604020202020204" pitchFamily="34" charset="0"/>
-                  <a:cs typeface="Arial" panose="020B0604020202020204" pitchFamily="34" charset="0"/>
-                </a:rPr>
-                <a:t> traits)</a:t>
-              </a:r>
-              <a:endParaRPr lang="en-GB" sz="1200" dirty="0">
-                <a:latin typeface="Arial" panose="020B0604020202020204" pitchFamily="34" charset="0"/>
-                <a:cs typeface="Arial" panose="020B0604020202020204" pitchFamily="34" charset="0"/>
-              </a:endParaRPr>
-            </a:p>
-          </p:txBody>
-        </p:sp>
-        <p:pic>
-          <p:nvPicPr>
-            <p:cNvPr id="330" name="Picture 4" descr="Bird Icon 582248 Vector Art at Vecteezy">
-              <a:extLst>
-                <a:ext uri="{FF2B5EF4-FFF2-40B4-BE49-F238E27FC236}">
-                  <a16:creationId xmlns:a16="http://schemas.microsoft.com/office/drawing/2014/main" id="{88B2B981-FD46-955F-2397-969404FD4FDD}"/>
-                </a:ext>
-              </a:extLst>
-            </p:cNvPr>
-            <p:cNvPicPr>
-              <a:picLocks noChangeAspect="1" noChangeArrowheads="1"/>
-            </p:cNvPicPr>
-            <p:nvPr/>
-          </p:nvPicPr>
-          <p:blipFill>
-            <a:blip r:embed="rId3">
-              <a:extLst>
-                <a:ext uri="{28A0092B-C50C-407E-A947-70E740481C1C}">
-                  <a14:useLocalDpi xmlns:a14="http://schemas.microsoft.com/office/drawing/2010/main" val="0"/>
-                </a:ext>
-              </a:extLst>
-            </a:blip>
-            <a:stretch>
-              <a:fillRect/>
-            </a:stretch>
-          </p:blipFill>
-          <p:spPr bwMode="auto">
-            <a:xfrm>
-              <a:off x="6164432" y="800675"/>
-              <a:ext cx="511422" cy="511422"/>
-            </a:xfrm>
-            <a:prstGeom prst="rect">
-              <a:avLst/>
-            </a:prstGeom>
-            <a:noFill/>
-            <a:extLst>
-              <a:ext uri="{909E8E84-426E-40DD-AFC4-6F175D3DCCD1}">
-                <a14:hiddenFill xmlns:a14="http://schemas.microsoft.com/office/drawing/2010/main">
-                  <a:solidFill>
-                    <a:srgbClr val="FFFFFF"/>
-                  </a:solidFill>
-                </a14:hiddenFill>
-              </a:ext>
-            </a:extLst>
-          </p:spPr>
-        </p:pic>
-        <p:sp>
-          <p:nvSpPr>
-            <p:cNvPr id="331" name="ZoneTexte 330">
-              <a:extLst>
-                <a:ext uri="{FF2B5EF4-FFF2-40B4-BE49-F238E27FC236}">
-                  <a16:creationId xmlns:a16="http://schemas.microsoft.com/office/drawing/2014/main" id="{62E12522-2912-702F-084E-8894481BD5A5}"/>
-                </a:ext>
-              </a:extLst>
-            </p:cNvPr>
-            <p:cNvSpPr txBox="1"/>
-            <p:nvPr/>
-          </p:nvSpPr>
-          <p:spPr>
-            <a:xfrm>
-              <a:off x="6668431" y="835453"/>
-              <a:ext cx="1011192" cy="461665"/>
-            </a:xfrm>
-            <a:prstGeom prst="rect">
-              <a:avLst/>
-            </a:prstGeom>
-            <a:noFill/>
-          </p:spPr>
-          <p:txBody>
-            <a:bodyPr wrap="square" rtlCol="0">
-              <a:spAutoFit/>
-            </a:bodyPr>
-            <a:lstStyle/>
-            <a:p>
-              <a:r>
-                <a:rPr lang="en-US" sz="1200" dirty="0">
-                  <a:latin typeface="Arial" panose="020B0604020202020204" pitchFamily="34" charset="0"/>
-                  <a:cs typeface="Arial" panose="020B0604020202020204" pitchFamily="34" charset="0"/>
-                </a:rPr>
-                <a:t>AMNIOTE</a:t>
-              </a:r>
-            </a:p>
-            <a:p>
-              <a:r>
-                <a:rPr lang="en-US" sz="1200" dirty="0">
-                  <a:latin typeface="Arial" panose="020B0604020202020204" pitchFamily="34" charset="0"/>
-                  <a:cs typeface="Arial" panose="020B0604020202020204" pitchFamily="34" charset="0"/>
-                </a:rPr>
-                <a:t>(</a:t>
-              </a:r>
-              <a:r>
-                <a:rPr lang="en-001" sz="1200" dirty="0">
-                  <a:latin typeface="Arial" panose="020B0604020202020204" pitchFamily="34" charset="0"/>
-                  <a:cs typeface="Arial" panose="020B0604020202020204" pitchFamily="34" charset="0"/>
-                </a:rPr>
-                <a:t>8</a:t>
-              </a:r>
-              <a:r>
-                <a:rPr lang="en-US" sz="1200" dirty="0">
-                  <a:latin typeface="Arial" panose="020B0604020202020204" pitchFamily="34" charset="0"/>
-                  <a:cs typeface="Arial" panose="020B0604020202020204" pitchFamily="34" charset="0"/>
-                </a:rPr>
-                <a:t> traits)</a:t>
-              </a:r>
-            </a:p>
-          </p:txBody>
-        </p:sp>
-        <p:pic>
-          <p:nvPicPr>
-            <p:cNvPr id="333" name="Picture 4" descr="Bird Icon 582248 Vector Art at Vecteezy">
-              <a:extLst>
-                <a:ext uri="{FF2B5EF4-FFF2-40B4-BE49-F238E27FC236}">
-                  <a16:creationId xmlns:a16="http://schemas.microsoft.com/office/drawing/2014/main" id="{2E5CEB06-1739-4FD5-DF10-B84F45DDA120}"/>
-                </a:ext>
-              </a:extLst>
-            </p:cNvPr>
-            <p:cNvPicPr>
-              <a:picLocks noChangeAspect="1" noChangeArrowheads="1"/>
-            </p:cNvPicPr>
-            <p:nvPr/>
-          </p:nvPicPr>
-          <p:blipFill>
-            <a:blip r:embed="rId3">
-              <a:extLst>
-                <a:ext uri="{28A0092B-C50C-407E-A947-70E740481C1C}">
-                  <a14:useLocalDpi xmlns:a14="http://schemas.microsoft.com/office/drawing/2010/main" val="0"/>
-                </a:ext>
-              </a:extLst>
-            </a:blip>
-            <a:stretch>
-              <a:fillRect/>
-            </a:stretch>
-          </p:blipFill>
-          <p:spPr bwMode="auto">
-            <a:xfrm>
-              <a:off x="9707553" y="770259"/>
-              <a:ext cx="511422" cy="511422"/>
-            </a:xfrm>
-            <a:prstGeom prst="rect">
-              <a:avLst/>
-            </a:prstGeom>
-            <a:noFill/>
-            <a:extLst>
-              <a:ext uri="{909E8E84-426E-40DD-AFC4-6F175D3DCCD1}">
-                <a14:hiddenFill xmlns:a14="http://schemas.microsoft.com/office/drawing/2010/main">
-                  <a:solidFill>
-                    <a:srgbClr val="FFFFFF"/>
-                  </a:solidFill>
-                </a14:hiddenFill>
-              </a:ext>
-            </a:extLst>
-          </p:spPr>
-        </p:pic>
-        <p:sp>
-          <p:nvSpPr>
-            <p:cNvPr id="334" name="ZoneTexte 333">
-              <a:extLst>
-                <a:ext uri="{FF2B5EF4-FFF2-40B4-BE49-F238E27FC236}">
-                  <a16:creationId xmlns:a16="http://schemas.microsoft.com/office/drawing/2014/main" id="{0D002A98-678D-559A-85F1-42F06DCDC526}"/>
-                </a:ext>
-              </a:extLst>
-            </p:cNvPr>
-            <p:cNvSpPr txBox="1"/>
-            <p:nvPr/>
-          </p:nvSpPr>
-          <p:spPr>
-            <a:xfrm>
-              <a:off x="10211552" y="805037"/>
-              <a:ext cx="1011192" cy="461665"/>
-            </a:xfrm>
-            <a:prstGeom prst="rect">
-              <a:avLst/>
-            </a:prstGeom>
-            <a:noFill/>
-          </p:spPr>
-          <p:txBody>
-            <a:bodyPr wrap="square" rtlCol="0">
-              <a:spAutoFit/>
-            </a:bodyPr>
-            <a:lstStyle/>
-            <a:p>
-              <a:r>
-                <a:rPr lang="en-001" sz="1200" dirty="0">
-                  <a:latin typeface="Arial" panose="020B0604020202020204" pitchFamily="34" charset="0"/>
-                  <a:cs typeface="Arial" panose="020B0604020202020204" pitchFamily="34" charset="0"/>
-                </a:rPr>
-                <a:t>E</a:t>
-              </a:r>
-              <a:r>
-                <a:rPr lang="fr-FR" sz="1200" dirty="0">
-                  <a:latin typeface="Arial" panose="020B0604020202020204" pitchFamily="34" charset="0"/>
-                  <a:cs typeface="Arial" panose="020B0604020202020204" pitchFamily="34" charset="0"/>
-                </a:rPr>
-                <a:t>l</a:t>
-              </a:r>
-              <a:r>
-                <a:rPr lang="en-001" sz="1200" dirty="0">
-                  <a:latin typeface="Arial" panose="020B0604020202020204" pitchFamily="34" charset="0"/>
-                  <a:cs typeface="Arial" panose="020B0604020202020204" pitchFamily="34" charset="0"/>
-                </a:rPr>
-                <a:t>t</a:t>
-              </a:r>
-              <a:r>
-                <a:rPr lang="fr-FR" sz="1200" dirty="0">
-                  <a:latin typeface="Arial" panose="020B0604020202020204" pitchFamily="34" charset="0"/>
-                  <a:cs typeface="Arial" panose="020B0604020202020204" pitchFamily="34" charset="0"/>
-                </a:rPr>
-                <a:t>o</a:t>
-              </a:r>
-              <a:r>
-                <a:rPr lang="en-001" sz="1200" dirty="0">
-                  <a:latin typeface="Arial" panose="020B0604020202020204" pitchFamily="34" charset="0"/>
-                  <a:cs typeface="Arial" panose="020B0604020202020204" pitchFamily="34" charset="0"/>
-                </a:rPr>
-                <a:t>n</a:t>
-              </a:r>
-              <a:r>
-                <a:rPr lang="fr-FR" sz="1200" dirty="0">
-                  <a:latin typeface="Arial" panose="020B0604020202020204" pitchFamily="34" charset="0"/>
-                  <a:cs typeface="Arial" panose="020B0604020202020204" pitchFamily="34" charset="0"/>
-                </a:rPr>
-                <a:t>T</a:t>
-              </a:r>
-              <a:r>
-                <a:rPr lang="en-001" sz="1200" dirty="0">
-                  <a:latin typeface="Arial" panose="020B0604020202020204" pitchFamily="34" charset="0"/>
-                  <a:cs typeface="Arial" panose="020B0604020202020204" pitchFamily="34" charset="0"/>
-                </a:rPr>
-                <a:t>r</a:t>
-              </a:r>
-              <a:r>
-                <a:rPr lang="fr-FR" sz="1200" dirty="0">
-                  <a:latin typeface="Arial" panose="020B0604020202020204" pitchFamily="34" charset="0"/>
-                  <a:cs typeface="Arial" panose="020B0604020202020204" pitchFamily="34" charset="0"/>
-                </a:rPr>
-                <a:t>a</a:t>
-              </a:r>
-              <a:r>
-                <a:rPr lang="en-001" sz="1200" dirty="0" err="1">
-                  <a:latin typeface="Arial" panose="020B0604020202020204" pitchFamily="34" charset="0"/>
-                  <a:cs typeface="Arial" panose="020B0604020202020204" pitchFamily="34" charset="0"/>
-                </a:rPr>
-                <a:t>i</a:t>
-              </a:r>
-              <a:r>
-                <a:rPr lang="fr-FR" sz="1200" dirty="0">
-                  <a:latin typeface="Arial" panose="020B0604020202020204" pitchFamily="34" charset="0"/>
-                  <a:cs typeface="Arial" panose="020B0604020202020204" pitchFamily="34" charset="0"/>
-                </a:rPr>
-                <a:t>t</a:t>
-              </a:r>
-              <a:r>
-                <a:rPr lang="en-001" sz="1200" dirty="0">
-                  <a:latin typeface="Arial" panose="020B0604020202020204" pitchFamily="34" charset="0"/>
-                  <a:cs typeface="Arial" panose="020B0604020202020204" pitchFamily="34" charset="0"/>
-                </a:rPr>
-                <a:t>s</a:t>
-              </a:r>
-              <a:endParaRPr lang="en-US" sz="1200" dirty="0">
-                <a:latin typeface="Arial" panose="020B0604020202020204" pitchFamily="34" charset="0"/>
-                <a:cs typeface="Arial" panose="020B0604020202020204" pitchFamily="34" charset="0"/>
-              </a:endParaRPr>
-            </a:p>
-            <a:p>
-              <a:r>
-                <a:rPr lang="en-US" sz="1200" dirty="0">
-                  <a:latin typeface="Arial" panose="020B0604020202020204" pitchFamily="34" charset="0"/>
-                  <a:cs typeface="Arial" panose="020B0604020202020204" pitchFamily="34" charset="0"/>
-                </a:rPr>
-                <a:t>(11 traits)</a:t>
-              </a:r>
-            </a:p>
-          </p:txBody>
-        </p:sp>
-        <p:sp>
-          <p:nvSpPr>
-            <p:cNvPr id="335" name="ZoneTexte 334">
-              <a:extLst>
-                <a:ext uri="{FF2B5EF4-FFF2-40B4-BE49-F238E27FC236}">
-                  <a16:creationId xmlns:a16="http://schemas.microsoft.com/office/drawing/2014/main" id="{4C6E8C8F-436A-BF67-566C-5C6BC6B982D7}"/>
-                </a:ext>
-              </a:extLst>
-            </p:cNvPr>
-            <p:cNvSpPr txBox="1"/>
-            <p:nvPr/>
-          </p:nvSpPr>
-          <p:spPr>
-            <a:xfrm rot="16200000">
-              <a:off x="3633118" y="1143872"/>
-              <a:ext cx="1422882" cy="276999"/>
-            </a:xfrm>
-            <a:prstGeom prst="rect">
-              <a:avLst/>
-            </a:prstGeom>
-            <a:noFill/>
-          </p:spPr>
-          <p:txBody>
-            <a:bodyPr wrap="square" rtlCol="0">
-              <a:spAutoFit/>
-            </a:bodyPr>
-            <a:lstStyle/>
-            <a:p>
-              <a:pPr algn="ctr"/>
-              <a:r>
-                <a:rPr lang="en-US" sz="1200" b="1" i="1" dirty="0">
-                  <a:latin typeface="Arial" panose="020B0604020202020204" pitchFamily="34" charset="0"/>
-                  <a:cs typeface="Arial" panose="020B0604020202020204" pitchFamily="34" charset="0"/>
-                </a:rPr>
-                <a:t>Quantitative</a:t>
-              </a:r>
-              <a:endParaRPr lang="en-GB" sz="1200" b="1" i="1" dirty="0">
-                <a:latin typeface="Arial" panose="020B0604020202020204" pitchFamily="34" charset="0"/>
-                <a:cs typeface="Arial" panose="020B0604020202020204" pitchFamily="34" charset="0"/>
-              </a:endParaRPr>
-            </a:p>
-          </p:txBody>
-        </p:sp>
-        <p:sp>
-          <p:nvSpPr>
-            <p:cNvPr id="336" name="ZoneTexte 335">
-              <a:extLst>
-                <a:ext uri="{FF2B5EF4-FFF2-40B4-BE49-F238E27FC236}">
-                  <a16:creationId xmlns:a16="http://schemas.microsoft.com/office/drawing/2014/main" id="{A54FE97C-34D9-8F58-C722-423541A50AE7}"/>
-                </a:ext>
-              </a:extLst>
-            </p:cNvPr>
-            <p:cNvSpPr txBox="1"/>
-            <p:nvPr/>
-          </p:nvSpPr>
-          <p:spPr>
-            <a:xfrm rot="16200000">
-              <a:off x="7156375" y="1105508"/>
-              <a:ext cx="1422882" cy="276999"/>
-            </a:xfrm>
-            <a:prstGeom prst="rect">
-              <a:avLst/>
-            </a:prstGeom>
-            <a:noFill/>
-          </p:spPr>
-          <p:txBody>
-            <a:bodyPr wrap="square" rtlCol="0">
-              <a:spAutoFit/>
-            </a:bodyPr>
-            <a:lstStyle/>
-            <a:p>
-              <a:pPr algn="ctr"/>
-              <a:r>
-                <a:rPr lang="en-US" sz="1200" b="1" i="1" dirty="0">
-                  <a:latin typeface="Arial" panose="020B0604020202020204" pitchFamily="34" charset="0"/>
-                  <a:cs typeface="Arial" panose="020B0604020202020204" pitchFamily="34" charset="0"/>
-                </a:rPr>
-                <a:t>Quantitative</a:t>
-              </a:r>
-              <a:endParaRPr lang="en-GB" sz="1200" b="1" i="1" dirty="0">
-                <a:latin typeface="Arial" panose="020B0604020202020204" pitchFamily="34" charset="0"/>
-                <a:cs typeface="Arial" panose="020B0604020202020204" pitchFamily="34" charset="0"/>
-              </a:endParaRPr>
-            </a:p>
-          </p:txBody>
-        </p:sp>
-        <p:sp>
-          <p:nvSpPr>
-            <p:cNvPr id="337" name="ZoneTexte 336">
-              <a:extLst>
-                <a:ext uri="{FF2B5EF4-FFF2-40B4-BE49-F238E27FC236}">
-                  <a16:creationId xmlns:a16="http://schemas.microsoft.com/office/drawing/2014/main" id="{3B70184E-B8B4-A206-912A-D4ACBC23C125}"/>
-                </a:ext>
-              </a:extLst>
-            </p:cNvPr>
-            <p:cNvSpPr txBox="1"/>
-            <p:nvPr/>
-          </p:nvSpPr>
-          <p:spPr>
-            <a:xfrm rot="16200000">
-              <a:off x="10686088" y="1078121"/>
-              <a:ext cx="1422882" cy="276999"/>
-            </a:xfrm>
-            <a:prstGeom prst="rect">
-              <a:avLst/>
-            </a:prstGeom>
-            <a:noFill/>
-          </p:spPr>
-          <p:txBody>
-            <a:bodyPr wrap="square" rtlCol="0">
-              <a:spAutoFit/>
-            </a:bodyPr>
-            <a:lstStyle/>
-            <a:p>
-              <a:pPr algn="ctr"/>
-              <a:r>
-                <a:rPr lang="en-US" sz="1200" b="1" i="1" dirty="0">
-                  <a:latin typeface="Arial" panose="020B0604020202020204" pitchFamily="34" charset="0"/>
-                  <a:cs typeface="Arial" panose="020B0604020202020204" pitchFamily="34" charset="0"/>
-                </a:rPr>
-                <a:t>Categorical</a:t>
-              </a:r>
-              <a:endParaRPr lang="en-GB" sz="1200" b="1" i="1" dirty="0">
-                <a:latin typeface="Arial" panose="020B0604020202020204" pitchFamily="34" charset="0"/>
-                <a:cs typeface="Arial" panose="020B0604020202020204" pitchFamily="34" charset="0"/>
-              </a:endParaRPr>
-            </a:p>
-          </p:txBody>
-        </p:sp>
-        <p:cxnSp>
-          <p:nvCxnSpPr>
-            <p:cNvPr id="548" name="Connecteur droit avec flèche 547">
-              <a:extLst>
-                <a:ext uri="{FF2B5EF4-FFF2-40B4-BE49-F238E27FC236}">
-                  <a16:creationId xmlns:a16="http://schemas.microsoft.com/office/drawing/2014/main" id="{FF091D61-DC00-C2A6-AF5B-D8E605DF5AD0}"/>
-                </a:ext>
-              </a:extLst>
-            </p:cNvPr>
-            <p:cNvCxnSpPr>
-              <a:cxnSpLocks/>
-              <a:stCxn id="122" idx="2"/>
-              <a:endCxn id="574" idx="0"/>
-            </p:cNvCxnSpPr>
-            <p:nvPr/>
-          </p:nvCxnSpPr>
-          <p:spPr>
-            <a:xfrm>
-              <a:off x="6735755" y="3614634"/>
-              <a:ext cx="2644" cy="634372"/>
-            </a:xfrm>
-            <a:prstGeom prst="straightConnector1">
-              <a:avLst/>
-            </a:prstGeom>
-            <a:ln w="28575">
-              <a:tailEnd type="triangle"/>
-            </a:ln>
-          </p:spPr>
-          <p:style>
-            <a:lnRef idx="1">
-              <a:schemeClr val="dk1"/>
-            </a:lnRef>
-            <a:fillRef idx="0">
-              <a:schemeClr val="dk1"/>
-            </a:fillRef>
-            <a:effectRef idx="0">
-              <a:schemeClr val="dk1"/>
-            </a:effectRef>
-            <a:fontRef idx="minor">
-              <a:schemeClr val="tx1"/>
-            </a:fontRef>
-          </p:style>
-        </p:cxnSp>
-        <p:grpSp>
-          <p:nvGrpSpPr>
-            <p:cNvPr id="549" name="Groupe 548">
-              <a:extLst>
-                <a:ext uri="{FF2B5EF4-FFF2-40B4-BE49-F238E27FC236}">
-                  <a16:creationId xmlns:a16="http://schemas.microsoft.com/office/drawing/2014/main" id="{668687B7-A147-A898-1A44-EF217FCDEBF3}"/>
-                </a:ext>
-              </a:extLst>
-            </p:cNvPr>
-            <p:cNvGrpSpPr/>
-            <p:nvPr/>
-          </p:nvGrpSpPr>
-          <p:grpSpPr>
-            <a:xfrm>
-              <a:off x="3801142" y="4220138"/>
-              <a:ext cx="1978324" cy="1615402"/>
-              <a:chOff x="2086605" y="549463"/>
-              <a:chExt cx="1978324" cy="1615402"/>
-            </a:xfrm>
-          </p:grpSpPr>
-          <p:sp>
-            <p:nvSpPr>
-              <p:cNvPr id="550" name="Rectangle 549">
-                <a:extLst>
-                  <a:ext uri="{FF2B5EF4-FFF2-40B4-BE49-F238E27FC236}">
-                    <a16:creationId xmlns:a16="http://schemas.microsoft.com/office/drawing/2014/main" id="{372F9132-D1E3-0FBD-8DB4-8D21AC03C5AA}"/>
+                    <a16:creationId xmlns:a16="http://schemas.microsoft.com/office/drawing/2014/main" id="{0791DCC1-8ECA-1AC2-C3AE-65BB606BE63B}"/>
                   </a:ext>
                 </a:extLst>
               </p:cNvPr>
@@ -5211,20 +6276,17 @@
             </p:nvSpPr>
             <p:spPr>
               <a:xfrm>
-                <a:off x="2086605" y="604059"/>
-                <a:ext cx="1978324" cy="1414732"/>
+                <a:off x="6530331" y="7232681"/>
+                <a:ext cx="485798" cy="369332"/>
               </a:xfrm>
-              <a:prstGeom prst="rect">
+              <a:prstGeom prst="downArrow">
                 <a:avLst/>
               </a:prstGeom>
-              <a:noFill/>
+              <a:solidFill>
+                <a:schemeClr val="tx1"/>
+              </a:solidFill>
               <a:ln>
-                <a:solidFill>
-                  <a:schemeClr val="tx1">
-                    <a:lumMod val="95000"/>
-                    <a:lumOff val="5000"/>
-                  </a:schemeClr>
-                </a:solidFill>
+                <a:noFill/>
               </a:ln>
             </p:spPr>
             <p:style>
@@ -5252,173 +6314,65 @@
               </a:p>
             </p:txBody>
           </p:sp>
-          <p:cxnSp>
-            <p:nvCxnSpPr>
-              <p:cNvPr id="551" name="Connecteur droit 550">
+          <p:sp>
+            <p:nvSpPr>
+              <p:cNvPr id="594" name="Flèche : bas 593">
                 <a:extLst>
                   <a:ext uri="{FF2B5EF4-FFF2-40B4-BE49-F238E27FC236}">
-                    <a16:creationId xmlns:a16="http://schemas.microsoft.com/office/drawing/2014/main" id="{F0EACFA5-76A4-1DA9-F355-C7B5B9A96A12}"/>
+                    <a16:creationId xmlns:a16="http://schemas.microsoft.com/office/drawing/2014/main" id="{70E9CCE1-ED5E-972E-5EE7-01B2F8FD2D2F}"/>
                   </a:ext>
                 </a:extLst>
               </p:cNvPr>
-              <p:cNvCxnSpPr>
-                <a:cxnSpLocks/>
-              </p:cNvCxnSpPr>
+              <p:cNvSpPr/>
               <p:nvPr/>
-            </p:nvCxnSpPr>
+            </p:nvSpPr>
             <p:spPr>
               <a:xfrm>
-                <a:off x="2449513" y="604059"/>
-                <a:ext cx="0" cy="1414732"/>
+                <a:off x="10701576" y="7232681"/>
+                <a:ext cx="485798" cy="369332"/>
               </a:xfrm>
-              <a:prstGeom prst="line">
+              <a:prstGeom prst="downArrow">
                 <a:avLst/>
               </a:prstGeom>
+              <a:solidFill>
+                <a:schemeClr val="tx1"/>
+              </a:solidFill>
+              <a:ln>
+                <a:noFill/>
+              </a:ln>
             </p:spPr>
             <p:style>
               <a:lnRef idx="2">
-                <a:schemeClr val="dk1"/>
+                <a:schemeClr val="accent1">
+                  <a:shade val="15000"/>
+                </a:schemeClr>
               </a:lnRef>
-              <a:fillRef idx="0">
-                <a:schemeClr val="dk1"/>
+              <a:fillRef idx="1">
+                <a:schemeClr val="accent1"/>
               </a:fillRef>
-              <a:effectRef idx="1">
-                <a:schemeClr val="dk1"/>
+              <a:effectRef idx="0">
+                <a:schemeClr val="accent1"/>
               </a:effectRef>
               <a:fontRef idx="minor">
-                <a:schemeClr val="tx1"/>
+                <a:schemeClr val="lt1"/>
               </a:fontRef>
             </p:style>
-          </p:cxnSp>
-          <p:cxnSp>
-            <p:nvCxnSpPr>
-              <p:cNvPr id="552" name="Connecteur droit 551">
-                <a:extLst>
-                  <a:ext uri="{FF2B5EF4-FFF2-40B4-BE49-F238E27FC236}">
-                    <a16:creationId xmlns:a16="http://schemas.microsoft.com/office/drawing/2014/main" id="{4F79D97D-4445-A882-A25E-9AB4C47AACD3}"/>
-                  </a:ext>
-                </a:extLst>
-              </p:cNvPr>
-              <p:cNvCxnSpPr/>
-              <p:nvPr/>
-            </p:nvCxnSpPr>
-            <p:spPr>
-              <a:xfrm>
-                <a:off x="2086605" y="833438"/>
-                <a:ext cx="1978324" cy="0"/>
-              </a:xfrm>
-              <a:prstGeom prst="line">
-                <a:avLst/>
-              </a:prstGeom>
-            </p:spPr>
-            <p:style>
-              <a:lnRef idx="2">
-                <a:schemeClr val="dk1"/>
-              </a:lnRef>
-              <a:fillRef idx="0">
-                <a:schemeClr val="dk1"/>
-              </a:fillRef>
-              <a:effectRef idx="1">
-                <a:schemeClr val="dk1"/>
-              </a:effectRef>
-              <a:fontRef idx="minor">
-                <a:schemeClr val="tx1"/>
-              </a:fontRef>
-            </p:style>
-          </p:cxnSp>
-          <p:sp>
-            <p:nvSpPr>
-              <p:cNvPr id="554" name="ZoneTexte 553">
-                <a:extLst>
-                  <a:ext uri="{FF2B5EF4-FFF2-40B4-BE49-F238E27FC236}">
-                    <a16:creationId xmlns:a16="http://schemas.microsoft.com/office/drawing/2014/main" id="{D259C4C0-DEC7-4371-BDDC-66D0BD863FEE}"/>
-                  </a:ext>
-                </a:extLst>
-              </p:cNvPr>
-              <p:cNvSpPr txBox="1"/>
-              <p:nvPr/>
-            </p:nvSpPr>
-            <p:spPr>
-              <a:xfrm rot="16200000">
-                <a:off x="1460358" y="1226359"/>
-                <a:ext cx="1615402" cy="261610"/>
-              </a:xfrm>
-              <a:prstGeom prst="rect">
-                <a:avLst/>
-              </a:prstGeom>
-              <a:noFill/>
-            </p:spPr>
             <p:txBody>
-              <a:bodyPr wrap="square" rtlCol="0">
-                <a:spAutoFit/>
-              </a:bodyPr>
+              <a:bodyPr rtlCol="0" anchor="ctr"/>
               <a:lstStyle/>
               <a:p>
                 <a:pPr algn="ctr"/>
-                <a:r>
-                  <a:rPr lang="en-US" sz="1100" dirty="0">
-                    <a:latin typeface="Arial" panose="020B0604020202020204" pitchFamily="34" charset="0"/>
-                    <a:cs typeface="Arial" panose="020B0604020202020204" pitchFamily="34" charset="0"/>
-                  </a:rPr>
-                  <a:t>Species</a:t>
-                </a:r>
-                <a:endParaRPr lang="en-GB" sz="1100" dirty="0">
-                  <a:latin typeface="Arial" panose="020B0604020202020204" pitchFamily="34" charset="0"/>
-                  <a:cs typeface="Arial" panose="020B0604020202020204" pitchFamily="34" charset="0"/>
-                </a:endParaRPr>
+                <a:endParaRPr lang="en-GB"/>
               </a:p>
             </p:txBody>
           </p:sp>
         </p:grpSp>
         <p:sp>
           <p:nvSpPr>
-            <p:cNvPr id="555" name="ZoneTexte 554">
+            <p:cNvPr id="3" name="Rectangle 2">
               <a:extLst>
                 <a:ext uri="{FF2B5EF4-FFF2-40B4-BE49-F238E27FC236}">
-                  <a16:creationId xmlns:a16="http://schemas.microsoft.com/office/drawing/2014/main" id="{D053ACDB-72BF-588A-578C-02D6BD124945}"/>
-                </a:ext>
-              </a:extLst>
-            </p:cNvPr>
-            <p:cNvSpPr txBox="1"/>
-            <p:nvPr/>
-          </p:nvSpPr>
-          <p:spPr>
-            <a:xfrm>
-              <a:off x="3976459" y="4237511"/>
-              <a:ext cx="1978310" cy="307777"/>
-            </a:xfrm>
-            <a:prstGeom prst="rect">
-              <a:avLst/>
-            </a:prstGeom>
-            <a:noFill/>
-          </p:spPr>
-          <p:txBody>
-            <a:bodyPr wrap="square" rtlCol="0">
-              <a:spAutoFit/>
-            </a:bodyPr>
-            <a:lstStyle/>
-            <a:p>
-              <a:pPr algn="ctr"/>
-              <a:r>
-                <a:rPr lang="en-US" sz="1400" b="1" dirty="0">
-                  <a:latin typeface="Arial" panose="020B0604020202020204" pitchFamily="34" charset="0"/>
-                  <a:cs typeface="Arial" panose="020B0604020202020204" pitchFamily="34" charset="0"/>
-                </a:rPr>
-                <a:t>Morphological</a:t>
-              </a:r>
-              <a:endParaRPr lang="en-GB" sz="1400" b="1" dirty="0">
-                <a:latin typeface="Arial" panose="020B0604020202020204" pitchFamily="34" charset="0"/>
-                <a:cs typeface="Arial" panose="020B0604020202020204" pitchFamily="34" charset="0"/>
-              </a:endParaRPr>
-            </a:p>
-          </p:txBody>
-        </p:sp>
-        <p:sp>
-          <p:nvSpPr>
-            <p:cNvPr id="570" name="Rectangle 569">
-              <a:extLst>
-                <a:ext uri="{FF2B5EF4-FFF2-40B4-BE49-F238E27FC236}">
-                  <a16:creationId xmlns:a16="http://schemas.microsoft.com/office/drawing/2014/main" id="{BFA579EF-2E4B-E3F1-16EA-697E5C7CD2F3}"/>
+                  <a16:creationId xmlns:a16="http://schemas.microsoft.com/office/drawing/2014/main" id="{950B5D2C-A1CB-4F75-B12C-0935E807F9E5}"/>
                 </a:ext>
               </a:extLst>
             </p:cNvPr>
@@ -5427,8 +6381,8 @@
           </p:nvSpPr>
           <p:spPr>
             <a:xfrm>
-              <a:off x="5781551" y="4270933"/>
-              <a:ext cx="1978324" cy="1414732"/>
+              <a:off x="1911927" y="7998505"/>
+              <a:ext cx="10104681" cy="6631896"/>
             </a:xfrm>
             <a:prstGeom prst="rect">
               <a:avLst/>
@@ -5436,24 +6390,21 @@
             <a:noFill/>
             <a:ln>
               <a:solidFill>
-                <a:schemeClr val="tx1">
-                  <a:lumMod val="95000"/>
-                  <a:lumOff val="5000"/>
-                </a:schemeClr>
+                <a:schemeClr val="tx1"/>
               </a:solidFill>
             </a:ln>
           </p:spPr>
           <p:style>
             <a:lnRef idx="2">
-              <a:schemeClr val="accent1">
-                <a:shade val="15000"/>
+              <a:schemeClr val="dk1">
+                <a:shade val="50000"/>
               </a:schemeClr>
             </a:lnRef>
             <a:fillRef idx="1">
-              <a:schemeClr val="accent1"/>
+              <a:schemeClr val="dk1"/>
             </a:fillRef>
             <a:effectRef idx="0">
-              <a:schemeClr val="accent1"/>
+              <a:schemeClr val="dk1"/>
             </a:effectRef>
             <a:fontRef idx="minor">
               <a:schemeClr val="lt1"/>
@@ -5464,814 +6415,11 @@
             <a:lstStyle/>
             <a:p>
               <a:pPr algn="ctr"/>
-              <a:endParaRPr lang="en-GB"/>
-            </a:p>
-          </p:txBody>
-        </p:sp>
-        <p:cxnSp>
-          <p:nvCxnSpPr>
-            <p:cNvPr id="571" name="Connecteur droit 570">
-              <a:extLst>
-                <a:ext uri="{FF2B5EF4-FFF2-40B4-BE49-F238E27FC236}">
-                  <a16:creationId xmlns:a16="http://schemas.microsoft.com/office/drawing/2014/main" id="{D5D57BFF-D35D-0C32-2FB0-5E48C026F37B}"/>
-                </a:ext>
-              </a:extLst>
-            </p:cNvPr>
-            <p:cNvCxnSpPr/>
-            <p:nvPr/>
-          </p:nvCxnSpPr>
-          <p:spPr>
-            <a:xfrm>
-              <a:off x="5781551" y="4500312"/>
-              <a:ext cx="1978324" cy="0"/>
-            </a:xfrm>
-            <a:prstGeom prst="line">
-              <a:avLst/>
-            </a:prstGeom>
-          </p:spPr>
-          <p:style>
-            <a:lnRef idx="2">
-              <a:schemeClr val="dk1"/>
-            </a:lnRef>
-            <a:fillRef idx="0">
-              <a:schemeClr val="dk1"/>
-            </a:fillRef>
-            <a:effectRef idx="1">
-              <a:schemeClr val="dk1"/>
-            </a:effectRef>
-            <a:fontRef idx="minor">
-              <a:schemeClr val="tx1"/>
-            </a:fontRef>
-          </p:style>
-        </p:cxnSp>
-        <p:sp>
-          <p:nvSpPr>
-            <p:cNvPr id="572" name="Rectangle 571">
-              <a:extLst>
-                <a:ext uri="{FF2B5EF4-FFF2-40B4-BE49-F238E27FC236}">
-                  <a16:creationId xmlns:a16="http://schemas.microsoft.com/office/drawing/2014/main" id="{4C6805DE-228D-B4E7-AB73-44F130CA57FF}"/>
-                </a:ext>
-              </a:extLst>
-            </p:cNvPr>
-            <p:cNvSpPr/>
-            <p:nvPr/>
-          </p:nvSpPr>
-          <p:spPr>
-            <a:xfrm>
-              <a:off x="7762651" y="4273154"/>
-              <a:ext cx="1978324" cy="1414732"/>
-            </a:xfrm>
-            <a:prstGeom prst="rect">
-              <a:avLst/>
-            </a:prstGeom>
-            <a:noFill/>
-            <a:ln>
-              <a:solidFill>
-                <a:schemeClr val="tx1">
-                  <a:lumMod val="95000"/>
-                  <a:lumOff val="5000"/>
-                </a:schemeClr>
-              </a:solidFill>
-            </a:ln>
-          </p:spPr>
-          <p:style>
-            <a:lnRef idx="2">
-              <a:schemeClr val="accent1">
-                <a:shade val="15000"/>
-              </a:schemeClr>
-            </a:lnRef>
-            <a:fillRef idx="1">
-              <a:schemeClr val="accent1"/>
-            </a:fillRef>
-            <a:effectRef idx="0">
-              <a:schemeClr val="accent1"/>
-            </a:effectRef>
-            <a:fontRef idx="minor">
-              <a:schemeClr val="lt1"/>
-            </a:fontRef>
-          </p:style>
-          <p:txBody>
-            <a:bodyPr rtlCol="0" anchor="ctr"/>
-            <a:lstStyle/>
-            <a:p>
-              <a:pPr algn="ctr"/>
-              <a:endParaRPr lang="en-GB"/>
-            </a:p>
-          </p:txBody>
-        </p:sp>
-        <p:cxnSp>
-          <p:nvCxnSpPr>
-            <p:cNvPr id="573" name="Connecteur droit 572">
-              <a:extLst>
-                <a:ext uri="{FF2B5EF4-FFF2-40B4-BE49-F238E27FC236}">
-                  <a16:creationId xmlns:a16="http://schemas.microsoft.com/office/drawing/2014/main" id="{F29EC175-941D-0E22-B0E4-5DAB6B5D3D53}"/>
-                </a:ext>
-              </a:extLst>
-            </p:cNvPr>
-            <p:cNvCxnSpPr/>
-            <p:nvPr/>
-          </p:nvCxnSpPr>
-          <p:spPr>
-            <a:xfrm>
-              <a:off x="7762651" y="4502533"/>
-              <a:ext cx="1978324" cy="0"/>
-            </a:xfrm>
-            <a:prstGeom prst="line">
-              <a:avLst/>
-            </a:prstGeom>
-          </p:spPr>
-          <p:style>
-            <a:lnRef idx="2">
-              <a:schemeClr val="dk1"/>
-            </a:lnRef>
-            <a:fillRef idx="0">
-              <a:schemeClr val="dk1"/>
-            </a:fillRef>
-            <a:effectRef idx="1">
-              <a:schemeClr val="dk1"/>
-            </a:effectRef>
-            <a:fontRef idx="minor">
-              <a:schemeClr val="tx1"/>
-            </a:fontRef>
-          </p:style>
-        </p:cxnSp>
-        <p:sp>
-          <p:nvSpPr>
-            <p:cNvPr id="574" name="ZoneTexte 573">
-              <a:extLst>
-                <a:ext uri="{FF2B5EF4-FFF2-40B4-BE49-F238E27FC236}">
-                  <a16:creationId xmlns:a16="http://schemas.microsoft.com/office/drawing/2014/main" id="{0713C39D-E4D4-C967-238B-AA0A9DCEBCDF}"/>
-                </a:ext>
-              </a:extLst>
-            </p:cNvPr>
-            <p:cNvSpPr txBox="1"/>
-            <p:nvPr/>
-          </p:nvSpPr>
-          <p:spPr>
-            <a:xfrm>
-              <a:off x="5749244" y="4249006"/>
-              <a:ext cx="1978310" cy="307777"/>
-            </a:xfrm>
-            <a:prstGeom prst="rect">
-              <a:avLst/>
-            </a:prstGeom>
-            <a:noFill/>
-          </p:spPr>
-          <p:txBody>
-            <a:bodyPr wrap="square" rtlCol="0">
-              <a:spAutoFit/>
-            </a:bodyPr>
-            <a:lstStyle/>
-            <a:p>
-              <a:pPr algn="ctr"/>
-              <a:r>
-                <a:rPr lang="en-US" sz="1400" b="1" dirty="0">
-                  <a:latin typeface="Arial" panose="020B0604020202020204" pitchFamily="34" charset="0"/>
-                  <a:cs typeface="Arial" panose="020B0604020202020204" pitchFamily="34" charset="0"/>
-                </a:rPr>
-                <a:t>Life-history</a:t>
-              </a:r>
-              <a:endParaRPr lang="en-GB" sz="1400" b="1" dirty="0">
-                <a:latin typeface="Arial" panose="020B0604020202020204" pitchFamily="34" charset="0"/>
-                <a:cs typeface="Arial" panose="020B0604020202020204" pitchFamily="34" charset="0"/>
-              </a:endParaRPr>
-            </a:p>
-          </p:txBody>
-        </p:sp>
-        <p:sp>
-          <p:nvSpPr>
-            <p:cNvPr id="575" name="ZoneTexte 574">
-              <a:extLst>
-                <a:ext uri="{FF2B5EF4-FFF2-40B4-BE49-F238E27FC236}">
-                  <a16:creationId xmlns:a16="http://schemas.microsoft.com/office/drawing/2014/main" id="{232D98E1-DA76-15DD-7893-F1DA6794E43A}"/>
-                </a:ext>
-              </a:extLst>
-            </p:cNvPr>
-            <p:cNvSpPr txBox="1"/>
-            <p:nvPr/>
-          </p:nvSpPr>
-          <p:spPr>
-            <a:xfrm>
-              <a:off x="9305391" y="173373"/>
-              <a:ext cx="1978310" cy="307777"/>
-            </a:xfrm>
-            <a:prstGeom prst="rect">
-              <a:avLst/>
-            </a:prstGeom>
-            <a:noFill/>
-          </p:spPr>
-          <p:txBody>
-            <a:bodyPr wrap="square" rtlCol="0">
-              <a:spAutoFit/>
-            </a:bodyPr>
-            <a:lstStyle/>
-            <a:p>
-              <a:pPr algn="ctr"/>
-              <a:r>
-                <a:rPr lang="en-US" sz="1400" b="1" dirty="0">
-                  <a:latin typeface="Arial" panose="020B0604020202020204" pitchFamily="34" charset="0"/>
-                  <a:cs typeface="Arial" panose="020B0604020202020204" pitchFamily="34" charset="0"/>
-                </a:rPr>
-                <a:t>Diet</a:t>
-              </a:r>
-              <a:endParaRPr lang="en-GB" sz="1400" b="1" dirty="0">
-                <a:latin typeface="Arial" panose="020B0604020202020204" pitchFamily="34" charset="0"/>
-                <a:cs typeface="Arial" panose="020B0604020202020204" pitchFamily="34" charset="0"/>
-              </a:endParaRPr>
-            </a:p>
-          </p:txBody>
-        </p:sp>
-        <p:pic>
-          <p:nvPicPr>
-            <p:cNvPr id="576" name="Picture 4" descr="Bird Icon 582248 Vector Art at Vecteezy">
-              <a:extLst>
-                <a:ext uri="{FF2B5EF4-FFF2-40B4-BE49-F238E27FC236}">
-                  <a16:creationId xmlns:a16="http://schemas.microsoft.com/office/drawing/2014/main" id="{44568E37-7A28-6C5C-15D5-606643128B98}"/>
-                </a:ext>
-              </a:extLst>
-            </p:cNvPr>
-            <p:cNvPicPr>
-              <a:picLocks noChangeAspect="1" noChangeArrowheads="1"/>
-            </p:cNvPicPr>
-            <p:nvPr/>
-          </p:nvPicPr>
-          <p:blipFill>
-            <a:blip r:embed="rId3">
-              <a:extLst>
-                <a:ext uri="{28A0092B-C50C-407E-A947-70E740481C1C}">
-                  <a14:useLocalDpi xmlns:a14="http://schemas.microsoft.com/office/drawing/2010/main" val="0"/>
-                </a:ext>
-              </a:extLst>
-            </a:blip>
-            <a:stretch>
-              <a:fillRect/>
-            </a:stretch>
-          </p:blipFill>
-          <p:spPr bwMode="auto">
-            <a:xfrm>
-              <a:off x="4569039" y="4605997"/>
-              <a:ext cx="511422" cy="511422"/>
-            </a:xfrm>
-            <a:prstGeom prst="rect">
-              <a:avLst/>
-            </a:prstGeom>
-            <a:noFill/>
-            <a:extLst>
-              <a:ext uri="{909E8E84-426E-40DD-AFC4-6F175D3DCCD1}">
-                <a14:hiddenFill xmlns:a14="http://schemas.microsoft.com/office/drawing/2010/main">
-                  <a:solidFill>
-                    <a:srgbClr val="FFFFFF"/>
-                  </a:solidFill>
-                </a14:hiddenFill>
-              </a:ext>
-            </a:extLst>
-          </p:spPr>
-        </p:pic>
-        <p:pic>
-          <p:nvPicPr>
-            <p:cNvPr id="578" name="Picture 4" descr="Bird Icon 582248 Vector Art at Vecteezy">
-              <a:extLst>
-                <a:ext uri="{FF2B5EF4-FFF2-40B4-BE49-F238E27FC236}">
-                  <a16:creationId xmlns:a16="http://schemas.microsoft.com/office/drawing/2014/main" id="{28A9B509-8D16-0342-27A4-B41C15EAB2C8}"/>
-                </a:ext>
-              </a:extLst>
-            </p:cNvPr>
-            <p:cNvPicPr>
-              <a:picLocks noChangeAspect="1" noChangeArrowheads="1"/>
-            </p:cNvPicPr>
-            <p:nvPr/>
-          </p:nvPicPr>
-          <p:blipFill>
-            <a:blip r:embed="rId3">
-              <a:extLst>
-                <a:ext uri="{28A0092B-C50C-407E-A947-70E740481C1C}">
-                  <a14:useLocalDpi xmlns:a14="http://schemas.microsoft.com/office/drawing/2010/main" val="0"/>
-                </a:ext>
-              </a:extLst>
-            </a:blip>
-            <a:stretch>
-              <a:fillRect/>
-            </a:stretch>
-          </p:blipFill>
-          <p:spPr bwMode="auto">
-            <a:xfrm>
-              <a:off x="8493145" y="4605997"/>
-              <a:ext cx="511422" cy="511422"/>
-            </a:xfrm>
-            <a:prstGeom prst="rect">
-              <a:avLst/>
-            </a:prstGeom>
-            <a:noFill/>
-            <a:extLst>
-              <a:ext uri="{909E8E84-426E-40DD-AFC4-6F175D3DCCD1}">
-                <a14:hiddenFill xmlns:a14="http://schemas.microsoft.com/office/drawing/2010/main">
-                  <a:solidFill>
-                    <a:srgbClr val="FFFFFF"/>
-                  </a:solidFill>
-                </a14:hiddenFill>
-              </a:ext>
-            </a:extLst>
-          </p:spPr>
-        </p:pic>
-        <p:pic>
-          <p:nvPicPr>
-            <p:cNvPr id="580" name="Picture 4" descr="Bird Icon 582248 Vector Art at Vecteezy">
-              <a:extLst>
-                <a:ext uri="{FF2B5EF4-FFF2-40B4-BE49-F238E27FC236}">
-                  <a16:creationId xmlns:a16="http://schemas.microsoft.com/office/drawing/2014/main" id="{1834BA8E-1FBD-6D55-5E2A-964DA7DEF60C}"/>
-                </a:ext>
-              </a:extLst>
-            </p:cNvPr>
-            <p:cNvPicPr>
-              <a:picLocks noChangeAspect="1" noChangeArrowheads="1"/>
-            </p:cNvPicPr>
-            <p:nvPr/>
-          </p:nvPicPr>
-          <p:blipFill>
-            <a:blip r:embed="rId3">
-              <a:extLst>
-                <a:ext uri="{28A0092B-C50C-407E-A947-70E740481C1C}">
-                  <a14:useLocalDpi xmlns:a14="http://schemas.microsoft.com/office/drawing/2010/main" val="0"/>
-                </a:ext>
-              </a:extLst>
-            </a:blip>
-            <a:stretch>
-              <a:fillRect/>
-            </a:stretch>
-          </p:blipFill>
-          <p:spPr bwMode="auto">
-            <a:xfrm>
-              <a:off x="6467340" y="4596406"/>
-              <a:ext cx="511422" cy="511422"/>
-            </a:xfrm>
-            <a:prstGeom prst="rect">
-              <a:avLst/>
-            </a:prstGeom>
-            <a:noFill/>
-            <a:extLst>
-              <a:ext uri="{909E8E84-426E-40DD-AFC4-6F175D3DCCD1}">
-                <a14:hiddenFill xmlns:a14="http://schemas.microsoft.com/office/drawing/2010/main">
-                  <a:solidFill>
-                    <a:srgbClr val="FFFFFF"/>
-                  </a:solidFill>
-                </a14:hiddenFill>
-              </a:ext>
-            </a:extLst>
-          </p:spPr>
-        </p:pic>
-        <p:sp>
-          <p:nvSpPr>
-            <p:cNvPr id="581" name="ZoneTexte 580">
-              <a:extLst>
-                <a:ext uri="{FF2B5EF4-FFF2-40B4-BE49-F238E27FC236}">
-                  <a16:creationId xmlns:a16="http://schemas.microsoft.com/office/drawing/2014/main" id="{1AAAE839-FF83-5298-2E80-4A59A29A30B8}"/>
-                </a:ext>
-              </a:extLst>
-            </p:cNvPr>
-            <p:cNvSpPr txBox="1"/>
-            <p:nvPr/>
-          </p:nvSpPr>
-          <p:spPr>
-            <a:xfrm>
-              <a:off x="161105" y="4471666"/>
-              <a:ext cx="2286964" cy="646331"/>
-            </a:xfrm>
-            <a:prstGeom prst="rect">
-              <a:avLst/>
-            </a:prstGeom>
-            <a:noFill/>
-          </p:spPr>
-          <p:txBody>
-            <a:bodyPr wrap="square" rtlCol="0">
-              <a:spAutoFit/>
-            </a:bodyPr>
-            <a:lstStyle/>
-            <a:p>
-              <a:r>
-                <a:rPr lang="en-US" b="1" dirty="0">
-                  <a:latin typeface="Arial" panose="020B0604020202020204" pitchFamily="34" charset="0"/>
-                  <a:cs typeface="Arial" panose="020B0604020202020204" pitchFamily="34" charset="0"/>
-                </a:rPr>
-                <a:t>Combined</a:t>
-              </a:r>
-            </a:p>
-            <a:p>
-              <a:r>
-                <a:rPr lang="en-US" b="1" dirty="0">
-                  <a:latin typeface="Arial" panose="020B0604020202020204" pitchFamily="34" charset="0"/>
-                  <a:cs typeface="Arial" panose="020B0604020202020204" pitchFamily="34" charset="0"/>
-                </a:rPr>
-                <a:t>trait database</a:t>
-              </a:r>
-              <a:endParaRPr lang="en-GB" b="1" dirty="0">
-                <a:latin typeface="Arial" panose="020B0604020202020204" pitchFamily="34" charset="0"/>
-                <a:cs typeface="Arial" panose="020B0604020202020204" pitchFamily="34" charset="0"/>
-              </a:endParaRPr>
-            </a:p>
-          </p:txBody>
-        </p:sp>
-        <p:cxnSp>
-          <p:nvCxnSpPr>
-            <p:cNvPr id="585" name="Connecteur droit avec flèche 584">
-              <a:extLst>
-                <a:ext uri="{FF2B5EF4-FFF2-40B4-BE49-F238E27FC236}">
-                  <a16:creationId xmlns:a16="http://schemas.microsoft.com/office/drawing/2014/main" id="{3C5513A2-8209-8B50-5B28-22156916128E}"/>
-                </a:ext>
-              </a:extLst>
-            </p:cNvPr>
-            <p:cNvCxnSpPr>
-              <a:cxnSpLocks/>
-            </p:cNvCxnSpPr>
-            <p:nvPr/>
-          </p:nvCxnSpPr>
-          <p:spPr>
-            <a:xfrm>
-              <a:off x="6779964" y="6063635"/>
-              <a:ext cx="2644" cy="545237"/>
-            </a:xfrm>
-            <a:prstGeom prst="straightConnector1">
-              <a:avLst/>
-            </a:prstGeom>
-            <a:ln w="28575">
-              <a:tailEnd type="triangle"/>
-            </a:ln>
-          </p:spPr>
-          <p:style>
-            <a:lnRef idx="1">
-              <a:schemeClr val="dk1"/>
-            </a:lnRef>
-            <a:fillRef idx="0">
-              <a:schemeClr val="dk1"/>
-            </a:fillRef>
-            <a:effectRef idx="0">
-              <a:schemeClr val="dk1"/>
-            </a:effectRef>
-            <a:fontRef idx="minor">
-              <a:schemeClr val="tx1"/>
-            </a:fontRef>
-          </p:style>
-        </p:cxnSp>
-        <p:sp>
-          <p:nvSpPr>
-            <p:cNvPr id="586" name="Accolade fermante 585">
-              <a:extLst>
-                <a:ext uri="{FF2B5EF4-FFF2-40B4-BE49-F238E27FC236}">
-                  <a16:creationId xmlns:a16="http://schemas.microsoft.com/office/drawing/2014/main" id="{9F71BE5E-88C1-9C7A-5473-242EE949A24F}"/>
-                </a:ext>
-              </a:extLst>
-            </p:cNvPr>
-            <p:cNvSpPr/>
-            <p:nvPr/>
-          </p:nvSpPr>
-          <p:spPr>
-            <a:xfrm rot="5400000">
-              <a:off x="6507883" y="3000351"/>
-              <a:ext cx="551033" cy="6026821"/>
-            </a:xfrm>
-            <a:prstGeom prst="rightBrace">
-              <a:avLst/>
-            </a:prstGeom>
-            <a:ln w="19050">
-              <a:prstDash val="solid"/>
-            </a:ln>
-          </p:spPr>
-          <p:style>
-            <a:lnRef idx="1">
-              <a:schemeClr val="dk1"/>
-            </a:lnRef>
-            <a:fillRef idx="0">
-              <a:schemeClr val="dk1"/>
-            </a:fillRef>
-            <a:effectRef idx="0">
-              <a:schemeClr val="dk1"/>
-            </a:effectRef>
-            <a:fontRef idx="minor">
-              <a:schemeClr val="tx1"/>
-            </a:fontRef>
-          </p:style>
-          <p:txBody>
-            <a:bodyPr rtlCol="0" anchor="ctr"/>
-            <a:lstStyle/>
-            <a:p>
-              <a:pPr algn="ctr"/>
-              <a:endParaRPr lang="en-GB"/>
-            </a:p>
-          </p:txBody>
-        </p:sp>
-        <p:sp>
-          <p:nvSpPr>
-            <p:cNvPr id="588" name="Rectangle 587">
-              <a:extLst>
-                <a:ext uri="{FF2B5EF4-FFF2-40B4-BE49-F238E27FC236}">
-                  <a16:creationId xmlns:a16="http://schemas.microsoft.com/office/drawing/2014/main" id="{D9F8A7F7-3273-4328-40E2-D4BD097C6488}"/>
-                </a:ext>
-              </a:extLst>
-            </p:cNvPr>
-            <p:cNvSpPr/>
-            <p:nvPr/>
-          </p:nvSpPr>
-          <p:spPr>
-            <a:xfrm>
-              <a:off x="1985385" y="6566175"/>
-              <a:ext cx="9663276" cy="666506"/>
-            </a:xfrm>
-            <a:prstGeom prst="rect">
-              <a:avLst/>
-            </a:prstGeom>
-            <a:solidFill>
-              <a:schemeClr val="bg1"/>
-            </a:solidFill>
-            <a:ln w="28575"/>
-          </p:spPr>
-          <p:style>
-            <a:lnRef idx="2">
-              <a:schemeClr val="accent1">
-                <a:shade val="15000"/>
-              </a:schemeClr>
-            </a:lnRef>
-            <a:fillRef idx="1">
-              <a:schemeClr val="accent1"/>
-            </a:fillRef>
-            <a:effectRef idx="0">
-              <a:schemeClr val="accent1"/>
-            </a:effectRef>
-            <a:fontRef idx="minor">
-              <a:schemeClr val="lt1"/>
-            </a:fontRef>
-          </p:style>
-          <p:txBody>
-            <a:bodyPr rtlCol="0" anchor="ctr"/>
-            <a:lstStyle/>
-            <a:p>
-              <a:pPr algn="ctr"/>
-              <a:r>
-                <a:rPr lang="en-US" sz="2000" b="1" dirty="0" err="1">
-                  <a:solidFill>
-                    <a:schemeClr val="tx1"/>
-                  </a:solidFill>
-                  <a:latin typeface="Arial" panose="020B0604020202020204" pitchFamily="34" charset="0"/>
-                  <a:cs typeface="Arial" panose="020B0604020202020204" pitchFamily="34" charset="0"/>
-                </a:rPr>
-                <a:t>PCoA</a:t>
-              </a:r>
-              <a:r>
-                <a:rPr lang="en-US" sz="2000" b="1" dirty="0">
-                  <a:solidFill>
-                    <a:schemeClr val="tx1"/>
-                  </a:solidFill>
-                  <a:latin typeface="Arial" panose="020B0604020202020204" pitchFamily="34" charset="0"/>
-                  <a:cs typeface="Arial" panose="020B0604020202020204" pitchFamily="34" charset="0"/>
-                </a:rPr>
-                <a:t> with selected type of traits</a:t>
-              </a:r>
-            </a:p>
-          </p:txBody>
-        </p:sp>
-        <p:sp>
-          <p:nvSpPr>
-            <p:cNvPr id="591" name="Flèche : bas 590">
-              <a:extLst>
-                <a:ext uri="{FF2B5EF4-FFF2-40B4-BE49-F238E27FC236}">
-                  <a16:creationId xmlns:a16="http://schemas.microsoft.com/office/drawing/2014/main" id="{3A06F143-D2D4-2682-CD15-DA277BAECF84}"/>
-                </a:ext>
-              </a:extLst>
-            </p:cNvPr>
-            <p:cNvSpPr/>
-            <p:nvPr/>
-          </p:nvSpPr>
-          <p:spPr>
-            <a:xfrm>
-              <a:off x="2270303" y="7232681"/>
-              <a:ext cx="485798" cy="369332"/>
-            </a:xfrm>
-            <a:prstGeom prst="downArrow">
-              <a:avLst/>
-            </a:prstGeom>
-            <a:solidFill>
-              <a:schemeClr val="tx1"/>
-            </a:solidFill>
-            <a:ln>
-              <a:noFill/>
-            </a:ln>
-          </p:spPr>
-          <p:style>
-            <a:lnRef idx="2">
-              <a:schemeClr val="accent1">
-                <a:shade val="15000"/>
-              </a:schemeClr>
-            </a:lnRef>
-            <a:fillRef idx="1">
-              <a:schemeClr val="accent1"/>
-            </a:fillRef>
-            <a:effectRef idx="0">
-              <a:schemeClr val="accent1"/>
-            </a:effectRef>
-            <a:fontRef idx="minor">
-              <a:schemeClr val="lt1"/>
-            </a:fontRef>
-          </p:style>
-          <p:txBody>
-            <a:bodyPr rtlCol="0" anchor="ctr"/>
-            <a:lstStyle/>
-            <a:p>
-              <a:pPr algn="ctr"/>
-              <a:endParaRPr lang="en-GB"/>
-            </a:p>
-          </p:txBody>
-        </p:sp>
-        <p:sp>
-          <p:nvSpPr>
-            <p:cNvPr id="593" name="Flèche : bas 592">
-              <a:extLst>
-                <a:ext uri="{FF2B5EF4-FFF2-40B4-BE49-F238E27FC236}">
-                  <a16:creationId xmlns:a16="http://schemas.microsoft.com/office/drawing/2014/main" id="{0791DCC1-8ECA-1AC2-C3AE-65BB606BE63B}"/>
-                </a:ext>
-              </a:extLst>
-            </p:cNvPr>
-            <p:cNvSpPr/>
-            <p:nvPr/>
-          </p:nvSpPr>
-          <p:spPr>
-            <a:xfrm>
-              <a:off x="6530331" y="7232681"/>
-              <a:ext cx="485798" cy="369332"/>
-            </a:xfrm>
-            <a:prstGeom prst="downArrow">
-              <a:avLst/>
-            </a:prstGeom>
-            <a:solidFill>
-              <a:schemeClr val="tx1"/>
-            </a:solidFill>
-            <a:ln>
-              <a:noFill/>
-            </a:ln>
-          </p:spPr>
-          <p:style>
-            <a:lnRef idx="2">
-              <a:schemeClr val="accent1">
-                <a:shade val="15000"/>
-              </a:schemeClr>
-            </a:lnRef>
-            <a:fillRef idx="1">
-              <a:schemeClr val="accent1"/>
-            </a:fillRef>
-            <a:effectRef idx="0">
-              <a:schemeClr val="accent1"/>
-            </a:effectRef>
-            <a:fontRef idx="minor">
-              <a:schemeClr val="lt1"/>
-            </a:fontRef>
-          </p:style>
-          <p:txBody>
-            <a:bodyPr rtlCol="0" anchor="ctr"/>
-            <a:lstStyle/>
-            <a:p>
-              <a:pPr algn="ctr"/>
-              <a:endParaRPr lang="en-GB"/>
-            </a:p>
-          </p:txBody>
-        </p:sp>
-        <p:sp>
-          <p:nvSpPr>
-            <p:cNvPr id="594" name="Flèche : bas 593">
-              <a:extLst>
-                <a:ext uri="{FF2B5EF4-FFF2-40B4-BE49-F238E27FC236}">
-                  <a16:creationId xmlns:a16="http://schemas.microsoft.com/office/drawing/2014/main" id="{70E9CCE1-ED5E-972E-5EE7-01B2F8FD2D2F}"/>
-                </a:ext>
-              </a:extLst>
-            </p:cNvPr>
-            <p:cNvSpPr/>
-            <p:nvPr/>
-          </p:nvSpPr>
-          <p:spPr>
-            <a:xfrm>
-              <a:off x="10701576" y="7232681"/>
-              <a:ext cx="485798" cy="369332"/>
-            </a:xfrm>
-            <a:prstGeom prst="downArrow">
-              <a:avLst/>
-            </a:prstGeom>
-            <a:solidFill>
-              <a:schemeClr val="tx1"/>
-            </a:solidFill>
-            <a:ln>
-              <a:noFill/>
-            </a:ln>
-          </p:spPr>
-          <p:style>
-            <a:lnRef idx="2">
-              <a:schemeClr val="accent1">
-                <a:shade val="15000"/>
-              </a:schemeClr>
-            </a:lnRef>
-            <a:fillRef idx="1">
-              <a:schemeClr val="accent1"/>
-            </a:fillRef>
-            <a:effectRef idx="0">
-              <a:schemeClr val="accent1"/>
-            </a:effectRef>
-            <a:fontRef idx="minor">
-              <a:schemeClr val="lt1"/>
-            </a:fontRef>
-          </p:style>
-          <p:txBody>
-            <a:bodyPr rtlCol="0" anchor="ctr"/>
-            <a:lstStyle/>
-            <a:p>
-              <a:pPr algn="ctr"/>
-              <a:endParaRPr lang="en-GB"/>
+              <a:endParaRPr lang="fr-FR"/>
             </a:p>
           </p:txBody>
         </p:sp>
       </p:grpSp>
-      <p:sp>
-        <p:nvSpPr>
-          <p:cNvPr id="3" name="Rectangle 2">
-            <a:extLst>
-              <a:ext uri="{FF2B5EF4-FFF2-40B4-BE49-F238E27FC236}">
-                <a16:creationId xmlns:a16="http://schemas.microsoft.com/office/drawing/2014/main" id="{950B5D2C-A1CB-4F75-B12C-0935E807F9E5}"/>
-              </a:ext>
-            </a:extLst>
-          </p:cNvPr>
-          <p:cNvSpPr/>
-          <p:nvPr/>
-        </p:nvSpPr>
-        <p:spPr>
-          <a:xfrm>
-            <a:off x="1911927" y="7998505"/>
-            <a:ext cx="10104681" cy="6631896"/>
-          </a:xfrm>
-          <a:prstGeom prst="rect">
-            <a:avLst/>
-          </a:prstGeom>
-          <a:noFill/>
-          <a:ln>
-            <a:solidFill>
-              <a:schemeClr val="tx1"/>
-            </a:solidFill>
-          </a:ln>
-        </p:spPr>
-        <p:style>
-          <a:lnRef idx="2">
-            <a:schemeClr val="dk1">
-              <a:shade val="50000"/>
-            </a:schemeClr>
-          </a:lnRef>
-          <a:fillRef idx="1">
-            <a:schemeClr val="dk1"/>
-          </a:fillRef>
-          <a:effectRef idx="0">
-            <a:schemeClr val="dk1"/>
-          </a:effectRef>
-          <a:fontRef idx="minor">
-            <a:schemeClr val="lt1"/>
-          </a:fontRef>
-        </p:style>
-        <p:txBody>
-          <a:bodyPr rtlCol="0" anchor="ctr"/>
-          <a:lstStyle/>
-          <a:p>
-            <a:pPr algn="ctr"/>
-            <a:endParaRPr lang="fr-FR"/>
-          </a:p>
-        </p:txBody>
-      </p:sp>
-      <p:pic>
-        <p:nvPicPr>
-          <p:cNvPr id="29" name="Image 28">
-            <a:extLst>
-              <a:ext uri="{FF2B5EF4-FFF2-40B4-BE49-F238E27FC236}">
-                <a16:creationId xmlns:a16="http://schemas.microsoft.com/office/drawing/2014/main" id="{722AC837-A471-B1A7-82B6-6782AC009D56}"/>
-              </a:ext>
-            </a:extLst>
-          </p:cNvPr>
-          <p:cNvPicPr>
-            <a:picLocks noChangeAspect="1"/>
-          </p:cNvPicPr>
-          <p:nvPr/>
-        </p:nvPicPr>
-        <p:blipFill>
-          <a:blip r:embed="rId4">
-            <a:extLst>
-              <a:ext uri="{28A0092B-C50C-407E-A947-70E740481C1C}">
-                <a14:useLocalDpi xmlns:a14="http://schemas.microsoft.com/office/drawing/2010/main" val="0"/>
-              </a:ext>
-            </a:extLst>
-          </a:blip>
-          <a:stretch>
-            <a:fillRect/>
-          </a:stretch>
-        </p:blipFill>
-        <p:spPr>
-          <a:xfrm>
-            <a:off x="2023033" y="8227453"/>
-            <a:ext cx="9871389" cy="6345892"/>
-          </a:xfrm>
-          <a:prstGeom prst="rect">
-            <a:avLst/>
-          </a:prstGeom>
-        </p:spPr>
-      </p:pic>
     </p:spTree>
     <p:extLst>
       <p:ext uri="{BB962C8B-B14F-4D97-AF65-F5344CB8AC3E}">
